--- a/docs/tech/ezApprovalG/문서유통 설치/문서유통 모듈 설치가이드.pptx
+++ b/docs/tech/ezApprovalG/문서유통 설치/문서유통 모듈 설치가이드.pptx
@@ -7,13 +7,20 @@
   <p:sldIdLst>
     <p:sldId id="256" r:id="rId2"/>
     <p:sldId id="257" r:id="rId3"/>
-    <p:sldId id="261" r:id="rId4"/>
-    <p:sldId id="262" r:id="rId5"/>
-    <p:sldId id="263" r:id="rId6"/>
-    <p:sldId id="260" r:id="rId7"/>
-    <p:sldId id="258" r:id="rId8"/>
-    <p:sldId id="265" r:id="rId9"/>
-    <p:sldId id="264" r:id="rId10"/>
+    <p:sldId id="266" r:id="rId4"/>
+    <p:sldId id="267" r:id="rId5"/>
+    <p:sldId id="269" r:id="rId6"/>
+    <p:sldId id="268" r:id="rId7"/>
+    <p:sldId id="270" r:id="rId8"/>
+    <p:sldId id="261" r:id="rId9"/>
+    <p:sldId id="262" r:id="rId10"/>
+    <p:sldId id="271" r:id="rId11"/>
+    <p:sldId id="263" r:id="rId12"/>
+    <p:sldId id="260" r:id="rId13"/>
+    <p:sldId id="272" r:id="rId14"/>
+    <p:sldId id="258" r:id="rId15"/>
+    <p:sldId id="265" r:id="rId16"/>
+    <p:sldId id="264" r:id="rId17"/>
   </p:sldIdLst>
   <p:sldSz cx="12192000" cy="6858000"/>
   <p:notesSz cx="6858000" cy="9144000"/>
@@ -251,7 +258,7 @@
           <a:p>
             <a:fld id="{50EEB286-2530-481D-BB2C-E75D99E91DD0}" type="datetimeFigureOut">
               <a:rPr lang="ko-KR" altLang="en-US" smtClean="0"/>
-              <a:t>2019-12-13</a:t>
+              <a:t>2019-12-24</a:t>
             </a:fld>
             <a:endParaRPr lang="ko-KR" altLang="en-US"/>
           </a:p>
@@ -421,7 +428,7 @@
           <a:p>
             <a:fld id="{50EEB286-2530-481D-BB2C-E75D99E91DD0}" type="datetimeFigureOut">
               <a:rPr lang="ko-KR" altLang="en-US" smtClean="0"/>
-              <a:t>2019-12-13</a:t>
+              <a:t>2019-12-24</a:t>
             </a:fld>
             <a:endParaRPr lang="ko-KR" altLang="en-US"/>
           </a:p>
@@ -601,7 +608,7 @@
           <a:p>
             <a:fld id="{50EEB286-2530-481D-BB2C-E75D99E91DD0}" type="datetimeFigureOut">
               <a:rPr lang="ko-KR" altLang="en-US" smtClean="0"/>
-              <a:t>2019-12-13</a:t>
+              <a:t>2019-12-24</a:t>
             </a:fld>
             <a:endParaRPr lang="ko-KR" altLang="en-US"/>
           </a:p>
@@ -771,7 +778,7 @@
           <a:p>
             <a:fld id="{50EEB286-2530-481D-BB2C-E75D99E91DD0}" type="datetimeFigureOut">
               <a:rPr lang="ko-KR" altLang="en-US" smtClean="0"/>
-              <a:t>2019-12-13</a:t>
+              <a:t>2019-12-24</a:t>
             </a:fld>
             <a:endParaRPr lang="ko-KR" altLang="en-US"/>
           </a:p>
@@ -1017,7 +1024,7 @@
           <a:p>
             <a:fld id="{50EEB286-2530-481D-BB2C-E75D99E91DD0}" type="datetimeFigureOut">
               <a:rPr lang="ko-KR" altLang="en-US" smtClean="0"/>
-              <a:t>2019-12-13</a:t>
+              <a:t>2019-12-24</a:t>
             </a:fld>
             <a:endParaRPr lang="ko-KR" altLang="en-US"/>
           </a:p>
@@ -1249,7 +1256,7 @@
           <a:p>
             <a:fld id="{50EEB286-2530-481D-BB2C-E75D99E91DD0}" type="datetimeFigureOut">
               <a:rPr lang="ko-KR" altLang="en-US" smtClean="0"/>
-              <a:t>2019-12-13</a:t>
+              <a:t>2019-12-24</a:t>
             </a:fld>
             <a:endParaRPr lang="ko-KR" altLang="en-US"/>
           </a:p>
@@ -1616,7 +1623,7 @@
           <a:p>
             <a:fld id="{50EEB286-2530-481D-BB2C-E75D99E91DD0}" type="datetimeFigureOut">
               <a:rPr lang="ko-KR" altLang="en-US" smtClean="0"/>
-              <a:t>2019-12-13</a:t>
+              <a:t>2019-12-24</a:t>
             </a:fld>
             <a:endParaRPr lang="ko-KR" altLang="en-US"/>
           </a:p>
@@ -1734,7 +1741,7 @@
           <a:p>
             <a:fld id="{50EEB286-2530-481D-BB2C-E75D99E91DD0}" type="datetimeFigureOut">
               <a:rPr lang="ko-KR" altLang="en-US" smtClean="0"/>
-              <a:t>2019-12-13</a:t>
+              <a:t>2019-12-24</a:t>
             </a:fld>
             <a:endParaRPr lang="ko-KR" altLang="en-US"/>
           </a:p>
@@ -1829,7 +1836,7 @@
           <a:p>
             <a:fld id="{50EEB286-2530-481D-BB2C-E75D99E91DD0}" type="datetimeFigureOut">
               <a:rPr lang="ko-KR" altLang="en-US" smtClean="0"/>
-              <a:t>2019-12-13</a:t>
+              <a:t>2019-12-24</a:t>
             </a:fld>
             <a:endParaRPr lang="ko-KR" altLang="en-US"/>
           </a:p>
@@ -2106,7 +2113,7 @@
           <a:p>
             <a:fld id="{50EEB286-2530-481D-BB2C-E75D99E91DD0}" type="datetimeFigureOut">
               <a:rPr lang="ko-KR" altLang="en-US" smtClean="0"/>
-              <a:t>2019-12-13</a:t>
+              <a:t>2019-12-24</a:t>
             </a:fld>
             <a:endParaRPr lang="ko-KR" altLang="en-US"/>
           </a:p>
@@ -2359,7 +2366,7 @@
           <a:p>
             <a:fld id="{50EEB286-2530-481D-BB2C-E75D99E91DD0}" type="datetimeFigureOut">
               <a:rPr lang="ko-KR" altLang="en-US" smtClean="0"/>
-              <a:t>2019-12-13</a:t>
+              <a:t>2019-12-24</a:t>
             </a:fld>
             <a:endParaRPr lang="ko-KR" altLang="en-US"/>
           </a:p>
@@ -2572,7 +2579,7 @@
           <a:p>
             <a:fld id="{50EEB286-2530-481D-BB2C-E75D99E91DD0}" type="datetimeFigureOut">
               <a:rPr lang="ko-KR" altLang="en-US" smtClean="0"/>
-              <a:t>2019-12-13</a:t>
+              <a:t>2019-12-24</a:t>
             </a:fld>
             <a:endParaRPr lang="ko-KR" altLang="en-US"/>
           </a:p>
@@ -3055,6 +3062,2580 @@
 </p:sld>
 </file>
 
+<file path=ppt/slides/slide10.xml><?xml version="1.0" encoding="utf-8"?>
+<p:sld xmlns:a="http://schemas.openxmlformats.org/drawingml/2006/main" xmlns:r="http://schemas.openxmlformats.org/officeDocument/2006/relationships" xmlns:p="http://schemas.openxmlformats.org/presentationml/2006/main">
+  <p:cSld>
+    <p:spTree>
+      <p:nvGrpSpPr>
+        <p:cNvPr id="1" name=""/>
+        <p:cNvGrpSpPr/>
+        <p:nvPr/>
+      </p:nvGrpSpPr>
+      <p:grpSpPr>
+        <a:xfrm>
+          <a:off x="0" y="0"/>
+          <a:ext cx="0" cy="0"/>
+          <a:chOff x="0" y="0"/>
+          <a:chExt cx="0" cy="0"/>
+        </a:xfrm>
+      </p:grpSpPr>
+      <p:sp>
+        <p:nvSpPr>
+          <p:cNvPr id="3" name="TextBox 2"/>
+          <p:cNvSpPr txBox="1"/>
+          <p:nvPr/>
+        </p:nvSpPr>
+        <p:spPr>
+          <a:xfrm>
+            <a:off x="948690" y="651510"/>
+            <a:ext cx="10469880" cy="3108543"/>
+          </a:xfrm>
+          <a:prstGeom prst="rect">
+            <a:avLst/>
+          </a:prstGeom>
+          <a:noFill/>
+        </p:spPr>
+        <p:txBody>
+          <a:bodyPr wrap="square" rtlCol="0">
+            <a:spAutoFit/>
+          </a:bodyPr>
+          <a:lstStyle/>
+          <a:p>
+            <a:r>
+              <a:rPr lang="ko-KR" altLang="en-US" sz="2000" b="1" dirty="0" smtClean="0"/>
+              <a:t>유통서버에서</a:t>
+            </a:r>
+            <a:endParaRPr lang="en-US" altLang="ko-KR" sz="1600" b="1" dirty="0" smtClean="0"/>
+          </a:p>
+          <a:p>
+            <a:pPr marL="342900" indent="-342900">
+              <a:buAutoNum type="arabicPeriod"/>
+            </a:pPr>
+            <a:r>
+              <a:rPr lang="en-US" altLang="ko-KR" sz="1600" dirty="0" smtClean="0"/>
+              <a:t>GPKI </a:t>
+            </a:r>
+            <a:r>
+              <a:rPr lang="ko-KR" altLang="en-US" sz="1600" dirty="0" smtClean="0"/>
+              <a:t>모듈 설정 방법</a:t>
+            </a:r>
+            <a:r>
+              <a:rPr lang="en-US" altLang="ko-KR" sz="1600" dirty="0" smtClean="0"/>
+              <a:t>.</a:t>
+            </a:r>
+          </a:p>
+          <a:p>
+            <a:pPr marL="800100" lvl="1" indent="-342900">
+              <a:buAutoNum type="arabicPeriod"/>
+            </a:pPr>
+            <a:r>
+              <a:rPr lang="en-US" altLang="ko-KR" sz="1600" dirty="0" smtClean="0"/>
+              <a:t>gpkiapiV1.4.0.0_Linux_2.6.9-34.26AX_32bit_20170501.tgz </a:t>
+            </a:r>
+            <a:r>
+              <a:rPr lang="ko-KR" altLang="en-US" sz="1600" dirty="0" smtClean="0"/>
+              <a:t>를 사용</a:t>
+            </a:r>
+            <a:r>
+              <a:rPr lang="en-US" altLang="ko-KR" sz="1600" dirty="0" smtClean="0"/>
+              <a:t>. </a:t>
+            </a:r>
+            <a:r>
+              <a:rPr lang="ko-KR" altLang="en-US" sz="1600" dirty="0" smtClean="0"/>
+              <a:t>압축 해제</a:t>
+            </a:r>
+            <a:endParaRPr lang="en-US" altLang="ko-KR" sz="1600" dirty="0" smtClean="0"/>
+          </a:p>
+          <a:p>
+            <a:pPr marL="800100" lvl="1" indent="-342900">
+              <a:buAutoNum type="arabicPeriod"/>
+            </a:pPr>
+            <a:r>
+              <a:rPr lang="ko-KR" altLang="en-US" sz="1600" dirty="0" smtClean="0"/>
+              <a:t>압축 해제하여 생성된 폴더 안에 </a:t>
+            </a:r>
+            <a:r>
+              <a:rPr lang="en-US" altLang="ko-KR" sz="1600" dirty="0" err="1" smtClean="0"/>
+              <a:t>conf</a:t>
+            </a:r>
+            <a:r>
+              <a:rPr lang="en-US" altLang="ko-KR" sz="1600" dirty="0" smtClean="0"/>
+              <a:t>/</a:t>
+            </a:r>
+            <a:r>
+              <a:rPr lang="en-US" altLang="ko-KR" sz="1600" dirty="0" err="1" smtClean="0"/>
+              <a:t>gpkiapi.conf</a:t>
+            </a:r>
+            <a:r>
+              <a:rPr lang="en-US" altLang="ko-KR" sz="1600" dirty="0" smtClean="0"/>
+              <a:t> </a:t>
+            </a:r>
+            <a:r>
+              <a:rPr lang="ko-KR" altLang="en-US" sz="1600" dirty="0" smtClean="0"/>
+              <a:t>파일을 </a:t>
+            </a:r>
+            <a:r>
+              <a:rPr lang="en-US" altLang="ko-KR" sz="1600" dirty="0" smtClean="0"/>
+              <a:t>relay/</a:t>
+            </a:r>
+            <a:r>
+              <a:rPr lang="en-US" altLang="ko-KR" sz="1600" dirty="0" err="1" smtClean="0"/>
+              <a:t>config</a:t>
+            </a:r>
+            <a:r>
+              <a:rPr lang="en-US" altLang="ko-KR" sz="1600" dirty="0" smtClean="0"/>
+              <a:t>/</a:t>
+            </a:r>
+            <a:r>
+              <a:rPr lang="ko-KR" altLang="en-US" sz="1600" dirty="0" smtClean="0"/>
+              <a:t>에 파일과 교체</a:t>
+            </a:r>
+            <a:endParaRPr lang="en-US" altLang="ko-KR" sz="1600" dirty="0" smtClean="0"/>
+          </a:p>
+          <a:p>
+            <a:pPr marL="800100" lvl="1" indent="-342900">
+              <a:buAutoNum type="arabicPeriod"/>
+            </a:pPr>
+            <a:r>
+              <a:rPr lang="ko-KR" altLang="en-US" sz="1600" dirty="0" smtClean="0"/>
+              <a:t>압축 해제하여 생성된 폴더 안에 </a:t>
+            </a:r>
+            <a:r>
+              <a:rPr lang="en-US" altLang="ko-KR" sz="1600" dirty="0" smtClean="0"/>
+              <a:t>lib/ </a:t>
+            </a:r>
+            <a:r>
+              <a:rPr lang="ko-KR" altLang="en-US" sz="1600" dirty="0" smtClean="0"/>
+              <a:t>안에 모든 파일을 </a:t>
+            </a:r>
+            <a:r>
+              <a:rPr lang="en-US" altLang="ko-KR" sz="1600" dirty="0" smtClean="0"/>
+              <a:t>relay/lib</a:t>
+            </a:r>
+            <a:r>
+              <a:rPr lang="ko-KR" altLang="en-US" sz="1600" dirty="0" smtClean="0"/>
+              <a:t>로 복사</a:t>
+            </a:r>
+            <a:r>
+              <a:rPr lang="en-US" altLang="ko-KR" sz="1600" dirty="0" smtClean="0"/>
+              <a:t>.</a:t>
+            </a:r>
+          </a:p>
+          <a:p>
+            <a:pPr marL="800100" lvl="1" indent="-342900">
+              <a:buAutoNum type="arabicPeriod"/>
+            </a:pPr>
+            <a:r>
+              <a:rPr lang="en-US" altLang="ko-KR" sz="1600" dirty="0" smtClean="0"/>
+              <a:t>32bitso </a:t>
+            </a:r>
+            <a:r>
+              <a:rPr lang="ko-KR" altLang="en-US" sz="1600" dirty="0" smtClean="0"/>
+              <a:t>모음을 압축해제하여 </a:t>
+            </a:r>
+            <a:r>
+              <a:rPr lang="en-US" altLang="ko-KR" sz="1600" dirty="0" smtClean="0"/>
+              <a:t>relay/lib </a:t>
+            </a:r>
+            <a:r>
+              <a:rPr lang="ko-KR" altLang="en-US" sz="1600" dirty="0" err="1" smtClean="0"/>
+              <a:t>폴더안에</a:t>
+            </a:r>
+            <a:r>
+              <a:rPr lang="ko-KR" altLang="en-US" sz="1600" dirty="0" smtClean="0"/>
+              <a:t> 위치</a:t>
+            </a:r>
+            <a:r>
+              <a:rPr lang="en-US" altLang="ko-KR" sz="1600" dirty="0" smtClean="0"/>
+              <a:t>.</a:t>
+            </a:r>
+          </a:p>
+          <a:p>
+            <a:pPr marL="1257300" lvl="2" indent="-342900">
+              <a:buAutoNum type="arabicPeriod"/>
+            </a:pPr>
+            <a:r>
+              <a:rPr lang="en-US" altLang="ko-KR" sz="1600" dirty="0" smtClean="0"/>
+              <a:t>relay/lib </a:t>
+            </a:r>
+            <a:r>
+              <a:rPr lang="ko-KR" altLang="en-US" sz="1600" dirty="0" smtClean="0"/>
+              <a:t>에서 </a:t>
+            </a:r>
+            <a:r>
+              <a:rPr lang="en-US" altLang="ko-KR" sz="1600" dirty="0" err="1" smtClean="0"/>
+              <a:t>ldd</a:t>
+            </a:r>
+            <a:r>
+              <a:rPr lang="en-US" altLang="ko-KR" sz="1600" dirty="0" smtClean="0"/>
+              <a:t> </a:t>
+            </a:r>
+            <a:r>
+              <a:rPr lang="en-US" altLang="ko-KR" sz="1600" dirty="0" err="1" smtClean="0"/>
+              <a:t>gpkiapi_info</a:t>
+            </a:r>
+            <a:r>
+              <a:rPr lang="en-US" altLang="ko-KR" sz="1600" dirty="0" smtClean="0"/>
+              <a:t>, </a:t>
+            </a:r>
+            <a:r>
+              <a:rPr lang="en-US" altLang="ko-KR" sz="1600" dirty="0" err="1" smtClean="0"/>
+              <a:t>ldd</a:t>
+            </a:r>
+            <a:r>
+              <a:rPr lang="en-US" altLang="ko-KR" sz="1600" dirty="0" smtClean="0"/>
+              <a:t> libgpkiapi.so, </a:t>
+            </a:r>
+            <a:r>
+              <a:rPr lang="en-US" altLang="ko-KR" sz="1600" dirty="0" err="1" smtClean="0"/>
+              <a:t>ldd</a:t>
+            </a:r>
+            <a:r>
+              <a:rPr lang="en-US" altLang="ko-KR" sz="1600" dirty="0"/>
+              <a:t> </a:t>
+            </a:r>
+            <a:r>
+              <a:rPr lang="en-US" altLang="ko-KR" sz="1600" dirty="0" smtClean="0"/>
+              <a:t>liblber.so, </a:t>
+            </a:r>
+            <a:r>
+              <a:rPr lang="en-US" altLang="ko-KR" sz="1600" dirty="0" err="1" smtClean="0"/>
+              <a:t>ldd</a:t>
+            </a:r>
+            <a:r>
+              <a:rPr lang="en-US" altLang="ko-KR" sz="1600" dirty="0" smtClean="0"/>
+              <a:t> libldap.so</a:t>
+            </a:r>
+            <a:r>
+              <a:rPr lang="ko-KR" altLang="en-US" sz="1600" dirty="0" smtClean="0"/>
+              <a:t>로 의존성을 확인하면서 연결 안된 것은 </a:t>
+            </a:r>
+            <a:r>
+              <a:rPr lang="ko-KR" altLang="en-US" sz="1600" dirty="0" err="1" smtClean="0"/>
+              <a:t>연결해줘야하는데</a:t>
+            </a:r>
+            <a:r>
+              <a:rPr lang="en-US" altLang="ko-KR" sz="1600" dirty="0"/>
+              <a:t> </a:t>
+            </a:r>
+            <a:r>
+              <a:rPr lang="ko-KR" altLang="en-US" sz="1600" dirty="0" smtClean="0"/>
+              <a:t>보통 </a:t>
+            </a:r>
+            <a:r>
+              <a:rPr lang="en-US" altLang="ko-KR" sz="1600" dirty="0" smtClean="0"/>
+              <a:t>32bitso</a:t>
+            </a:r>
+            <a:r>
+              <a:rPr lang="ko-KR" altLang="en-US" sz="1600" dirty="0" smtClean="0"/>
+              <a:t>안에 있으므로 </a:t>
+            </a:r>
+            <a:r>
+              <a:rPr lang="ko-KR" altLang="en-US" sz="1600" dirty="0" err="1" smtClean="0"/>
+              <a:t>심볼릭</a:t>
+            </a:r>
+            <a:r>
+              <a:rPr lang="ko-KR" altLang="en-US" sz="1600" dirty="0" smtClean="0"/>
+              <a:t> 링크로 필요한 파일을 이름 같게 </a:t>
+            </a:r>
+            <a:r>
+              <a:rPr lang="ko-KR" altLang="en-US" sz="1600" dirty="0" err="1" smtClean="0"/>
+              <a:t>위치시켜줌</a:t>
+            </a:r>
+            <a:r>
+              <a:rPr lang="en-US" altLang="ko-KR" sz="1600" dirty="0" smtClean="0"/>
+              <a:t>. </a:t>
+            </a:r>
+            <a:r>
+              <a:rPr lang="ko-KR" altLang="en-US" sz="1600" dirty="0" smtClean="0"/>
+              <a:t>예는 아래</a:t>
+            </a:r>
+            <a:endParaRPr lang="en-US" altLang="ko-KR" sz="1600" dirty="0" smtClean="0"/>
+          </a:p>
+          <a:p>
+            <a:pPr marL="1257300" lvl="2" indent="-342900">
+              <a:buAutoNum type="arabicPeriod"/>
+            </a:pPr>
+            <a:r>
+              <a:rPr lang="en-US" altLang="ko-KR" sz="1600" dirty="0" smtClean="0"/>
+              <a:t>ln -s liblber.so liblber.so.7</a:t>
+            </a:r>
+          </a:p>
+          <a:p>
+            <a:pPr marL="1257300" lvl="2" indent="-342900">
+              <a:buAutoNum type="arabicPeriod"/>
+            </a:pPr>
+            <a:r>
+              <a:rPr lang="en-US" altLang="ko-KR" sz="1600" dirty="0" smtClean="0"/>
+              <a:t>ln -</a:t>
+            </a:r>
+            <a:r>
+              <a:rPr lang="en-US" altLang="ko-KR" sz="1600" dirty="0"/>
+              <a:t>s </a:t>
+            </a:r>
+            <a:r>
+              <a:rPr lang="en-US" altLang="ko-KR" sz="1600" dirty="0" smtClean="0"/>
+              <a:t>32bitso/libk5crypto.so.3.1 </a:t>
+            </a:r>
+            <a:r>
+              <a:rPr lang="en-US" altLang="ko-KR" sz="1600" dirty="0"/>
+              <a:t>libk5crypto.so.3</a:t>
+            </a:r>
+            <a:endParaRPr lang="en-US" altLang="ko-KR" sz="1600" dirty="0" smtClean="0"/>
+          </a:p>
+          <a:p>
+            <a:pPr marL="800100" lvl="1" indent="-342900">
+              <a:buAutoNum type="arabicPeriod"/>
+            </a:pPr>
+            <a:endParaRPr lang="en-US" altLang="ko-KR" sz="1600" dirty="0"/>
+          </a:p>
+        </p:txBody>
+      </p:sp>
+      <p:pic>
+        <p:nvPicPr>
+          <p:cNvPr id="2" name="그림 1"/>
+          <p:cNvPicPr>
+            <a:picLocks noChangeAspect="1"/>
+          </p:cNvPicPr>
+          <p:nvPr/>
+        </p:nvPicPr>
+        <p:blipFill>
+          <a:blip r:embed="rId2"/>
+          <a:stretch>
+            <a:fillRect/>
+          </a:stretch>
+        </p:blipFill>
+        <p:spPr>
+          <a:xfrm>
+            <a:off x="1243542" y="3488267"/>
+            <a:ext cx="5585442" cy="2799292"/>
+          </a:xfrm>
+          <a:prstGeom prst="rect">
+            <a:avLst/>
+          </a:prstGeom>
+        </p:spPr>
+      </p:pic>
+    </p:spTree>
+    <p:extLst>
+      <p:ext uri="{BB962C8B-B14F-4D97-AF65-F5344CB8AC3E}">
+        <p14:creationId xmlns:p14="http://schemas.microsoft.com/office/powerpoint/2010/main" val="2096019704"/>
+      </p:ext>
+    </p:extLst>
+  </p:cSld>
+  <p:clrMapOvr>
+    <a:masterClrMapping/>
+  </p:clrMapOvr>
+</p:sld>
+</file>
+
+<file path=ppt/slides/slide11.xml><?xml version="1.0" encoding="utf-8"?>
+<p:sld xmlns:a="http://schemas.openxmlformats.org/drawingml/2006/main" xmlns:r="http://schemas.openxmlformats.org/officeDocument/2006/relationships" xmlns:p="http://schemas.openxmlformats.org/presentationml/2006/main">
+  <p:cSld>
+    <p:spTree>
+      <p:nvGrpSpPr>
+        <p:cNvPr id="1" name=""/>
+        <p:cNvGrpSpPr/>
+        <p:nvPr/>
+      </p:nvGrpSpPr>
+      <p:grpSpPr>
+        <a:xfrm>
+          <a:off x="0" y="0"/>
+          <a:ext cx="0" cy="0"/>
+          <a:chOff x="0" y="0"/>
+          <a:chExt cx="0" cy="0"/>
+        </a:xfrm>
+      </p:grpSpPr>
+      <p:sp>
+        <p:nvSpPr>
+          <p:cNvPr id="3" name="TextBox 2"/>
+          <p:cNvSpPr txBox="1"/>
+          <p:nvPr/>
+        </p:nvSpPr>
+        <p:spPr>
+          <a:xfrm>
+            <a:off x="948690" y="651510"/>
+            <a:ext cx="10469880" cy="1384995"/>
+          </a:xfrm>
+          <a:prstGeom prst="rect">
+            <a:avLst/>
+          </a:prstGeom>
+          <a:noFill/>
+        </p:spPr>
+        <p:txBody>
+          <a:bodyPr wrap="square" rtlCol="0">
+            <a:spAutoFit/>
+          </a:bodyPr>
+          <a:lstStyle/>
+          <a:p>
+            <a:r>
+              <a:rPr lang="ko-KR" altLang="en-US" sz="2000" b="1" dirty="0" smtClean="0"/>
+              <a:t>유통서버에서</a:t>
+            </a:r>
+            <a:endParaRPr lang="en-US" altLang="ko-KR" sz="1600" b="1" dirty="0" smtClean="0"/>
+          </a:p>
+          <a:p>
+            <a:pPr marL="342900" indent="-342900">
+              <a:buAutoNum type="arabicPeriod"/>
+            </a:pPr>
+            <a:r>
+              <a:rPr lang="en-US" altLang="ko-KR" sz="1600" dirty="0" smtClean="0"/>
+              <a:t>GPKI </a:t>
+            </a:r>
+            <a:r>
+              <a:rPr lang="ko-KR" altLang="en-US" sz="1600" dirty="0" smtClean="0"/>
+              <a:t>모듈 설정 방법</a:t>
+            </a:r>
+            <a:r>
+              <a:rPr lang="en-US" altLang="ko-KR" sz="1600" dirty="0" smtClean="0"/>
+              <a:t>.</a:t>
+            </a:r>
+          </a:p>
+          <a:p>
+            <a:pPr marL="800100" lvl="1" indent="-342900">
+              <a:buAutoNum type="arabicPeriod"/>
+            </a:pPr>
+            <a:r>
+              <a:rPr lang="en-US" altLang="ko-KR" sz="1600" dirty="0"/>
+              <a:t>○</a:t>
+            </a:r>
+            <a:r>
+              <a:rPr lang="en-US" altLang="ko-KR" sz="1600" dirty="0" smtClean="0"/>
+              <a:t>gpkiapiV1.4.0.0_20101002_j.zip </a:t>
+            </a:r>
+            <a:r>
+              <a:rPr lang="ko-KR" altLang="en-US" sz="1600" dirty="0" smtClean="0"/>
+              <a:t>파일 해제</a:t>
+            </a:r>
+            <a:endParaRPr lang="en-US" altLang="ko-KR" sz="1600" dirty="0" smtClean="0"/>
+          </a:p>
+          <a:p>
+            <a:pPr marL="800100" lvl="1" indent="-342900">
+              <a:buAutoNum type="arabicPeriod"/>
+            </a:pPr>
+            <a:r>
+              <a:rPr lang="ko-KR" altLang="en-US" sz="1600" dirty="0" err="1" smtClean="0"/>
+              <a:t>해제된폴더</a:t>
+            </a:r>
+            <a:r>
+              <a:rPr lang="en-US" altLang="ko-KR" sz="1600" dirty="0"/>
+              <a:t>/</a:t>
+            </a:r>
+            <a:r>
+              <a:rPr lang="en-US" altLang="ko-KR" sz="1600" dirty="0" smtClean="0"/>
+              <a:t>lib/libgpkiapi_jni.jar </a:t>
+            </a:r>
+            <a:r>
+              <a:rPr lang="ko-KR" altLang="en-US" sz="1600" dirty="0" smtClean="0"/>
+              <a:t>을 </a:t>
+            </a:r>
+            <a:r>
+              <a:rPr lang="en-US" altLang="ko-KR" sz="1600" dirty="0" smtClean="0"/>
+              <a:t>relay/classes/</a:t>
+            </a:r>
+            <a:r>
+              <a:rPr lang="ko-KR" altLang="en-US" sz="1600" dirty="0" smtClean="0"/>
+              <a:t>에  복사</a:t>
+            </a:r>
+            <a:r>
+              <a:rPr lang="en-US" altLang="ko-KR" sz="1600" dirty="0" smtClean="0"/>
+              <a:t>.</a:t>
+            </a:r>
+            <a:endParaRPr lang="en-US" altLang="ko-KR" sz="1600" dirty="0"/>
+          </a:p>
+          <a:p>
+            <a:pPr marL="800100" lvl="1" indent="-342900">
+              <a:buAutoNum type="arabicPeriod"/>
+            </a:pPr>
+            <a:endParaRPr lang="en-US" altLang="ko-KR" sz="1600" dirty="0" smtClean="0"/>
+          </a:p>
+        </p:txBody>
+      </p:sp>
+      <p:pic>
+        <p:nvPicPr>
+          <p:cNvPr id="2" name="그림 1"/>
+          <p:cNvPicPr>
+            <a:picLocks noChangeAspect="1"/>
+          </p:cNvPicPr>
+          <p:nvPr/>
+        </p:nvPicPr>
+        <p:blipFill>
+          <a:blip r:embed="rId2"/>
+          <a:stretch>
+            <a:fillRect/>
+          </a:stretch>
+        </p:blipFill>
+        <p:spPr>
+          <a:xfrm>
+            <a:off x="1239721" y="1931236"/>
+            <a:ext cx="5838825" cy="2047875"/>
+          </a:xfrm>
+          <a:prstGeom prst="rect">
+            <a:avLst/>
+          </a:prstGeom>
+        </p:spPr>
+      </p:pic>
+    </p:spTree>
+    <p:extLst>
+      <p:ext uri="{BB962C8B-B14F-4D97-AF65-F5344CB8AC3E}">
+        <p14:creationId xmlns:p14="http://schemas.microsoft.com/office/powerpoint/2010/main" val="2663777004"/>
+      </p:ext>
+    </p:extLst>
+  </p:cSld>
+  <p:clrMapOvr>
+    <a:masterClrMapping/>
+  </p:clrMapOvr>
+</p:sld>
+</file>
+
+<file path=ppt/slides/slide12.xml><?xml version="1.0" encoding="utf-8"?>
+<p:sld xmlns:a="http://schemas.openxmlformats.org/drawingml/2006/main" xmlns:r="http://schemas.openxmlformats.org/officeDocument/2006/relationships" xmlns:p="http://schemas.openxmlformats.org/presentationml/2006/main">
+  <p:cSld>
+    <p:spTree>
+      <p:nvGrpSpPr>
+        <p:cNvPr id="1" name=""/>
+        <p:cNvGrpSpPr/>
+        <p:nvPr/>
+      </p:nvGrpSpPr>
+      <p:grpSpPr>
+        <a:xfrm>
+          <a:off x="0" y="0"/>
+          <a:ext cx="0" cy="0"/>
+          <a:chOff x="0" y="0"/>
+          <a:chExt cx="0" cy="0"/>
+        </a:xfrm>
+      </p:grpSpPr>
+      <p:sp>
+        <p:nvSpPr>
+          <p:cNvPr id="3" name="TextBox 2"/>
+          <p:cNvSpPr txBox="1"/>
+          <p:nvPr/>
+        </p:nvSpPr>
+        <p:spPr>
+          <a:xfrm>
+            <a:off x="948690" y="651510"/>
+            <a:ext cx="10469880" cy="4062651"/>
+          </a:xfrm>
+          <a:prstGeom prst="rect">
+            <a:avLst/>
+          </a:prstGeom>
+          <a:noFill/>
+        </p:spPr>
+        <p:txBody>
+          <a:bodyPr wrap="square" rtlCol="0">
+            <a:spAutoFit/>
+          </a:bodyPr>
+          <a:lstStyle/>
+          <a:p>
+            <a:r>
+              <a:rPr lang="ko-KR" altLang="en-US" b="1" dirty="0" smtClean="0"/>
+              <a:t>그룹웨어서버에서</a:t>
+            </a:r>
+            <a:endParaRPr lang="en-US" altLang="ko-KR" b="1" dirty="0" smtClean="0"/>
+          </a:p>
+          <a:p>
+            <a:pPr marL="342900" indent="-342900">
+              <a:buAutoNum type="arabicPeriod"/>
+            </a:pPr>
+            <a:r>
+              <a:rPr lang="en-US" altLang="ko-KR" sz="1600" dirty="0" err="1" smtClean="0"/>
+              <a:t>ezflow</a:t>
+            </a:r>
+            <a:r>
+              <a:rPr lang="ko-KR" altLang="en-US" sz="1600" dirty="0" smtClean="0"/>
+              <a:t>의 </a:t>
+            </a:r>
+            <a:r>
+              <a:rPr lang="en-US" altLang="ko-KR" sz="1600" dirty="0" err="1" smtClean="0"/>
+              <a:t>config.properties</a:t>
+            </a:r>
+            <a:r>
+              <a:rPr lang="en-US" altLang="ko-KR" sz="1600" dirty="0" smtClean="0"/>
+              <a:t> </a:t>
+            </a:r>
+            <a:r>
+              <a:rPr lang="ko-KR" altLang="en-US" sz="1600" dirty="0" smtClean="0"/>
+              <a:t>에</a:t>
+            </a:r>
+            <a:endParaRPr lang="en-US" altLang="ko-KR" sz="1600" dirty="0" smtClean="0"/>
+          </a:p>
+          <a:p>
+            <a:pPr marL="800100" lvl="1" indent="-342900">
+              <a:buAutoNum type="arabicPeriod"/>
+            </a:pPr>
+            <a:r>
+              <a:rPr lang="en-US" altLang="ko-KR" sz="1600" dirty="0" err="1" smtClean="0"/>
+              <a:t>relay_root</a:t>
+            </a:r>
+            <a:r>
+              <a:rPr lang="en-US" altLang="ko-KR" sz="1600" dirty="0" smtClean="0"/>
+              <a:t> = /home/</a:t>
+            </a:r>
+            <a:r>
+              <a:rPr lang="en-US" altLang="ko-KR" sz="1600" dirty="0" err="1" smtClean="0"/>
+              <a:t>jmocha</a:t>
+            </a:r>
+            <a:r>
+              <a:rPr lang="en-US" altLang="ko-KR" sz="1600" dirty="0" smtClean="0"/>
+              <a:t>/</a:t>
+            </a:r>
+            <a:r>
+              <a:rPr lang="en-US" altLang="ko-KR" sz="1600" dirty="0" err="1" smtClean="0"/>
+              <a:t>ezEKP</a:t>
+            </a:r>
+            <a:r>
+              <a:rPr lang="en-US" altLang="ko-KR" sz="1600" dirty="0" smtClean="0"/>
+              <a:t>/</a:t>
+            </a:r>
+            <a:r>
+              <a:rPr lang="en-US" altLang="ko-KR" sz="1600" dirty="0" err="1" smtClean="0"/>
+              <a:t>ezFlow</a:t>
+            </a:r>
+            <a:r>
+              <a:rPr lang="en-US" altLang="ko-KR" sz="1600" dirty="0" smtClean="0"/>
+              <a:t>/</a:t>
+            </a:r>
+            <a:r>
+              <a:rPr lang="en-US" altLang="ko-KR" sz="1600" dirty="0" err="1" smtClean="0"/>
+              <a:t>webapps</a:t>
+            </a:r>
+            <a:r>
+              <a:rPr lang="en-US" altLang="ko-KR" sz="1600" dirty="0" smtClean="0"/>
+              <a:t>/ROOT</a:t>
+            </a:r>
+          </a:p>
+          <a:p>
+            <a:pPr marL="800100" lvl="1" indent="-342900">
+              <a:buAutoNum type="arabicPeriod"/>
+            </a:pPr>
+            <a:r>
+              <a:rPr lang="en-US" altLang="ko-KR" sz="1600" dirty="0" err="1" smtClean="0"/>
+              <a:t>upload_relay.ROOT</a:t>
+            </a:r>
+            <a:r>
+              <a:rPr lang="en-US" altLang="ko-KR" sz="1600" dirty="0" smtClean="0"/>
+              <a:t> = /relay</a:t>
+            </a:r>
+          </a:p>
+          <a:p>
+            <a:pPr marL="800100" lvl="1" indent="-342900">
+              <a:buAutoNum type="arabicPeriod"/>
+            </a:pPr>
+            <a:r>
+              <a:rPr lang="en-US" altLang="ko-KR" sz="1600" dirty="0" err="1" smtClean="0"/>
+              <a:t>upload_relay.R_DocPath</a:t>
+            </a:r>
+            <a:r>
+              <a:rPr lang="en-US" altLang="ko-KR" sz="1600" dirty="0" smtClean="0"/>
+              <a:t> = /files/</a:t>
+            </a:r>
+            <a:r>
+              <a:rPr lang="en-US" altLang="ko-KR" sz="1600" dirty="0" err="1" smtClean="0"/>
+              <a:t>upload_approval</a:t>
+            </a:r>
+            <a:r>
+              <a:rPr lang="en-US" altLang="ko-KR" sz="1600" dirty="0" smtClean="0"/>
+              <a:t> </a:t>
+            </a:r>
+            <a:r>
+              <a:rPr lang="ko-KR" altLang="en-US" sz="1600" dirty="0" smtClean="0"/>
+              <a:t>로 설정</a:t>
+            </a:r>
+            <a:r>
+              <a:rPr lang="en-US" altLang="ko-KR" sz="1600" dirty="0" smtClean="0"/>
+              <a:t>.</a:t>
+            </a:r>
+          </a:p>
+          <a:p>
+            <a:pPr marL="342900" indent="-342900">
+              <a:buAutoNum type="arabicPeriod"/>
+            </a:pPr>
+            <a:r>
+              <a:rPr lang="en-US" altLang="ko-KR" sz="1600" dirty="0" err="1" smtClean="0"/>
+              <a:t>ezflow</a:t>
+            </a:r>
+            <a:r>
+              <a:rPr lang="ko-KR" altLang="en-US" sz="1600" dirty="0" smtClean="0"/>
+              <a:t>가 설치된 서버에서</a:t>
+            </a:r>
+            <a:endParaRPr lang="en-US" altLang="ko-KR" sz="1600" dirty="0"/>
+          </a:p>
+          <a:p>
+            <a:pPr marL="800100" lvl="1" indent="-342900">
+              <a:buAutoNum type="arabicPeriod"/>
+            </a:pPr>
+            <a:r>
+              <a:rPr lang="en-US" altLang="ko-KR" sz="1600" dirty="0" smtClean="0"/>
+              <a:t>/home/</a:t>
+            </a:r>
+            <a:r>
+              <a:rPr lang="en-US" altLang="ko-KR" sz="1600" dirty="0" err="1" smtClean="0"/>
+              <a:t>jmocha</a:t>
+            </a:r>
+            <a:r>
+              <a:rPr lang="en-US" altLang="ko-KR" sz="1600" dirty="0" smtClean="0"/>
+              <a:t>/</a:t>
+            </a:r>
+            <a:r>
+              <a:rPr lang="en-US" altLang="ko-KR" sz="1600" dirty="0" err="1" smtClean="0"/>
+              <a:t>ezEKP</a:t>
+            </a:r>
+            <a:r>
+              <a:rPr lang="en-US" altLang="ko-KR" sz="1600" dirty="0" smtClean="0"/>
+              <a:t>/</a:t>
+            </a:r>
+            <a:r>
+              <a:rPr lang="en-US" altLang="ko-KR" sz="1600" dirty="0" err="1" smtClean="0"/>
+              <a:t>ezFlow</a:t>
+            </a:r>
+            <a:r>
+              <a:rPr lang="en-US" altLang="ko-KR" sz="1600" dirty="0" smtClean="0"/>
+              <a:t>/</a:t>
+            </a:r>
+            <a:r>
+              <a:rPr lang="en-US" altLang="ko-KR" sz="1600" dirty="0" err="1" smtClean="0"/>
+              <a:t>webapps</a:t>
+            </a:r>
+            <a:r>
+              <a:rPr lang="en-US" altLang="ko-KR" sz="1600" dirty="0" smtClean="0"/>
+              <a:t>/ROOT/</a:t>
+            </a:r>
+            <a:r>
+              <a:rPr lang="en-US" altLang="ko-KR" sz="1600" dirty="0" err="1" smtClean="0"/>
+              <a:t>fileroot</a:t>
+            </a:r>
+            <a:r>
+              <a:rPr lang="en-US" altLang="ko-KR" sz="1600" dirty="0" smtClean="0"/>
+              <a:t>/0/files</a:t>
+            </a:r>
+            <a:r>
+              <a:rPr lang="ko-KR" altLang="en-US" sz="1600" dirty="0" smtClean="0"/>
+              <a:t>에 </a:t>
+            </a:r>
+            <a:r>
+              <a:rPr lang="en-US" altLang="ko-KR" sz="1600" dirty="0" smtClean="0"/>
+              <a:t>/home/</a:t>
+            </a:r>
+            <a:r>
+              <a:rPr lang="en-US" altLang="ko-KR" sz="1600" dirty="0" err="1" smtClean="0"/>
+              <a:t>jmocha</a:t>
+            </a:r>
+            <a:r>
+              <a:rPr lang="en-US" altLang="ko-KR" sz="1600" dirty="0" smtClean="0"/>
+              <a:t>/relay</a:t>
+            </a:r>
+            <a:r>
+              <a:rPr lang="ko-KR" altLang="en-US" sz="1600" dirty="0" smtClean="0"/>
+              <a:t>를 </a:t>
+            </a:r>
+            <a:r>
+              <a:rPr lang="ko-KR" altLang="en-US" sz="1600" dirty="0" err="1" smtClean="0"/>
+              <a:t>심볼릭</a:t>
+            </a:r>
+            <a:r>
+              <a:rPr lang="ko-KR" altLang="en-US" sz="1600" dirty="0" smtClean="0"/>
+              <a:t> 링크 생성</a:t>
+            </a:r>
+            <a:r>
+              <a:rPr lang="en-US" altLang="ko-KR" sz="1600" dirty="0" smtClean="0"/>
+              <a:t>. (</a:t>
+            </a:r>
+            <a:r>
+              <a:rPr lang="ko-KR" altLang="en-US" sz="1600" dirty="0" err="1" smtClean="0"/>
+              <a:t>유통서버와</a:t>
+            </a:r>
+            <a:r>
+              <a:rPr lang="ko-KR" altLang="en-US" sz="1600" dirty="0" smtClean="0"/>
+              <a:t> </a:t>
+            </a:r>
+            <a:r>
+              <a:rPr lang="en-US" altLang="ko-KR" sz="1600" dirty="0" err="1" smtClean="0"/>
+              <a:t>ezFlow</a:t>
+            </a:r>
+            <a:r>
+              <a:rPr lang="ko-KR" altLang="en-US" sz="1600" dirty="0" smtClean="0"/>
+              <a:t>서버가 분리되어 있을 경우</a:t>
+            </a:r>
+            <a:r>
+              <a:rPr lang="en-US" altLang="ko-KR" sz="1600" dirty="0" smtClean="0"/>
+              <a:t>, </a:t>
+            </a:r>
+            <a:r>
+              <a:rPr lang="ko-KR" altLang="en-US" sz="1600" dirty="0" err="1" smtClean="0"/>
+              <a:t>마운트한</a:t>
+            </a:r>
+            <a:r>
+              <a:rPr lang="ko-KR" altLang="en-US" sz="1600" dirty="0" smtClean="0"/>
+              <a:t> </a:t>
+            </a:r>
+            <a:r>
+              <a:rPr lang="en-US" altLang="ko-KR" sz="1600" dirty="0" smtClean="0"/>
+              <a:t>relay</a:t>
+            </a:r>
+            <a:r>
+              <a:rPr lang="ko-KR" altLang="en-US" sz="1600" dirty="0" smtClean="0"/>
+              <a:t>에는 </a:t>
+            </a:r>
+            <a:r>
+              <a:rPr lang="en-US" altLang="ko-KR" sz="1600" dirty="0" smtClean="0"/>
+              <a:t>data</a:t>
+            </a:r>
+            <a:r>
+              <a:rPr lang="ko-KR" altLang="en-US" sz="1600" dirty="0" smtClean="0"/>
+              <a:t>와 </a:t>
+            </a:r>
+            <a:r>
+              <a:rPr lang="en-US" altLang="ko-KR" sz="1600" dirty="0" err="1" smtClean="0"/>
+              <a:t>dtd</a:t>
+            </a:r>
+            <a:r>
+              <a:rPr lang="en-US" altLang="ko-KR" sz="1600" dirty="0" smtClean="0"/>
+              <a:t> </a:t>
+            </a:r>
+            <a:r>
+              <a:rPr lang="ko-KR" altLang="en-US" sz="1600" dirty="0" smtClean="0"/>
+              <a:t>폴더가 있어야함</a:t>
+            </a:r>
+            <a:r>
+              <a:rPr lang="en-US" altLang="ko-KR" sz="1600" dirty="0" smtClean="0"/>
+              <a:t>. data</a:t>
+            </a:r>
+            <a:r>
+              <a:rPr lang="ko-KR" altLang="en-US" sz="1600" dirty="0" smtClean="0"/>
+              <a:t>만 </a:t>
+            </a:r>
+            <a:r>
+              <a:rPr lang="ko-KR" altLang="en-US" sz="1600" dirty="0" err="1" smtClean="0"/>
+              <a:t>마운트하고</a:t>
+            </a:r>
+            <a:r>
+              <a:rPr lang="ko-KR" altLang="en-US" sz="1600" dirty="0" smtClean="0"/>
+              <a:t> </a:t>
+            </a:r>
+            <a:r>
+              <a:rPr lang="en-US" altLang="ko-KR" sz="1600" dirty="0" err="1" smtClean="0"/>
+              <a:t>dtd</a:t>
+            </a:r>
+            <a:r>
+              <a:rPr lang="ko-KR" altLang="en-US" sz="1600" dirty="0" smtClean="0"/>
+              <a:t>는 별도로 복사해줘도 동작함</a:t>
+            </a:r>
+            <a:r>
+              <a:rPr lang="en-US" altLang="ko-KR" sz="1600" dirty="0" smtClean="0"/>
+              <a:t>.)</a:t>
+            </a:r>
+          </a:p>
+          <a:p>
+            <a:pPr marL="800100" lvl="1" indent="-342900">
+              <a:buAutoNum type="arabicPeriod"/>
+            </a:pPr>
+            <a:endParaRPr lang="en-US" altLang="ko-KR" sz="1600" dirty="0"/>
+          </a:p>
+          <a:p>
+            <a:pPr marL="800100" lvl="1" indent="-342900">
+              <a:buAutoNum type="arabicPeriod"/>
+            </a:pPr>
+            <a:endParaRPr lang="en-US" altLang="ko-KR" sz="1600" dirty="0" smtClean="0"/>
+          </a:p>
+          <a:p>
+            <a:pPr marL="800100" lvl="1" indent="-342900">
+              <a:buAutoNum type="arabicPeriod"/>
+            </a:pPr>
+            <a:endParaRPr lang="en-US" altLang="ko-KR" sz="1600" dirty="0"/>
+          </a:p>
+          <a:p>
+            <a:pPr marL="800100" lvl="1" indent="-342900">
+              <a:buAutoNum type="arabicPeriod"/>
+            </a:pPr>
+            <a:endParaRPr lang="en-US" altLang="ko-KR" sz="1600" dirty="0" smtClean="0"/>
+          </a:p>
+          <a:p>
+            <a:pPr marL="800100" lvl="1" indent="-342900">
+              <a:buAutoNum type="arabicPeriod"/>
+            </a:pPr>
+            <a:endParaRPr lang="en-US" altLang="ko-KR" sz="1600" dirty="0"/>
+          </a:p>
+          <a:p>
+            <a:pPr marL="800100" lvl="1" indent="-342900">
+              <a:buAutoNum type="arabicPeriod"/>
+            </a:pPr>
+            <a:endParaRPr lang="en-US" altLang="ko-KR" sz="1600" dirty="0" smtClean="0"/>
+          </a:p>
+          <a:p>
+            <a:pPr marL="800100" lvl="1" indent="-342900">
+              <a:buAutoNum type="arabicPeriod"/>
+            </a:pPr>
+            <a:endParaRPr lang="en-US" altLang="ko-KR" sz="1600" dirty="0" smtClean="0"/>
+          </a:p>
+        </p:txBody>
+      </p:sp>
+      <p:pic>
+        <p:nvPicPr>
+          <p:cNvPr id="2" name="그림 1"/>
+          <p:cNvPicPr>
+            <a:picLocks noChangeAspect="1"/>
+          </p:cNvPicPr>
+          <p:nvPr/>
+        </p:nvPicPr>
+        <p:blipFill>
+          <a:blip r:embed="rId2"/>
+          <a:stretch>
+            <a:fillRect/>
+          </a:stretch>
+        </p:blipFill>
+        <p:spPr>
+          <a:xfrm>
+            <a:off x="1810528" y="3016654"/>
+            <a:ext cx="6143625" cy="2038350"/>
+          </a:xfrm>
+          <a:prstGeom prst="rect">
+            <a:avLst/>
+          </a:prstGeom>
+        </p:spPr>
+      </p:pic>
+    </p:spTree>
+    <p:extLst>
+      <p:ext uri="{BB962C8B-B14F-4D97-AF65-F5344CB8AC3E}">
+        <p14:creationId xmlns:p14="http://schemas.microsoft.com/office/powerpoint/2010/main" val="1246638275"/>
+      </p:ext>
+    </p:extLst>
+  </p:cSld>
+  <p:clrMapOvr>
+    <a:masterClrMapping/>
+  </p:clrMapOvr>
+</p:sld>
+</file>
+
+<file path=ppt/slides/slide13.xml><?xml version="1.0" encoding="utf-8"?>
+<p:sld xmlns:a="http://schemas.openxmlformats.org/drawingml/2006/main" xmlns:r="http://schemas.openxmlformats.org/officeDocument/2006/relationships" xmlns:p="http://schemas.openxmlformats.org/presentationml/2006/main">
+  <p:cSld>
+    <p:spTree>
+      <p:nvGrpSpPr>
+        <p:cNvPr id="1" name=""/>
+        <p:cNvGrpSpPr/>
+        <p:nvPr/>
+      </p:nvGrpSpPr>
+      <p:grpSpPr>
+        <a:xfrm>
+          <a:off x="0" y="0"/>
+          <a:ext cx="0" cy="0"/>
+          <a:chOff x="0" y="0"/>
+          <a:chExt cx="0" cy="0"/>
+        </a:xfrm>
+      </p:grpSpPr>
+      <p:sp>
+        <p:nvSpPr>
+          <p:cNvPr id="3" name="TextBox 2"/>
+          <p:cNvSpPr txBox="1"/>
+          <p:nvPr/>
+        </p:nvSpPr>
+        <p:spPr>
+          <a:xfrm>
+            <a:off x="948690" y="651510"/>
+            <a:ext cx="10469880" cy="5570756"/>
+          </a:xfrm>
+          <a:prstGeom prst="rect">
+            <a:avLst/>
+          </a:prstGeom>
+          <a:noFill/>
+        </p:spPr>
+        <p:txBody>
+          <a:bodyPr wrap="square" rtlCol="0">
+            <a:spAutoFit/>
+          </a:bodyPr>
+          <a:lstStyle/>
+          <a:p>
+            <a:r>
+              <a:rPr lang="ko-KR" altLang="en-US" b="1" dirty="0" smtClean="0"/>
+              <a:t>그룹웨어서버에서</a:t>
+            </a:r>
+            <a:endParaRPr lang="en-US" altLang="ko-KR" b="1" dirty="0" smtClean="0"/>
+          </a:p>
+          <a:p>
+            <a:pPr marL="342900" indent="-342900">
+              <a:buAutoNum type="arabicPeriod"/>
+            </a:pPr>
+            <a:r>
+              <a:rPr lang="en-US" altLang="ko-KR" sz="1600" dirty="0" err="1" smtClean="0"/>
+              <a:t>ezflow</a:t>
+            </a:r>
+            <a:r>
+              <a:rPr lang="ko-KR" altLang="en-US" sz="1600" dirty="0" smtClean="0"/>
+              <a:t>가 설치된 서버에서</a:t>
+            </a:r>
+            <a:endParaRPr lang="en-US" altLang="ko-KR" sz="1600" dirty="0" smtClean="0"/>
+          </a:p>
+          <a:p>
+            <a:pPr marL="800100" lvl="1" indent="-342900">
+              <a:buAutoNum type="arabicPeriod"/>
+            </a:pPr>
+            <a:r>
+              <a:rPr lang="en-US" altLang="ko-KR" sz="1600" dirty="0" smtClean="0"/>
+              <a:t>/home/</a:t>
+            </a:r>
+            <a:r>
+              <a:rPr lang="en-US" altLang="ko-KR" sz="1600" dirty="0" err="1" smtClean="0"/>
+              <a:t>jmocha</a:t>
+            </a:r>
+            <a:r>
+              <a:rPr lang="en-US" altLang="ko-KR" sz="1600" dirty="0" smtClean="0"/>
+              <a:t>/</a:t>
+            </a:r>
+            <a:r>
+              <a:rPr lang="en-US" altLang="ko-KR" sz="1600" dirty="0" err="1" smtClean="0"/>
+              <a:t>ezEKP</a:t>
+            </a:r>
+            <a:r>
+              <a:rPr lang="en-US" altLang="ko-KR" sz="1600" dirty="0" smtClean="0"/>
+              <a:t>/</a:t>
+            </a:r>
+            <a:r>
+              <a:rPr lang="en-US" altLang="ko-KR" sz="1600" dirty="0" err="1" smtClean="0"/>
+              <a:t>ezFlow</a:t>
+            </a:r>
+            <a:r>
+              <a:rPr lang="en-US" altLang="ko-KR" sz="1600" dirty="0" smtClean="0"/>
+              <a:t>/</a:t>
+            </a:r>
+            <a:r>
+              <a:rPr lang="en-US" altLang="ko-KR" sz="1600" dirty="0" err="1" smtClean="0"/>
+              <a:t>webapps</a:t>
+            </a:r>
+            <a:r>
+              <a:rPr lang="en-US" altLang="ko-KR" sz="1600" dirty="0" smtClean="0"/>
+              <a:t>/ROOT/</a:t>
+            </a:r>
+            <a:r>
+              <a:rPr lang="en-US" altLang="ko-KR" sz="1600" dirty="0" err="1" smtClean="0"/>
+              <a:t>fileroot</a:t>
+            </a:r>
+            <a:r>
+              <a:rPr lang="en-US" altLang="ko-KR" sz="1600" dirty="0" smtClean="0"/>
+              <a:t>/0/files/</a:t>
+            </a:r>
+            <a:r>
+              <a:rPr lang="en-US" altLang="ko-KR" sz="1600" dirty="0" err="1" smtClean="0"/>
+              <a:t>upload_approval</a:t>
+            </a:r>
+            <a:r>
+              <a:rPr lang="en-US" altLang="ko-KR" sz="1600" dirty="0" smtClean="0"/>
+              <a:t>/ </a:t>
+            </a:r>
+            <a:r>
+              <a:rPr lang="ko-KR" altLang="en-US" sz="1600" dirty="0" smtClean="0"/>
+              <a:t>에 </a:t>
+            </a:r>
+            <a:r>
+              <a:rPr lang="en-US" altLang="ko-KR" sz="1600" dirty="0" err="1" smtClean="0"/>
+              <a:t>exPack</a:t>
+            </a:r>
+            <a:r>
+              <a:rPr lang="en-US" altLang="ko-KR" sz="1600" dirty="0" smtClean="0"/>
+              <a:t> </a:t>
+            </a:r>
+            <a:r>
+              <a:rPr lang="ko-KR" altLang="en-US" sz="1600" dirty="0" smtClean="0"/>
+              <a:t>관련 폴더들을 </a:t>
+            </a:r>
+            <a:r>
+              <a:rPr lang="ko-KR" altLang="en-US" sz="1600" dirty="0" err="1" smtClean="0"/>
+              <a:t>위치시켜야함</a:t>
+            </a:r>
+            <a:r>
+              <a:rPr lang="en-US" altLang="ko-KR" sz="1600" dirty="0" smtClean="0"/>
+              <a:t>.</a:t>
+            </a:r>
+          </a:p>
+          <a:p>
+            <a:pPr marL="800100" lvl="1" indent="-342900">
+              <a:buAutoNum type="arabicPeriod"/>
+            </a:pPr>
+            <a:endParaRPr lang="en-US" altLang="ko-KR" sz="1600" dirty="0"/>
+          </a:p>
+          <a:p>
+            <a:pPr marL="800100" lvl="1" indent="-342900">
+              <a:buAutoNum type="arabicPeriod"/>
+            </a:pPr>
+            <a:endParaRPr lang="en-US" altLang="ko-KR" sz="1600" dirty="0" smtClean="0"/>
+          </a:p>
+          <a:p>
+            <a:pPr marL="800100" lvl="1" indent="-342900">
+              <a:buAutoNum type="arabicPeriod"/>
+            </a:pPr>
+            <a:endParaRPr lang="en-US" altLang="ko-KR" sz="1600" dirty="0"/>
+          </a:p>
+          <a:p>
+            <a:pPr marL="800100" lvl="1" indent="-342900">
+              <a:buAutoNum type="arabicPeriod"/>
+            </a:pPr>
+            <a:endParaRPr lang="en-US" altLang="ko-KR" sz="1600" dirty="0" smtClean="0"/>
+          </a:p>
+          <a:p>
+            <a:pPr marL="800100" lvl="1" indent="-342900">
+              <a:buAutoNum type="arabicPeriod"/>
+            </a:pPr>
+            <a:endParaRPr lang="en-US" altLang="ko-KR" sz="1600" dirty="0"/>
+          </a:p>
+          <a:p>
+            <a:pPr marL="800100" lvl="1" indent="-342900">
+              <a:buAutoNum type="arabicPeriod"/>
+            </a:pPr>
+            <a:endParaRPr lang="en-US" altLang="ko-KR" sz="1600" dirty="0" smtClean="0"/>
+          </a:p>
+          <a:p>
+            <a:pPr marL="800100" lvl="1" indent="-342900">
+              <a:buAutoNum type="arabicPeriod"/>
+            </a:pPr>
+            <a:endParaRPr lang="en-US" altLang="ko-KR" sz="1600" dirty="0"/>
+          </a:p>
+          <a:p>
+            <a:pPr marL="800100" lvl="1" indent="-342900">
+              <a:buAutoNum type="arabicPeriod"/>
+            </a:pPr>
+            <a:endParaRPr lang="en-US" altLang="ko-KR" sz="1600" dirty="0" smtClean="0"/>
+          </a:p>
+          <a:p>
+            <a:pPr marL="800100" lvl="1" indent="-342900">
+              <a:buAutoNum type="arabicPeriod"/>
+            </a:pPr>
+            <a:endParaRPr lang="en-US" altLang="ko-KR" sz="1600" dirty="0"/>
+          </a:p>
+          <a:p>
+            <a:pPr marL="800100" lvl="1" indent="-342900">
+              <a:buAutoNum type="arabicPeriod"/>
+            </a:pPr>
+            <a:endParaRPr lang="en-US" altLang="ko-KR" sz="1600" dirty="0" smtClean="0"/>
+          </a:p>
+          <a:p>
+            <a:pPr marL="800100" lvl="1" indent="-342900">
+              <a:buAutoNum type="arabicPeriod"/>
+            </a:pPr>
+            <a:r>
+              <a:rPr lang="ko-KR" altLang="en-US" sz="1600" dirty="0" smtClean="0"/>
+              <a:t>한글기안기로 발송할 경우</a:t>
+            </a:r>
+            <a:r>
+              <a:rPr lang="en-US" altLang="ko-KR" sz="1600" dirty="0" smtClean="0"/>
+              <a:t>, ROOT/files/</a:t>
+            </a:r>
+            <a:r>
+              <a:rPr lang="en-US" altLang="ko-KR" sz="1600" dirty="0" err="1" smtClean="0"/>
+              <a:t>upload_approvalgG</a:t>
+            </a:r>
+            <a:r>
+              <a:rPr lang="en-US" altLang="ko-KR" sz="1600" dirty="0" smtClean="0"/>
+              <a:t>/ </a:t>
+            </a:r>
+            <a:r>
+              <a:rPr lang="ko-KR" altLang="en-US" sz="1600" dirty="0" smtClean="0"/>
+              <a:t>에 </a:t>
+            </a:r>
+            <a:r>
+              <a:rPr lang="ko-KR" altLang="en-US" sz="1600" dirty="0" err="1" smtClean="0"/>
+              <a:t>로고파일과</a:t>
+            </a:r>
+            <a:r>
+              <a:rPr lang="ko-KR" altLang="en-US" sz="1600" dirty="0" smtClean="0"/>
+              <a:t> </a:t>
+            </a:r>
+            <a:r>
+              <a:rPr lang="ko-KR" altLang="en-US" sz="1600" dirty="0" err="1" smtClean="0"/>
+              <a:t>심볼파일을</a:t>
+            </a:r>
+            <a:r>
+              <a:rPr lang="ko-KR" altLang="en-US" sz="1600" dirty="0" smtClean="0"/>
+              <a:t> 위치시켜주고</a:t>
+            </a:r>
+            <a:r>
+              <a:rPr lang="en-US" altLang="ko-KR" sz="1600" dirty="0" smtClean="0"/>
+              <a:t>, ezSimsaG_HWP.js </a:t>
+            </a:r>
+            <a:r>
+              <a:rPr lang="ko-KR" altLang="en-US" sz="1600" dirty="0" smtClean="0"/>
+              <a:t>에서 </a:t>
+            </a:r>
+            <a:r>
+              <a:rPr lang="en-US" altLang="ko-KR" sz="1600" dirty="0" err="1" smtClean="0"/>
+              <a:t>makeXML</a:t>
+            </a:r>
+            <a:r>
+              <a:rPr lang="en-US" altLang="ko-KR" sz="1600" dirty="0" smtClean="0"/>
+              <a:t> </a:t>
+            </a:r>
+            <a:r>
+              <a:rPr lang="ko-KR" altLang="en-US" sz="1600" dirty="0" err="1" smtClean="0"/>
+              <a:t>함수내용</a:t>
+            </a:r>
+            <a:r>
+              <a:rPr lang="ko-KR" altLang="en-US" sz="1600" dirty="0" smtClean="0"/>
+              <a:t> 중 </a:t>
+            </a:r>
+            <a:r>
+              <a:rPr lang="en-US" altLang="ko-KR" sz="1600" dirty="0" smtClean="0"/>
+              <a:t>logo, </a:t>
+            </a:r>
+            <a:r>
+              <a:rPr lang="en-US" altLang="ko-KR" sz="1600" dirty="0" err="1" smtClean="0"/>
+              <a:t>simbol</a:t>
+            </a:r>
+            <a:r>
+              <a:rPr lang="ko-KR" altLang="en-US" sz="1600" dirty="0"/>
+              <a:t> </a:t>
+            </a:r>
+            <a:r>
+              <a:rPr lang="ko-KR" altLang="en-US" sz="1600" dirty="0" smtClean="0"/>
+              <a:t>처리 부분에서 </a:t>
+            </a:r>
+            <a:r>
+              <a:rPr lang="en-US" altLang="ko-KR" sz="1600" dirty="0" err="1" smtClean="0"/>
+              <a:t>setDocumentElement</a:t>
+            </a:r>
+            <a:r>
+              <a:rPr lang="ko-KR" altLang="en-US" sz="1600" dirty="0" smtClean="0"/>
+              <a:t>의 파일명을 실제 로고</a:t>
+            </a:r>
+            <a:r>
+              <a:rPr lang="en-US" altLang="ko-KR" sz="1600" dirty="0" smtClean="0"/>
+              <a:t>, </a:t>
+            </a:r>
+            <a:r>
+              <a:rPr lang="ko-KR" altLang="en-US" sz="1600" dirty="0" smtClean="0"/>
+              <a:t>심볼 파일과 맞춰준다</a:t>
+            </a:r>
+            <a:r>
+              <a:rPr lang="en-US" altLang="ko-KR" sz="1600" dirty="0" smtClean="0"/>
+              <a:t>.</a:t>
+            </a:r>
+          </a:p>
+          <a:p>
+            <a:pPr marL="800100" lvl="1" indent="-342900">
+              <a:buAutoNum type="arabicPeriod"/>
+            </a:pPr>
+            <a:endParaRPr lang="en-US" altLang="ko-KR" sz="1600" dirty="0"/>
+          </a:p>
+          <a:p>
+            <a:pPr marL="342900" indent="-342900">
+              <a:buAutoNum type="arabicPeriod"/>
+            </a:pPr>
+            <a:r>
+              <a:rPr lang="en-US" altLang="ko-KR" sz="1600" dirty="0" smtClean="0"/>
+              <a:t>relay/</a:t>
+            </a:r>
+            <a:r>
+              <a:rPr lang="en-US" altLang="ko-KR" sz="1600" dirty="0" err="1" smtClean="0"/>
+              <a:t>dtd</a:t>
+            </a:r>
+            <a:r>
+              <a:rPr lang="en-US" altLang="ko-KR" sz="1600" dirty="0" smtClean="0"/>
+              <a:t>/</a:t>
+            </a:r>
+            <a:r>
+              <a:rPr lang="ko-KR" altLang="en-US" sz="1600" dirty="0" smtClean="0"/>
+              <a:t>에 </a:t>
+            </a:r>
+            <a:r>
+              <a:rPr lang="en-US" altLang="ko-KR" sz="1600" dirty="0" smtClean="0"/>
+              <a:t>sample.xml</a:t>
+            </a:r>
+            <a:r>
+              <a:rPr lang="ko-KR" altLang="en-US" sz="1600" dirty="0" smtClean="0"/>
+              <a:t>을 백업하고 빈 껍데기 </a:t>
+            </a:r>
+            <a:r>
+              <a:rPr lang="en-US" altLang="ko-KR" sz="1600" dirty="0" smtClean="0"/>
+              <a:t>sample.xml</a:t>
+            </a:r>
+            <a:r>
+              <a:rPr lang="ko-KR" altLang="en-US" sz="1600" dirty="0" smtClean="0"/>
+              <a:t>로 교체</a:t>
+            </a:r>
+            <a:r>
+              <a:rPr lang="en-US" altLang="ko-KR" sz="1600" dirty="0"/>
+              <a:t>. </a:t>
+            </a:r>
+            <a:r>
+              <a:rPr lang="en-US" altLang="ko-KR" sz="1600" dirty="0" smtClean="0"/>
+              <a:t>send-</a:t>
+            </a:r>
+            <a:r>
+              <a:rPr lang="en-US" altLang="ko-KR" sz="1600" dirty="0" err="1" smtClean="0"/>
+              <a:t>orgcode</a:t>
+            </a:r>
+            <a:r>
+              <a:rPr lang="ko-KR" altLang="en-US" sz="1600" dirty="0" smtClean="0"/>
+              <a:t>가 없으면 </a:t>
+            </a:r>
+            <a:r>
+              <a:rPr lang="ko-KR" altLang="en-US" sz="1600" dirty="0" err="1" smtClean="0"/>
+              <a:t>에러남</a:t>
+            </a:r>
+            <a:r>
+              <a:rPr lang="en-US" altLang="ko-KR" sz="1600" dirty="0" smtClean="0"/>
+              <a:t>.</a:t>
+            </a:r>
+          </a:p>
+          <a:p>
+            <a:pPr marL="342900" indent="-342900">
+              <a:buAutoNum type="arabicPeriod"/>
+            </a:pPr>
+            <a:endParaRPr lang="en-US" altLang="ko-KR" sz="1600" dirty="0"/>
+          </a:p>
+          <a:p>
+            <a:pPr marL="342900" indent="-342900">
+              <a:buAutoNum type="arabicPeriod"/>
+            </a:pPr>
+            <a:endParaRPr lang="en-US" altLang="ko-KR" sz="1600" dirty="0" smtClean="0"/>
+          </a:p>
+          <a:p>
+            <a:pPr marL="800100" lvl="1" indent="-342900">
+              <a:buAutoNum type="arabicPeriod"/>
+            </a:pPr>
+            <a:endParaRPr lang="en-US" altLang="ko-KR" dirty="0"/>
+          </a:p>
+        </p:txBody>
+      </p:sp>
+      <p:pic>
+        <p:nvPicPr>
+          <p:cNvPr id="4" name="그림 3"/>
+          <p:cNvPicPr>
+            <a:picLocks noChangeAspect="1"/>
+          </p:cNvPicPr>
+          <p:nvPr/>
+        </p:nvPicPr>
+        <p:blipFill>
+          <a:blip r:embed="rId2"/>
+          <a:stretch>
+            <a:fillRect/>
+          </a:stretch>
+        </p:blipFill>
+        <p:spPr>
+          <a:xfrm>
+            <a:off x="1885776" y="1734155"/>
+            <a:ext cx="3999635" cy="2388887"/>
+          </a:xfrm>
+          <a:prstGeom prst="rect">
+            <a:avLst/>
+          </a:prstGeom>
+        </p:spPr>
+      </p:pic>
+    </p:spTree>
+    <p:extLst>
+      <p:ext uri="{BB962C8B-B14F-4D97-AF65-F5344CB8AC3E}">
+        <p14:creationId xmlns:p14="http://schemas.microsoft.com/office/powerpoint/2010/main" val="445852184"/>
+      </p:ext>
+    </p:extLst>
+  </p:cSld>
+  <p:clrMapOvr>
+    <a:masterClrMapping/>
+  </p:clrMapOvr>
+</p:sld>
+</file>
+
+<file path=ppt/slides/slide14.xml><?xml version="1.0" encoding="utf-8"?>
+<p:sld xmlns:a="http://schemas.openxmlformats.org/drawingml/2006/main" xmlns:r="http://schemas.openxmlformats.org/officeDocument/2006/relationships" xmlns:p="http://schemas.openxmlformats.org/presentationml/2006/main">
+  <p:cSld>
+    <p:spTree>
+      <p:nvGrpSpPr>
+        <p:cNvPr id="1" name=""/>
+        <p:cNvGrpSpPr/>
+        <p:nvPr/>
+      </p:nvGrpSpPr>
+      <p:grpSpPr>
+        <a:xfrm>
+          <a:off x="0" y="0"/>
+          <a:ext cx="0" cy="0"/>
+          <a:chOff x="0" y="0"/>
+          <a:chExt cx="0" cy="0"/>
+        </a:xfrm>
+      </p:grpSpPr>
+      <p:sp>
+        <p:nvSpPr>
+          <p:cNvPr id="3" name="TextBox 2"/>
+          <p:cNvSpPr txBox="1"/>
+          <p:nvPr/>
+        </p:nvSpPr>
+        <p:spPr>
+          <a:xfrm>
+            <a:off x="880110" y="640080"/>
+            <a:ext cx="10469880" cy="2246769"/>
+          </a:xfrm>
+          <a:prstGeom prst="rect">
+            <a:avLst/>
+          </a:prstGeom>
+          <a:noFill/>
+        </p:spPr>
+        <p:txBody>
+          <a:bodyPr wrap="square" rtlCol="0">
+            <a:spAutoFit/>
+          </a:bodyPr>
+          <a:lstStyle/>
+          <a:p>
+            <a:r>
+              <a:rPr lang="en-US" altLang="ko-KR" sz="3200" dirty="0" err="1" smtClean="0"/>
+              <a:t>tenant_config</a:t>
+            </a:r>
+            <a:r>
+              <a:rPr lang="en-US" altLang="ko-KR" sz="3200" dirty="0" smtClean="0"/>
+              <a:t> </a:t>
+            </a:r>
+            <a:r>
+              <a:rPr lang="ko-KR" altLang="en-US" sz="3200" dirty="0" smtClean="0"/>
+              <a:t>설정</a:t>
+            </a:r>
+            <a:r>
+              <a:rPr lang="en-US" altLang="ko-KR" sz="3200" dirty="0" smtClean="0"/>
+              <a:t>.</a:t>
+            </a:r>
+          </a:p>
+          <a:p>
+            <a:pPr marL="800100" lvl="1" indent="-342900">
+              <a:buAutoNum type="arabicPeriod"/>
+            </a:pPr>
+            <a:r>
+              <a:rPr lang="en-US" altLang="ko-KR" dirty="0" err="1" smtClean="0"/>
+              <a:t>tbl_codelist</a:t>
+            </a:r>
+            <a:r>
+              <a:rPr lang="ko-KR" altLang="en-US" dirty="0" smtClean="0"/>
+              <a:t>에서 </a:t>
+            </a:r>
+            <a:r>
+              <a:rPr lang="ko-KR" altLang="en-US" dirty="0" err="1" smtClean="0"/>
+              <a:t>유통양식</a:t>
+            </a:r>
+            <a:r>
+              <a:rPr lang="ko-KR" altLang="en-US" dirty="0" smtClean="0"/>
+              <a:t> 경로</a:t>
+            </a:r>
+            <a:r>
+              <a:rPr lang="en-US" altLang="ko-KR" dirty="0" smtClean="0"/>
+              <a:t>(A36, 003)</a:t>
+            </a:r>
+            <a:r>
+              <a:rPr lang="ko-KR" altLang="en-US" dirty="0" smtClean="0"/>
+              <a:t>를 </a:t>
+            </a:r>
+            <a:r>
+              <a:rPr lang="ko-KR" altLang="en-US" dirty="0" err="1" smtClean="0"/>
+              <a:t>웹기안기</a:t>
+            </a:r>
+            <a:r>
+              <a:rPr lang="en-US" altLang="ko-KR" dirty="0" smtClean="0"/>
+              <a:t>/</a:t>
+            </a:r>
+            <a:r>
+              <a:rPr lang="ko-KR" altLang="en-US" dirty="0" smtClean="0"/>
+              <a:t>한글기안기에 맞게 양식 경로 설정</a:t>
+            </a:r>
+            <a:r>
+              <a:rPr lang="en-US" altLang="ko-KR" dirty="0" smtClean="0"/>
+              <a:t>.</a:t>
+            </a:r>
+            <a:endParaRPr lang="en-US" altLang="ko-KR" dirty="0"/>
+          </a:p>
+          <a:p>
+            <a:pPr lvl="1"/>
+            <a:r>
+              <a:rPr lang="en-US" altLang="ko-KR" dirty="0" smtClean="0"/>
+              <a:t>ex) </a:t>
+            </a:r>
+            <a:r>
+              <a:rPr lang="en-US" altLang="ko-KR" dirty="0" err="1" smtClean="0"/>
+              <a:t>hwp</a:t>
+            </a:r>
+            <a:r>
+              <a:rPr lang="en-US" altLang="ko-KR" dirty="0" smtClean="0"/>
+              <a:t> = /files/</a:t>
+            </a:r>
+            <a:r>
+              <a:rPr lang="en-US" altLang="ko-KR" dirty="0" err="1" smtClean="0"/>
+              <a:t>upload_approvalG</a:t>
+            </a:r>
+            <a:r>
+              <a:rPr lang="en-US" altLang="ko-KR" dirty="0" smtClean="0"/>
+              <a:t>/form/relay001.hwp</a:t>
+            </a:r>
+          </a:p>
+          <a:p>
+            <a:pPr lvl="1"/>
+            <a:r>
+              <a:rPr lang="en-US" altLang="ko-KR" dirty="0" smtClean="0"/>
+              <a:t>     </a:t>
+            </a:r>
+            <a:r>
+              <a:rPr lang="en-US" altLang="ko-KR" dirty="0" err="1" smtClean="0"/>
+              <a:t>mht</a:t>
+            </a:r>
+            <a:r>
+              <a:rPr lang="en-US" altLang="ko-KR" dirty="0" smtClean="0"/>
+              <a:t> = /files/</a:t>
+            </a:r>
+            <a:r>
+              <a:rPr lang="en-US" altLang="ko-KR" dirty="0" err="1" smtClean="0"/>
+              <a:t>upload_approvalG</a:t>
+            </a:r>
+            <a:r>
+              <a:rPr lang="en-US" altLang="ko-KR" dirty="0" smtClean="0"/>
+              <a:t>/form/2016000001.mht</a:t>
+            </a:r>
+          </a:p>
+          <a:p>
+            <a:pPr lvl="1"/>
+            <a:endParaRPr lang="en-US" altLang="ko-KR" dirty="0" smtClean="0"/>
+          </a:p>
+          <a:p>
+            <a:pPr marL="800100" lvl="1" indent="-342900">
+              <a:buAutoNum type="arabicPeriod" startAt="2"/>
+            </a:pPr>
+            <a:r>
+              <a:rPr lang="en-US" altLang="ko-KR" dirty="0" err="1" smtClean="0"/>
+              <a:t>UserInfo_RelayG_Type</a:t>
+            </a:r>
+            <a:r>
+              <a:rPr lang="en-US" altLang="ko-KR" dirty="0" smtClean="0"/>
+              <a:t> </a:t>
+            </a:r>
+            <a:r>
+              <a:rPr lang="en-US" altLang="ko-KR" dirty="0"/>
+              <a:t>= </a:t>
+            </a:r>
+            <a:r>
+              <a:rPr lang="en-US" altLang="ko-KR" dirty="0" smtClean="0"/>
+              <a:t>HWP</a:t>
+            </a:r>
+          </a:p>
+          <a:p>
+            <a:pPr marL="800100" lvl="1" indent="-342900">
+              <a:buAutoNum type="arabicPeriod" startAt="2"/>
+            </a:pPr>
+            <a:r>
+              <a:rPr lang="en-US" altLang="ko-KR" dirty="0" err="1" smtClean="0"/>
+              <a:t>config.Run_RelayScheduler</a:t>
+            </a:r>
+            <a:r>
+              <a:rPr lang="en-US" altLang="ko-KR" dirty="0" smtClean="0"/>
+              <a:t> = YES</a:t>
+            </a:r>
+          </a:p>
+        </p:txBody>
+      </p:sp>
+      <p:sp>
+        <p:nvSpPr>
+          <p:cNvPr id="4" name="TextBox 3"/>
+          <p:cNvSpPr txBox="1"/>
+          <p:nvPr/>
+        </p:nvSpPr>
+        <p:spPr>
+          <a:xfrm>
+            <a:off x="880110" y="3318510"/>
+            <a:ext cx="10469880" cy="861774"/>
+          </a:xfrm>
+          <a:prstGeom prst="rect">
+            <a:avLst/>
+          </a:prstGeom>
+          <a:noFill/>
+        </p:spPr>
+        <p:txBody>
+          <a:bodyPr wrap="square" rtlCol="0">
+            <a:spAutoFit/>
+          </a:bodyPr>
+          <a:lstStyle/>
+          <a:p>
+            <a:r>
+              <a:rPr lang="ko-KR" altLang="en-US" sz="3200" dirty="0" smtClean="0"/>
+              <a:t>그룹웨어</a:t>
+            </a:r>
+            <a:r>
+              <a:rPr lang="en-US" altLang="ko-KR" sz="3200" dirty="0" smtClean="0"/>
+              <a:t> </a:t>
+            </a:r>
+            <a:r>
+              <a:rPr lang="ko-KR" altLang="en-US" sz="3200" dirty="0" smtClean="0"/>
+              <a:t>설정</a:t>
+            </a:r>
+            <a:r>
+              <a:rPr lang="en-US" altLang="ko-KR" sz="3200" dirty="0" smtClean="0"/>
+              <a:t>.</a:t>
+            </a:r>
+          </a:p>
+          <a:p>
+            <a:pPr marL="800100" lvl="1" indent="-342900">
+              <a:buAutoNum type="arabicPeriod"/>
+            </a:pPr>
+            <a:r>
+              <a:rPr lang="ko-KR" altLang="en-US" dirty="0" smtClean="0"/>
+              <a:t>관리자 </a:t>
+            </a:r>
+            <a:r>
+              <a:rPr lang="en-US" altLang="ko-KR" dirty="0" smtClean="0"/>
+              <a:t>- </a:t>
+            </a:r>
+            <a:r>
+              <a:rPr lang="ko-KR" altLang="en-US" dirty="0" smtClean="0"/>
+              <a:t>조직도 </a:t>
+            </a:r>
+            <a:r>
+              <a:rPr lang="en-US" altLang="ko-KR" dirty="0" smtClean="0"/>
+              <a:t>- </a:t>
+            </a:r>
+            <a:r>
+              <a:rPr lang="ko-KR" altLang="en-US" dirty="0" err="1" smtClean="0"/>
+              <a:t>외부문서를</a:t>
+            </a:r>
+            <a:r>
+              <a:rPr lang="ko-KR" altLang="en-US" dirty="0" smtClean="0"/>
+              <a:t> 수신할 부서에 </a:t>
+            </a:r>
+            <a:r>
+              <a:rPr lang="ko-KR" altLang="en-US" dirty="0" err="1" smtClean="0"/>
+              <a:t>기관코드를</a:t>
+            </a:r>
+            <a:r>
+              <a:rPr lang="ko-KR" altLang="en-US" dirty="0" smtClean="0"/>
+              <a:t> 입력</a:t>
+            </a:r>
+            <a:r>
+              <a:rPr lang="en-US" altLang="ko-KR" dirty="0" smtClean="0"/>
+              <a:t>.</a:t>
+            </a:r>
+            <a:r>
+              <a:rPr lang="ko-KR" altLang="en-US" dirty="0" smtClean="0"/>
+              <a:t> </a:t>
+            </a:r>
+            <a:endParaRPr lang="en-US" altLang="ko-KR" dirty="0" smtClean="0"/>
+          </a:p>
+        </p:txBody>
+      </p:sp>
+    </p:spTree>
+    <p:extLst>
+      <p:ext uri="{BB962C8B-B14F-4D97-AF65-F5344CB8AC3E}">
+        <p14:creationId xmlns:p14="http://schemas.microsoft.com/office/powerpoint/2010/main" val="2541571713"/>
+      </p:ext>
+    </p:extLst>
+  </p:cSld>
+  <p:clrMapOvr>
+    <a:masterClrMapping/>
+  </p:clrMapOvr>
+</p:sld>
+</file>
+
+<file path=ppt/slides/slide15.xml><?xml version="1.0" encoding="utf-8"?>
+<p:sld xmlns:a="http://schemas.openxmlformats.org/drawingml/2006/main" xmlns:r="http://schemas.openxmlformats.org/officeDocument/2006/relationships" xmlns:p="http://schemas.openxmlformats.org/presentationml/2006/main">
+  <p:cSld>
+    <p:spTree>
+      <p:nvGrpSpPr>
+        <p:cNvPr id="1" name=""/>
+        <p:cNvGrpSpPr/>
+        <p:nvPr/>
+      </p:nvGrpSpPr>
+      <p:grpSpPr>
+        <a:xfrm>
+          <a:off x="0" y="0"/>
+          <a:ext cx="0" cy="0"/>
+          <a:chOff x="0" y="0"/>
+          <a:chExt cx="0" cy="0"/>
+        </a:xfrm>
+      </p:grpSpPr>
+      <p:sp>
+        <p:nvSpPr>
+          <p:cNvPr id="3" name="TextBox 2"/>
+          <p:cNvSpPr txBox="1"/>
+          <p:nvPr/>
+        </p:nvSpPr>
+        <p:spPr>
+          <a:xfrm>
+            <a:off x="880110" y="640080"/>
+            <a:ext cx="10469880" cy="1415772"/>
+          </a:xfrm>
+          <a:prstGeom prst="rect">
+            <a:avLst/>
+          </a:prstGeom>
+          <a:noFill/>
+        </p:spPr>
+        <p:txBody>
+          <a:bodyPr wrap="square" rtlCol="0">
+            <a:spAutoFit/>
+          </a:bodyPr>
+          <a:lstStyle/>
+          <a:p>
+            <a:r>
+              <a:rPr lang="en-US" altLang="ko-KR" sz="3200" dirty="0" err="1" smtClean="0"/>
+              <a:t>config.properties</a:t>
+            </a:r>
+            <a:r>
+              <a:rPr lang="en-US" altLang="ko-KR" sz="3200" dirty="0" smtClean="0"/>
+              <a:t> </a:t>
+            </a:r>
+            <a:r>
+              <a:rPr lang="ko-KR" altLang="en-US" sz="3200" dirty="0" smtClean="0"/>
+              <a:t>설정</a:t>
+            </a:r>
+            <a:r>
+              <a:rPr lang="en-US" altLang="ko-KR" sz="3200" dirty="0" smtClean="0"/>
+              <a:t>.</a:t>
+            </a:r>
+          </a:p>
+          <a:p>
+            <a:pPr marL="800100" lvl="1" indent="-342900">
+              <a:buAutoNum type="arabicPeriod"/>
+            </a:pPr>
+            <a:r>
+              <a:rPr lang="en-US" altLang="ko-KR" dirty="0" err="1" smtClean="0"/>
+              <a:t>config.companyNum</a:t>
+            </a:r>
+            <a:r>
+              <a:rPr lang="en-US" altLang="ko-KR" dirty="0" smtClean="0"/>
+              <a:t> </a:t>
+            </a:r>
+            <a:r>
+              <a:rPr lang="ko-KR" altLang="en-US" dirty="0" smtClean="0"/>
+              <a:t>에 </a:t>
+            </a:r>
+            <a:r>
+              <a:rPr lang="ko-KR" altLang="en-US" dirty="0" err="1" smtClean="0"/>
+              <a:t>기관코드</a:t>
+            </a:r>
+            <a:r>
+              <a:rPr lang="ko-KR" altLang="en-US" dirty="0" smtClean="0"/>
+              <a:t> 입력</a:t>
+            </a:r>
+            <a:r>
+              <a:rPr lang="en-US" altLang="ko-KR" dirty="0" smtClean="0"/>
+              <a:t>.</a:t>
+            </a:r>
+          </a:p>
+          <a:p>
+            <a:pPr marL="800100" lvl="1" indent="-342900">
+              <a:buAutoNum type="arabicPeriod"/>
+            </a:pPr>
+            <a:r>
+              <a:rPr lang="en-US" altLang="ko-KR" dirty="0" err="1" smtClean="0"/>
+              <a:t>relay_root</a:t>
+            </a:r>
+            <a:r>
+              <a:rPr lang="ko-KR" altLang="en-US" dirty="0" smtClean="0"/>
+              <a:t>만 </a:t>
+            </a:r>
+            <a:r>
+              <a:rPr lang="en-US" altLang="ko-KR" dirty="0" smtClean="0"/>
+              <a:t>/home/</a:t>
+            </a:r>
+            <a:r>
+              <a:rPr lang="en-US" altLang="ko-KR" dirty="0" err="1" smtClean="0"/>
+              <a:t>jmocha</a:t>
+            </a:r>
+            <a:r>
+              <a:rPr lang="en-US" altLang="ko-KR" dirty="0" smtClean="0"/>
+              <a:t>/</a:t>
+            </a:r>
+            <a:r>
+              <a:rPr lang="en-US" altLang="ko-KR" dirty="0" err="1" smtClean="0"/>
+              <a:t>ezEKP</a:t>
+            </a:r>
+            <a:r>
+              <a:rPr lang="en-US" altLang="ko-KR" dirty="0" smtClean="0"/>
+              <a:t>/</a:t>
+            </a:r>
+            <a:r>
+              <a:rPr lang="en-US" altLang="ko-KR" dirty="0" err="1" smtClean="0"/>
+              <a:t>ezFlow</a:t>
+            </a:r>
+            <a:r>
+              <a:rPr lang="en-US" altLang="ko-KR" dirty="0" smtClean="0"/>
+              <a:t>/</a:t>
+            </a:r>
+            <a:r>
+              <a:rPr lang="en-US" altLang="ko-KR" dirty="0" err="1" smtClean="0"/>
+              <a:t>webapps</a:t>
+            </a:r>
+            <a:r>
+              <a:rPr lang="en-US" altLang="ko-KR" dirty="0" smtClean="0"/>
+              <a:t>/ROOT</a:t>
+            </a:r>
+            <a:r>
+              <a:rPr lang="en-US" altLang="ko-KR" dirty="0"/>
+              <a:t/>
+            </a:r>
+            <a:br>
+              <a:rPr lang="en-US" altLang="ko-KR" dirty="0"/>
+            </a:br>
+            <a:r>
+              <a:rPr lang="ko-KR" altLang="en-US" dirty="0" smtClean="0"/>
+              <a:t>로 수정</a:t>
+            </a:r>
+            <a:r>
+              <a:rPr lang="en-US" altLang="ko-KR" dirty="0" smtClean="0"/>
+              <a:t>.</a:t>
+            </a:r>
+          </a:p>
+        </p:txBody>
+      </p:sp>
+    </p:spTree>
+    <p:extLst>
+      <p:ext uri="{BB962C8B-B14F-4D97-AF65-F5344CB8AC3E}">
+        <p14:creationId xmlns:p14="http://schemas.microsoft.com/office/powerpoint/2010/main" val="932094438"/>
+      </p:ext>
+    </p:extLst>
+  </p:cSld>
+  <p:clrMapOvr>
+    <a:masterClrMapping/>
+  </p:clrMapOvr>
+</p:sld>
+</file>
+
+<file path=ppt/slides/slide16.xml><?xml version="1.0" encoding="utf-8"?>
+<p:sld xmlns:a="http://schemas.openxmlformats.org/drawingml/2006/main" xmlns:r="http://schemas.openxmlformats.org/officeDocument/2006/relationships" xmlns:p="http://schemas.openxmlformats.org/presentationml/2006/main">
+  <p:cSld>
+    <p:spTree>
+      <p:nvGrpSpPr>
+        <p:cNvPr id="1" name=""/>
+        <p:cNvGrpSpPr/>
+        <p:nvPr/>
+      </p:nvGrpSpPr>
+      <p:grpSpPr>
+        <a:xfrm>
+          <a:off x="0" y="0"/>
+          <a:ext cx="0" cy="0"/>
+          <a:chOff x="0" y="0"/>
+          <a:chExt cx="0" cy="0"/>
+        </a:xfrm>
+      </p:grpSpPr>
+      <p:sp>
+        <p:nvSpPr>
+          <p:cNvPr id="3" name="TextBox 2"/>
+          <p:cNvSpPr txBox="1"/>
+          <p:nvPr/>
+        </p:nvSpPr>
+        <p:spPr>
+          <a:xfrm>
+            <a:off x="948690" y="651510"/>
+            <a:ext cx="10469880" cy="5724644"/>
+          </a:xfrm>
+          <a:prstGeom prst="rect">
+            <a:avLst/>
+          </a:prstGeom>
+          <a:noFill/>
+        </p:spPr>
+        <p:txBody>
+          <a:bodyPr wrap="square" rtlCol="0">
+            <a:spAutoFit/>
+          </a:bodyPr>
+          <a:lstStyle/>
+          <a:p>
+            <a:r>
+              <a:rPr lang="en-US" altLang="ko-KR" dirty="0" smtClean="0"/>
+              <a:t>NFS </a:t>
+            </a:r>
+            <a:r>
+              <a:rPr lang="ko-KR" altLang="en-US" dirty="0" smtClean="0"/>
+              <a:t>설정방법</a:t>
+            </a:r>
+            <a:endParaRPr lang="en-US" altLang="ko-KR" dirty="0" smtClean="0"/>
+          </a:p>
+          <a:p>
+            <a:r>
+              <a:rPr lang="en-US" altLang="ko-KR" sz="1200" dirty="0"/>
+              <a:t>NFS </a:t>
+            </a:r>
+            <a:r>
+              <a:rPr lang="ko-KR" altLang="en-US" sz="1200" dirty="0" err="1"/>
+              <a:t>마운트하기</a:t>
+            </a:r>
+            <a:r>
+              <a:rPr lang="ko-KR" altLang="en-US" sz="1200" dirty="0"/>
+              <a:t> 위한 방화벽</a:t>
+            </a:r>
+            <a:r>
+              <a:rPr lang="en-US" altLang="ko-KR" sz="1200" dirty="0"/>
+              <a:t>, </a:t>
+            </a:r>
+            <a:r>
+              <a:rPr lang="ko-KR" altLang="en-US" sz="1200" dirty="0"/>
+              <a:t>경로 확인</a:t>
+            </a:r>
+            <a:r>
+              <a:rPr lang="en-US" altLang="ko-KR" sz="1200" dirty="0"/>
+              <a:t>.</a:t>
+            </a:r>
+          </a:p>
+          <a:p>
+            <a:r>
+              <a:rPr lang="ko-KR" altLang="en-US" sz="1200" dirty="0"/>
+              <a:t>그룹웨어에서 </a:t>
+            </a:r>
+            <a:r>
+              <a:rPr lang="en-US" altLang="ko-KR" sz="1200" dirty="0"/>
+              <a:t>telnet</a:t>
+            </a:r>
+            <a:r>
+              <a:rPr lang="ko-KR" altLang="en-US" sz="1200" dirty="0" smtClean="0"/>
+              <a:t>으로 </a:t>
+            </a:r>
+            <a:r>
+              <a:rPr lang="en-US" altLang="ko-KR" sz="1200" dirty="0" smtClean="0"/>
+              <a:t>111</a:t>
+            </a:r>
+            <a:r>
+              <a:rPr lang="en-US" altLang="ko-KR" sz="1200" dirty="0"/>
+              <a:t>, 2049, 20048 </a:t>
+            </a:r>
+            <a:r>
+              <a:rPr lang="ko-KR" altLang="en-US" sz="1200" dirty="0"/>
+              <a:t>포트 개방 확인</a:t>
+            </a:r>
+          </a:p>
+          <a:p>
+            <a:r>
+              <a:rPr lang="ko-KR" altLang="en-US" sz="1200" dirty="0" err="1"/>
+              <a:t>닫혀있으면</a:t>
+            </a:r>
+            <a:r>
+              <a:rPr lang="en-US" altLang="ko-KR" sz="1200" dirty="0"/>
+              <a:t>, source </a:t>
+            </a:r>
+            <a:r>
+              <a:rPr lang="ko-KR" altLang="en-US" sz="1200" dirty="0"/>
+              <a:t>그룹웨어 </a:t>
+            </a:r>
+            <a:r>
+              <a:rPr lang="en-US" altLang="ko-KR" sz="1200" dirty="0" smtClean="0"/>
+              <a:t>destination </a:t>
+            </a:r>
+            <a:r>
+              <a:rPr lang="ko-KR" altLang="en-US" sz="1200" dirty="0"/>
+              <a:t>문서유통으로 </a:t>
+            </a:r>
+            <a:r>
+              <a:rPr lang="ko-KR" altLang="en-US" sz="1200" dirty="0" err="1"/>
+              <a:t>해당포트</a:t>
+            </a:r>
+            <a:r>
+              <a:rPr lang="ko-KR" altLang="en-US" sz="1200" dirty="0"/>
+              <a:t> 개방 요청</a:t>
+            </a:r>
+            <a:r>
+              <a:rPr lang="en-US" altLang="ko-KR" sz="1200" dirty="0"/>
+              <a:t>.</a:t>
+            </a:r>
+          </a:p>
+          <a:p>
+            <a:endParaRPr lang="en-US" altLang="ko-KR" sz="1200" dirty="0"/>
+          </a:p>
+          <a:p>
+            <a:r>
+              <a:rPr lang="en-US" altLang="ko-KR" sz="1200" dirty="0"/>
+              <a:t>rpm -</a:t>
+            </a:r>
+            <a:r>
+              <a:rPr lang="en-US" altLang="ko-KR" sz="1200" dirty="0" err="1"/>
+              <a:t>qa</a:t>
+            </a:r>
+            <a:r>
+              <a:rPr lang="en-US" altLang="ko-KR" sz="1200" dirty="0"/>
+              <a:t> </a:t>
+            </a:r>
+            <a:r>
+              <a:rPr lang="en-US" altLang="ko-KR" sz="1200" dirty="0" err="1"/>
+              <a:t>nfs-utils</a:t>
+            </a:r>
+            <a:r>
+              <a:rPr lang="en-US" altLang="ko-KR" sz="1200" dirty="0"/>
+              <a:t> </a:t>
+            </a:r>
+            <a:r>
+              <a:rPr lang="ko-KR" altLang="en-US" sz="1200" dirty="0"/>
+              <a:t>로 </a:t>
+            </a:r>
+            <a:r>
+              <a:rPr lang="ko-KR" altLang="en-US" sz="1200" dirty="0" err="1"/>
+              <a:t>설치유무</a:t>
+            </a:r>
+            <a:r>
+              <a:rPr lang="ko-KR" altLang="en-US" sz="1200" dirty="0"/>
+              <a:t> 검색</a:t>
+            </a:r>
+          </a:p>
+          <a:p>
+            <a:r>
+              <a:rPr lang="ko-KR" altLang="en-US" sz="1200" dirty="0"/>
+              <a:t>설치가 안되어 있으면</a:t>
+            </a:r>
+            <a:r>
+              <a:rPr lang="en-US" altLang="ko-KR" sz="1200" dirty="0"/>
+              <a:t>,</a:t>
+            </a:r>
+          </a:p>
+          <a:p>
+            <a:r>
+              <a:rPr lang="en-US" altLang="ko-KR" sz="1200" dirty="0"/>
+              <a:t>yum install -y </a:t>
+            </a:r>
+            <a:r>
+              <a:rPr lang="en-US" altLang="ko-KR" sz="1200" dirty="0" err="1"/>
+              <a:t>nfs-utils</a:t>
+            </a:r>
+            <a:r>
+              <a:rPr lang="en-US" altLang="ko-KR" sz="1200" dirty="0"/>
+              <a:t> </a:t>
+            </a:r>
+            <a:r>
+              <a:rPr lang="ko-KR" altLang="en-US" sz="1200" dirty="0"/>
+              <a:t>로 설치</a:t>
+            </a:r>
+            <a:r>
+              <a:rPr lang="en-US" altLang="ko-KR" sz="1200" dirty="0"/>
+              <a:t>.</a:t>
+            </a:r>
+          </a:p>
+          <a:p>
+            <a:r>
+              <a:rPr lang="en-US" altLang="ko-KR" sz="1200" dirty="0"/>
+              <a:t>/</a:t>
+            </a:r>
+            <a:r>
+              <a:rPr lang="en-US" altLang="ko-KR" sz="1200" dirty="0" err="1"/>
+              <a:t>etc</a:t>
+            </a:r>
+            <a:r>
+              <a:rPr lang="en-US" altLang="ko-KR" sz="1200" dirty="0"/>
+              <a:t>/exports </a:t>
+            </a:r>
+            <a:r>
+              <a:rPr lang="ko-KR" altLang="en-US" sz="1200" dirty="0"/>
+              <a:t>를 편집하여 </a:t>
+            </a:r>
+            <a:r>
+              <a:rPr lang="ko-KR" altLang="en-US" sz="1200" dirty="0" err="1"/>
+              <a:t>옵션설정</a:t>
+            </a:r>
+            <a:endParaRPr lang="ko-KR" altLang="en-US" sz="1200" dirty="0"/>
+          </a:p>
+          <a:p>
+            <a:r>
+              <a:rPr lang="en-US" altLang="ko-KR" sz="1200" dirty="0"/>
+              <a:t>ex) /home/</a:t>
+            </a:r>
+            <a:r>
+              <a:rPr lang="en-US" altLang="ko-KR" sz="1200" dirty="0" err="1"/>
+              <a:t>jmocha</a:t>
+            </a:r>
+            <a:r>
+              <a:rPr lang="en-US" altLang="ko-KR" sz="1200" dirty="0"/>
+              <a:t>/relay 10.4.204.*(</a:t>
+            </a:r>
+            <a:r>
+              <a:rPr lang="en-US" altLang="ko-KR" sz="1200" dirty="0" err="1" smtClean="0"/>
+              <a:t>rw,sync,fsid</a:t>
+            </a:r>
+            <a:r>
+              <a:rPr lang="en-US" altLang="ko-KR" sz="1200" dirty="0" smtClean="0"/>
+              <a:t>=0)</a:t>
+            </a:r>
+            <a:endParaRPr lang="en-US" altLang="ko-KR" sz="1200" dirty="0"/>
+          </a:p>
+          <a:p>
+            <a:r>
+              <a:rPr lang="en-US" altLang="ko-KR" sz="1200" dirty="0" err="1"/>
+              <a:t>exportfs</a:t>
+            </a:r>
+            <a:r>
+              <a:rPr lang="en-US" altLang="ko-KR" sz="1200" dirty="0"/>
+              <a:t> -v </a:t>
+            </a:r>
+            <a:r>
+              <a:rPr lang="ko-KR" altLang="en-US" sz="1200" dirty="0"/>
+              <a:t>로 마운트 현황 확인</a:t>
+            </a:r>
+            <a:r>
+              <a:rPr lang="en-US" altLang="ko-KR" sz="1200" dirty="0"/>
+              <a:t>.</a:t>
+            </a:r>
+          </a:p>
+          <a:p>
+            <a:r>
+              <a:rPr lang="en-US" altLang="ko-KR" sz="1200" dirty="0" err="1"/>
+              <a:t>exportfs</a:t>
+            </a:r>
+            <a:r>
+              <a:rPr lang="en-US" altLang="ko-KR" sz="1200" dirty="0"/>
+              <a:t> -r </a:t>
+            </a:r>
+            <a:r>
+              <a:rPr lang="ko-KR" altLang="en-US" sz="1200" dirty="0"/>
+              <a:t>로 </a:t>
+            </a:r>
+            <a:r>
+              <a:rPr lang="ko-KR" altLang="en-US" sz="1200" dirty="0" smtClean="0"/>
+              <a:t>갱신해야 </a:t>
+            </a:r>
+            <a:r>
+              <a:rPr lang="en-US" altLang="ko-KR" sz="1200" dirty="0" smtClean="0"/>
+              <a:t>exports </a:t>
+            </a:r>
+            <a:r>
+              <a:rPr lang="ko-KR" altLang="en-US" sz="1200" dirty="0" smtClean="0"/>
+              <a:t>파일 수정 내용이 반영됨</a:t>
+            </a:r>
+            <a:r>
+              <a:rPr lang="en-US" altLang="ko-KR" sz="1200" dirty="0" smtClean="0"/>
+              <a:t>.</a:t>
+            </a:r>
+            <a:endParaRPr lang="en-US" altLang="ko-KR" sz="1200" dirty="0"/>
+          </a:p>
+          <a:p>
+            <a:endParaRPr lang="en-US" altLang="ko-KR" sz="1200" dirty="0"/>
+          </a:p>
+          <a:p>
+            <a:r>
+              <a:rPr lang="ko-KR" altLang="en-US" sz="1200" dirty="0"/>
+              <a:t>그룹웨어 서버에서</a:t>
+            </a:r>
+          </a:p>
+          <a:p>
+            <a:r>
+              <a:rPr lang="en-US" altLang="ko-KR" sz="1200" dirty="0"/>
+              <a:t>/</a:t>
+            </a:r>
+            <a:r>
+              <a:rPr lang="en-US" altLang="ko-KR" sz="1200" dirty="0" err="1"/>
+              <a:t>etc</a:t>
+            </a:r>
+            <a:r>
+              <a:rPr lang="en-US" altLang="ko-KR" sz="1200" dirty="0"/>
+              <a:t>/</a:t>
+            </a:r>
+            <a:r>
+              <a:rPr lang="en-US" altLang="ko-KR" sz="1200" dirty="0" err="1"/>
+              <a:t>fstab</a:t>
+            </a:r>
+            <a:r>
+              <a:rPr lang="ko-KR" altLang="en-US" sz="1200" dirty="0"/>
+              <a:t>에 마운트 위치 작성</a:t>
+            </a:r>
+          </a:p>
+          <a:p>
+            <a:r>
+              <a:rPr lang="en-US" altLang="ko-KR" sz="1200" dirty="0"/>
+              <a:t>ex) 172.16.1.5:/home/</a:t>
+            </a:r>
+            <a:r>
+              <a:rPr lang="en-US" altLang="ko-KR" sz="1200" dirty="0" err="1"/>
+              <a:t>jmocha</a:t>
+            </a:r>
+            <a:r>
+              <a:rPr lang="en-US" altLang="ko-KR" sz="1200" dirty="0"/>
+              <a:t>/relay	/home/</a:t>
+            </a:r>
+            <a:r>
+              <a:rPr lang="en-US" altLang="ko-KR" sz="1200" dirty="0" err="1"/>
+              <a:t>jmocha</a:t>
+            </a:r>
+            <a:r>
+              <a:rPr lang="en-US" altLang="ko-KR" sz="1200" dirty="0"/>
+              <a:t>/relay	</a:t>
+            </a:r>
+            <a:r>
+              <a:rPr lang="en-US" altLang="ko-KR" sz="1200" dirty="0" err="1"/>
+              <a:t>nfs</a:t>
+            </a:r>
+            <a:r>
+              <a:rPr lang="en-US" altLang="ko-KR" sz="1200" dirty="0"/>
+              <a:t>	defaults	0 0</a:t>
+            </a:r>
+          </a:p>
+          <a:p>
+            <a:r>
+              <a:rPr lang="en-US" altLang="ko-KR" sz="1200" dirty="0" err="1"/>
+              <a:t>fstab</a:t>
+            </a:r>
+            <a:r>
+              <a:rPr lang="en-US" altLang="ko-KR" sz="1200" dirty="0"/>
+              <a:t> </a:t>
+            </a:r>
+            <a:r>
+              <a:rPr lang="ko-KR" altLang="en-US" sz="1200" dirty="0"/>
+              <a:t>작성 후</a:t>
+            </a:r>
+            <a:r>
+              <a:rPr lang="en-US" altLang="ko-KR" sz="1200" dirty="0"/>
+              <a:t>,</a:t>
+            </a:r>
+          </a:p>
+          <a:p>
+            <a:r>
+              <a:rPr lang="en-US" altLang="ko-KR" sz="1200" dirty="0"/>
+              <a:t>mount -t 172.16.1.5:/home/</a:t>
+            </a:r>
+            <a:r>
+              <a:rPr lang="en-US" altLang="ko-KR" sz="1200" dirty="0" err="1"/>
+              <a:t>jmocha</a:t>
+            </a:r>
+            <a:r>
+              <a:rPr lang="en-US" altLang="ko-KR" sz="1200" dirty="0"/>
+              <a:t>/relay </a:t>
+            </a:r>
+            <a:r>
+              <a:rPr lang="ko-KR" altLang="en-US" sz="1200" dirty="0"/>
+              <a:t>를 하면 해당 경로를 찾아서 </a:t>
+            </a:r>
+            <a:r>
+              <a:rPr lang="en-US" altLang="ko-KR" sz="1200" dirty="0"/>
+              <a:t>/home/</a:t>
+            </a:r>
+            <a:r>
+              <a:rPr lang="en-US" altLang="ko-KR" sz="1200" dirty="0" err="1"/>
+              <a:t>jmocha</a:t>
+            </a:r>
+            <a:r>
+              <a:rPr lang="en-US" altLang="ko-KR" sz="1200" dirty="0"/>
+              <a:t>/relay</a:t>
+            </a:r>
+            <a:r>
+              <a:rPr lang="ko-KR" altLang="en-US" sz="1200" dirty="0"/>
+              <a:t>에 마운트 됨</a:t>
+            </a:r>
+            <a:r>
+              <a:rPr lang="en-US" altLang="ko-KR" sz="1200" dirty="0"/>
+              <a:t>.</a:t>
+            </a:r>
+          </a:p>
+          <a:p>
+            <a:r>
+              <a:rPr lang="en-US" altLang="ko-KR" sz="1200" dirty="0" err="1"/>
+              <a:t>showmount</a:t>
+            </a:r>
+            <a:r>
+              <a:rPr lang="en-US" altLang="ko-KR" sz="1200" dirty="0"/>
+              <a:t> -e </a:t>
+            </a:r>
+            <a:r>
+              <a:rPr lang="ko-KR" altLang="en-US" sz="1200" dirty="0"/>
+              <a:t>로 마운트 유무를 확인할 수 있는데 </a:t>
+            </a:r>
+            <a:r>
+              <a:rPr lang="en-US" altLang="ko-KR" sz="1200" dirty="0" err="1"/>
+              <a:t>showmount</a:t>
+            </a:r>
+            <a:r>
+              <a:rPr lang="ko-KR" altLang="en-US" sz="1200" dirty="0"/>
+              <a:t>는 접근이 안돼도 마운트는 되기도 하므로 마운트 시도를 해봄</a:t>
+            </a:r>
+            <a:r>
+              <a:rPr lang="en-US" altLang="ko-KR" sz="1200" dirty="0"/>
+              <a:t>.</a:t>
+            </a:r>
+          </a:p>
+          <a:p>
+            <a:endParaRPr lang="en-US" altLang="ko-KR" sz="1200" dirty="0"/>
+          </a:p>
+          <a:p>
+            <a:r>
+              <a:rPr lang="ko-KR" altLang="en-US" sz="1200" dirty="0"/>
+              <a:t>마운트 후 위에 </a:t>
+            </a:r>
+            <a:r>
+              <a:rPr lang="en-US" altLang="ko-KR" sz="1200" dirty="0" err="1"/>
+              <a:t>no_root_squash</a:t>
+            </a:r>
+            <a:r>
+              <a:rPr lang="en-US" altLang="ko-KR" sz="1200" dirty="0"/>
+              <a:t> </a:t>
+            </a:r>
+            <a:r>
+              <a:rPr lang="ko-KR" altLang="en-US" sz="1200" dirty="0"/>
+              <a:t>옵션이 없다면 접근은 못하는데</a:t>
+            </a:r>
+            <a:r>
+              <a:rPr lang="en-US" altLang="ko-KR" sz="1200" dirty="0"/>
+              <a:t>,</a:t>
+            </a:r>
+          </a:p>
+          <a:p>
+            <a:r>
+              <a:rPr lang="ko-KR" altLang="en-US" sz="1200" dirty="0"/>
+              <a:t>이때</a:t>
+            </a:r>
+            <a:r>
+              <a:rPr lang="en-US" altLang="ko-KR" sz="1200" dirty="0"/>
+              <a:t>, /</a:t>
+            </a:r>
+            <a:r>
+              <a:rPr lang="en-US" altLang="ko-KR" sz="1200" dirty="0" err="1"/>
+              <a:t>etc</a:t>
+            </a:r>
+            <a:r>
+              <a:rPr lang="en-US" altLang="ko-KR" sz="1200" dirty="0"/>
+              <a:t>/</a:t>
+            </a:r>
+            <a:r>
+              <a:rPr lang="en-US" altLang="ko-KR" sz="1200" dirty="0" err="1"/>
+              <a:t>passwd</a:t>
+            </a:r>
+            <a:r>
+              <a:rPr lang="en-US" altLang="ko-KR" sz="1200" dirty="0"/>
+              <a:t> </a:t>
+            </a:r>
+            <a:r>
+              <a:rPr lang="ko-KR" altLang="en-US" sz="1200" dirty="0"/>
+              <a:t>에서 </a:t>
+            </a:r>
+            <a:r>
+              <a:rPr lang="ko-KR" altLang="en-US" sz="1200" dirty="0" err="1" smtClean="0"/>
+              <a:t>유통서버</a:t>
+            </a:r>
+            <a:r>
+              <a:rPr lang="ko-KR" altLang="en-US" sz="1200" dirty="0" smtClean="0"/>
+              <a:t> </a:t>
+            </a:r>
+            <a:r>
+              <a:rPr lang="en-US" altLang="ko-KR" sz="1200" dirty="0" err="1" smtClean="0"/>
+              <a:t>jmocha</a:t>
+            </a:r>
+            <a:r>
+              <a:rPr lang="en-US" altLang="ko-KR" sz="1200" dirty="0" smtClean="0"/>
+              <a:t> </a:t>
+            </a:r>
+            <a:r>
+              <a:rPr lang="ko-KR" altLang="en-US" sz="1200" dirty="0" smtClean="0"/>
+              <a:t>사용자와 </a:t>
+            </a:r>
+            <a:r>
+              <a:rPr lang="ko-KR" altLang="en-US" sz="1200" dirty="0"/>
+              <a:t>그룹웨어 서버의 </a:t>
+            </a:r>
+            <a:r>
+              <a:rPr lang="en-US" altLang="ko-KR" sz="1200" dirty="0" err="1"/>
+              <a:t>jmocha</a:t>
+            </a:r>
+            <a:r>
+              <a:rPr lang="en-US" altLang="ko-KR" sz="1200" dirty="0"/>
+              <a:t> </a:t>
+            </a:r>
+            <a:r>
+              <a:rPr lang="ko-KR" altLang="en-US" sz="1200" dirty="0"/>
+              <a:t>사용자의 </a:t>
+            </a:r>
+            <a:r>
+              <a:rPr lang="en-US" altLang="ko-KR" sz="1200" dirty="0" err="1" smtClean="0"/>
+              <a:t>uid</a:t>
+            </a:r>
+            <a:r>
+              <a:rPr lang="ko-KR" altLang="en-US" sz="1200" dirty="0"/>
+              <a:t>와 </a:t>
+            </a:r>
+            <a:r>
+              <a:rPr lang="en-US" altLang="ko-KR" sz="1200" dirty="0" err="1" smtClean="0"/>
+              <a:t>gid</a:t>
+            </a:r>
+            <a:r>
+              <a:rPr lang="ko-KR" altLang="en-US" sz="1200" dirty="0"/>
+              <a:t>를 일치시켜주고</a:t>
+            </a:r>
+          </a:p>
+          <a:p>
+            <a:r>
+              <a:rPr lang="ko-KR" altLang="en-US" sz="1200" dirty="0"/>
+              <a:t>해당 사용자의 </a:t>
+            </a:r>
+            <a:r>
+              <a:rPr lang="ko-KR" altLang="en-US" sz="1200" dirty="0" smtClean="0"/>
+              <a:t>폴더 소유자를 </a:t>
+            </a:r>
+            <a:r>
+              <a:rPr lang="ko-KR" altLang="en-US" sz="1200" dirty="0"/>
+              <a:t>바꿔주면 접근 할 수 있다</a:t>
+            </a:r>
+            <a:r>
+              <a:rPr lang="en-US" altLang="ko-KR" sz="1200" dirty="0"/>
+              <a:t>.</a:t>
+            </a:r>
+          </a:p>
+          <a:p>
+            <a:endParaRPr lang="en-US" altLang="ko-KR" sz="1200" dirty="0"/>
+          </a:p>
+          <a:p>
+            <a:r>
+              <a:rPr lang="ko-KR" altLang="en-US" sz="1200" dirty="0"/>
+              <a:t>위와 같이 했는데도 안되면</a:t>
+            </a:r>
+            <a:r>
+              <a:rPr lang="en-US" altLang="ko-KR" sz="1200" dirty="0"/>
+              <a:t>, </a:t>
+            </a:r>
+            <a:r>
+              <a:rPr lang="ko-KR" altLang="en-US" sz="1200" dirty="0"/>
+              <a:t>그룹웨어에서 </a:t>
+            </a:r>
+            <a:r>
+              <a:rPr lang="en-US" altLang="ko-KR" sz="1200" dirty="0"/>
+              <a:t>telnet</a:t>
+            </a:r>
+            <a:r>
+              <a:rPr lang="ko-KR" altLang="en-US" sz="1200" dirty="0"/>
+              <a:t>으로 붙고 유통서버에서 </a:t>
+            </a:r>
+            <a:r>
+              <a:rPr lang="en-US" altLang="ko-KR" sz="1200" dirty="0" err="1"/>
+              <a:t>netstat</a:t>
+            </a:r>
+            <a:r>
+              <a:rPr lang="en-US" altLang="ko-KR" sz="1200" dirty="0"/>
+              <a:t> -</a:t>
+            </a:r>
+            <a:r>
+              <a:rPr lang="en-US" altLang="ko-KR" sz="1200" dirty="0" err="1"/>
+              <a:t>antp</a:t>
+            </a:r>
+            <a:r>
+              <a:rPr lang="en-US" altLang="ko-KR" sz="1200" dirty="0"/>
+              <a:t> </a:t>
+            </a:r>
+            <a:r>
+              <a:rPr lang="ko-KR" altLang="en-US" sz="1200" dirty="0"/>
+              <a:t>로 </a:t>
+            </a:r>
+            <a:r>
+              <a:rPr lang="en-US" altLang="ko-KR" sz="1200" dirty="0"/>
+              <a:t>2049, 20048, 111 </a:t>
+            </a:r>
+            <a:r>
+              <a:rPr lang="ko-KR" altLang="en-US" sz="1200" dirty="0"/>
+              <a:t>포트에 붙는</a:t>
+            </a:r>
+          </a:p>
+          <a:p>
+            <a:r>
+              <a:rPr lang="en-US" altLang="ko-KR" sz="1200" dirty="0" err="1"/>
+              <a:t>ip</a:t>
+            </a:r>
+            <a:r>
+              <a:rPr lang="ko-KR" altLang="en-US" sz="1200" dirty="0"/>
+              <a:t>주소가 어떤지 확인한다</a:t>
+            </a:r>
+            <a:r>
+              <a:rPr lang="en-US" altLang="ko-KR" sz="1200" dirty="0"/>
+              <a:t>.</a:t>
+            </a:r>
+          </a:p>
+          <a:p>
+            <a:endParaRPr lang="en-US" altLang="ko-KR" sz="1200" dirty="0"/>
+          </a:p>
+          <a:p>
+            <a:r>
+              <a:rPr lang="ko-KR" altLang="en-US" sz="1200" dirty="0"/>
+              <a:t>이것을 확인해도 안될 경우</a:t>
+            </a:r>
+            <a:r>
+              <a:rPr lang="en-US" altLang="ko-KR" sz="1200" dirty="0"/>
+              <a:t>, /</a:t>
+            </a:r>
+            <a:r>
+              <a:rPr lang="en-US" altLang="ko-KR" sz="1200" dirty="0" err="1"/>
+              <a:t>var</a:t>
+            </a:r>
+            <a:r>
+              <a:rPr lang="en-US" altLang="ko-KR" sz="1200" dirty="0"/>
+              <a:t>/messages</a:t>
+            </a:r>
+            <a:r>
+              <a:rPr lang="ko-KR" altLang="en-US" sz="1200" dirty="0"/>
+              <a:t>의 로그를 확인한다</a:t>
+            </a:r>
+            <a:r>
+              <a:rPr lang="en-US" altLang="ko-KR" sz="1200" dirty="0"/>
+              <a:t>. </a:t>
+            </a:r>
+            <a:r>
+              <a:rPr lang="ko-KR" altLang="en-US" sz="1200" dirty="0"/>
+              <a:t>로그에서 </a:t>
+            </a:r>
+            <a:r>
+              <a:rPr lang="en-US" altLang="ko-KR" sz="1200" dirty="0"/>
+              <a:t>illegal port </a:t>
+            </a:r>
+            <a:r>
+              <a:rPr lang="ko-KR" altLang="en-US" sz="1200" dirty="0"/>
+              <a:t>라고 나올 경우</a:t>
+            </a:r>
+            <a:r>
+              <a:rPr lang="en-US" altLang="ko-KR" sz="1200" dirty="0"/>
+              <a:t>, </a:t>
+            </a:r>
+            <a:endParaRPr lang="en-US" altLang="ko-KR" sz="1200" dirty="0" smtClean="0"/>
+          </a:p>
+          <a:p>
+            <a:r>
+              <a:rPr lang="en-US" altLang="ko-KR" sz="1200" dirty="0" smtClean="0"/>
+              <a:t>/</a:t>
+            </a:r>
+            <a:r>
+              <a:rPr lang="en-US" altLang="ko-KR" sz="1200" dirty="0" err="1"/>
+              <a:t>etc</a:t>
+            </a:r>
+            <a:r>
+              <a:rPr lang="en-US" altLang="ko-KR" sz="1200" dirty="0"/>
+              <a:t>/exports</a:t>
+            </a:r>
+            <a:r>
+              <a:rPr lang="ko-KR" altLang="en-US" sz="1200" dirty="0"/>
+              <a:t>의 </a:t>
+            </a:r>
+            <a:r>
+              <a:rPr lang="ko-KR" altLang="en-US" sz="1200" dirty="0" smtClean="0"/>
+              <a:t>옵션에 </a:t>
+            </a:r>
+            <a:r>
+              <a:rPr lang="en-US" altLang="ko-KR" sz="1200" dirty="0" smtClean="0"/>
+              <a:t>insecure </a:t>
+            </a:r>
+            <a:r>
+              <a:rPr lang="ko-KR" altLang="en-US" sz="1200" dirty="0"/>
+              <a:t>옵션을 추가한다</a:t>
+            </a:r>
+            <a:r>
+              <a:rPr lang="en-US" altLang="ko-KR" sz="1200" dirty="0"/>
+              <a:t>.</a:t>
+            </a:r>
+            <a:endParaRPr lang="en-US" altLang="ko-KR" sz="1200" dirty="0" smtClean="0"/>
+          </a:p>
+        </p:txBody>
+      </p:sp>
+      <p:pic>
+        <p:nvPicPr>
+          <p:cNvPr id="2" name="그림 1"/>
+          <p:cNvPicPr>
+            <a:picLocks noChangeAspect="1"/>
+          </p:cNvPicPr>
+          <p:nvPr/>
+        </p:nvPicPr>
+        <p:blipFill>
+          <a:blip r:embed="rId2"/>
+          <a:stretch>
+            <a:fillRect/>
+          </a:stretch>
+        </p:blipFill>
+        <p:spPr>
+          <a:xfrm>
+            <a:off x="948690" y="6099929"/>
+            <a:ext cx="4857750" cy="276225"/>
+          </a:xfrm>
+          <a:prstGeom prst="rect">
+            <a:avLst/>
+          </a:prstGeom>
+        </p:spPr>
+      </p:pic>
+    </p:spTree>
+    <p:extLst>
+      <p:ext uri="{BB962C8B-B14F-4D97-AF65-F5344CB8AC3E}">
+        <p14:creationId xmlns:p14="http://schemas.microsoft.com/office/powerpoint/2010/main" val="113075726"/>
+      </p:ext>
+    </p:extLst>
+  </p:cSld>
+  <p:clrMapOvr>
+    <a:masterClrMapping/>
+  </p:clrMapOvr>
+</p:sld>
+</file>
+
 <file path=ppt/slides/slide2.xml><?xml version="1.0" encoding="utf-8"?>
 <p:sld xmlns:a="http://schemas.openxmlformats.org/drawingml/2006/main" xmlns:r="http://schemas.openxmlformats.org/officeDocument/2006/relationships" xmlns:p="http://schemas.openxmlformats.org/presentationml/2006/main">
   <p:cSld>
@@ -3081,7 +5662,7 @@
         <p:spPr>
           <a:xfrm>
             <a:off x="948690" y="651510"/>
-            <a:ext cx="10469880" cy="7294305"/>
+            <a:ext cx="10469880" cy="4555093"/>
           </a:xfrm>
           <a:prstGeom prst="rect">
             <a:avLst/>
@@ -3257,6 +5838,54 @@
             <a:pPr marL="342900" indent="-342900">
               <a:buAutoNum type="arabicPeriod"/>
             </a:pPr>
+            <a:endParaRPr lang="en-US" altLang="ko-KR" sz="1600" dirty="0"/>
+          </a:p>
+          <a:p>
+            <a:pPr marL="342900" indent="-342900">
+              <a:buAutoNum type="arabicPeriod"/>
+            </a:pPr>
+            <a:endParaRPr lang="en-US" altLang="ko-KR" sz="1600" dirty="0" smtClean="0"/>
+          </a:p>
+          <a:p>
+            <a:pPr marL="342900" indent="-342900">
+              <a:buAutoNum type="arabicPeriod"/>
+            </a:pPr>
+            <a:endParaRPr lang="en-US" altLang="ko-KR" sz="1600" dirty="0"/>
+          </a:p>
+          <a:p>
+            <a:pPr marL="342900" indent="-342900">
+              <a:buAutoNum type="arabicPeriod"/>
+            </a:pPr>
+            <a:endParaRPr lang="en-US" altLang="ko-KR" sz="1600" dirty="0" smtClean="0"/>
+          </a:p>
+          <a:p>
+            <a:pPr marL="342900" indent="-342900">
+              <a:buAutoNum type="arabicPeriod"/>
+            </a:pPr>
+            <a:endParaRPr lang="en-US" altLang="ko-KR" sz="1600" dirty="0"/>
+          </a:p>
+          <a:p>
+            <a:pPr marL="342900" indent="-342900">
+              <a:buAutoNum type="arabicPeriod"/>
+            </a:pPr>
+            <a:endParaRPr lang="en-US" altLang="ko-KR" sz="1600" dirty="0" smtClean="0"/>
+          </a:p>
+          <a:p>
+            <a:pPr marL="342900" indent="-342900">
+              <a:buAutoNum type="arabicPeriod"/>
+            </a:pPr>
+            <a:endParaRPr lang="en-US" altLang="ko-KR" sz="1600" dirty="0"/>
+          </a:p>
+          <a:p>
+            <a:pPr marL="342900" indent="-342900">
+              <a:buAutoNum type="arabicPeriod"/>
+            </a:pPr>
+            <a:endParaRPr lang="en-US" altLang="ko-KR" sz="1600" dirty="0" smtClean="0"/>
+          </a:p>
+          <a:p>
+            <a:pPr marL="342900" indent="-342900">
+              <a:buAutoNum type="arabicPeriod"/>
+            </a:pPr>
             <a:r>
               <a:rPr lang="en-US" altLang="ko-KR" sz="1600" dirty="0" err="1" smtClean="0"/>
               <a:t>receivetemp</a:t>
@@ -3313,648 +5942,28 @@
               <a:rPr lang="en-US" altLang="ko-KR" sz="1600" dirty="0" smtClean="0"/>
               <a:t>.</a:t>
             </a:r>
+          </a:p>
+          <a:p>
+            <a:pPr marL="342900" indent="-342900">
+              <a:buAutoNum type="arabicPeriod"/>
+            </a:pPr>
             <a:endParaRPr lang="en-US" altLang="ko-KR" sz="1600" dirty="0"/>
           </a:p>
           <a:p>
             <a:pPr marL="342900" indent="-342900">
               <a:buAutoNum type="arabicPeriod"/>
             </a:pPr>
-            <a:r>
-              <a:rPr lang="ko-KR" altLang="en-US" sz="1600" dirty="0" err="1" smtClean="0"/>
-              <a:t>문서유통</a:t>
-            </a:r>
-            <a:r>
-              <a:rPr lang="ko-KR" altLang="en-US" sz="1600" dirty="0" smtClean="0"/>
-              <a:t> 모듈은 </a:t>
-            </a:r>
-            <a:r>
-              <a:rPr lang="en-US" altLang="ko-KR" sz="1600" dirty="0" err="1" smtClean="0"/>
-              <a:t>jdk</a:t>
-            </a:r>
-            <a:r>
-              <a:rPr lang="en-US" altLang="ko-KR" sz="1600" dirty="0" smtClean="0"/>
-              <a:t> 1.4(32bit)</a:t>
-            </a:r>
-            <a:r>
-              <a:rPr lang="ko-KR" altLang="en-US" sz="1600" dirty="0" smtClean="0"/>
-              <a:t>를 필요로 하기 때문에</a:t>
-            </a:r>
-            <a:r>
-              <a:rPr lang="en-US" altLang="ko-KR" sz="1600" dirty="0" smtClean="0"/>
-              <a:t>, </a:t>
-            </a:r>
-            <a:r>
-              <a:rPr lang="en-US" altLang="ko-KR" sz="1600" dirty="0" err="1" smtClean="0"/>
-              <a:t>jdk</a:t>
-            </a:r>
-            <a:r>
-              <a:rPr lang="en-US" altLang="ko-KR" sz="1600" dirty="0" smtClean="0"/>
-              <a:t> 1.4</a:t>
-            </a:r>
-            <a:r>
-              <a:rPr lang="ko-KR" altLang="en-US" sz="1600" dirty="0" smtClean="0"/>
-              <a:t>를 설치해준다</a:t>
-            </a:r>
-            <a:r>
-              <a:rPr lang="en-US" altLang="ko-KR" sz="1600" dirty="0" smtClean="0"/>
-              <a:t>.</a:t>
-            </a:r>
-          </a:p>
-          <a:p>
-            <a:pPr marL="800100" lvl="1" indent="-342900">
-              <a:buAutoNum type="arabicPeriod"/>
-            </a:pPr>
-            <a:r>
-              <a:rPr lang="en-US" altLang="ko-KR" sz="1600" dirty="0"/>
-              <a:t> </a:t>
-            </a:r>
-            <a:r>
-              <a:rPr lang="en-US" altLang="ko-KR" sz="1600" dirty="0" err="1" smtClean="0"/>
-              <a:t>jdk</a:t>
-            </a:r>
-            <a:r>
-              <a:rPr lang="en-US" altLang="ko-KR" sz="1600" dirty="0" smtClean="0"/>
-              <a:t> 1.4</a:t>
-            </a:r>
-            <a:r>
-              <a:rPr lang="ko-KR" altLang="en-US" sz="1600" dirty="0" smtClean="0"/>
-              <a:t>를 </a:t>
-            </a:r>
-            <a:r>
-              <a:rPr lang="ko-KR" altLang="en-US" sz="1600" dirty="0" err="1" smtClean="0"/>
-              <a:t>설치할때</a:t>
-            </a:r>
-            <a:r>
-              <a:rPr lang="en-US" altLang="ko-KR" sz="1600" dirty="0" smtClean="0"/>
-              <a:t>, ld-linux.so.2</a:t>
-            </a:r>
-            <a:r>
-              <a:rPr lang="ko-KR" altLang="en-US" sz="1600" dirty="0" smtClean="0"/>
-              <a:t>가 없다고 에러가 난다면</a:t>
-            </a:r>
-            <a:r>
-              <a:rPr lang="en-US" altLang="ko-KR" sz="1600" dirty="0" smtClean="0"/>
-              <a:t>, yum -y install ld-linux.so.2</a:t>
-            </a:r>
-            <a:r>
-              <a:rPr lang="ko-KR" altLang="en-US" sz="1600" dirty="0"/>
-              <a:t> </a:t>
-            </a:r>
-            <a:r>
-              <a:rPr lang="ko-KR" altLang="en-US" sz="1600" dirty="0" smtClean="0"/>
-              <a:t>로 설치 후 시도한다</a:t>
-            </a:r>
-            <a:r>
-              <a:rPr lang="en-US" altLang="ko-KR" sz="1600" dirty="0" smtClean="0"/>
-              <a:t>.</a:t>
-            </a:r>
-          </a:p>
-          <a:p>
-            <a:pPr marL="342900" indent="-342900">
-              <a:buAutoNum type="arabicPeriod"/>
-            </a:pPr>
-            <a:r>
-              <a:rPr lang="en-US" altLang="ko-KR" sz="1600" dirty="0" smtClean="0"/>
-              <a:t>JAVA_HOME</a:t>
-            </a:r>
-            <a:r>
-              <a:rPr lang="ko-KR" altLang="en-US" sz="1600" dirty="0" smtClean="0"/>
-              <a:t>이 이미 다른 버전의 </a:t>
-            </a:r>
-            <a:r>
-              <a:rPr lang="en-US" altLang="ko-KR" sz="1600" dirty="0" err="1" smtClean="0"/>
-              <a:t>jdk</a:t>
-            </a:r>
-            <a:r>
-              <a:rPr lang="ko-KR" altLang="en-US" sz="1600" dirty="0" smtClean="0"/>
-              <a:t>로 이미 있거나</a:t>
-            </a:r>
-            <a:r>
-              <a:rPr lang="en-US" altLang="ko-KR" sz="1600" dirty="0" smtClean="0"/>
-              <a:t>, java -version </a:t>
-            </a:r>
-            <a:r>
-              <a:rPr lang="ko-KR" altLang="en-US" sz="1600" dirty="0" smtClean="0"/>
-              <a:t>했을 때</a:t>
-            </a:r>
-            <a:r>
-              <a:rPr lang="en-US" altLang="ko-KR" sz="1600" dirty="0"/>
-              <a:t> </a:t>
-            </a:r>
-            <a:r>
-              <a:rPr lang="en-US" altLang="ko-KR" sz="1600" dirty="0" smtClean="0"/>
-              <a:t>jdk1.4 </a:t>
-            </a:r>
-            <a:r>
-              <a:rPr lang="ko-KR" altLang="en-US" sz="1600" dirty="0" smtClean="0"/>
-              <a:t>가 아닌 다른 버전이 실행될 경우</a:t>
-            </a:r>
-            <a:r>
-              <a:rPr lang="en-US" altLang="ko-KR" sz="1600" dirty="0" smtClean="0"/>
-              <a:t>, </a:t>
-            </a:r>
-            <a:r>
-              <a:rPr lang="ko-KR" altLang="en-US" sz="1600" dirty="0" err="1" smtClean="0"/>
-              <a:t>유통모듈</a:t>
-            </a:r>
-            <a:r>
-              <a:rPr lang="ko-KR" altLang="en-US" sz="1600" dirty="0" smtClean="0"/>
-              <a:t> 설치 가이드에 따라서 </a:t>
-            </a:r>
-            <a:r>
-              <a:rPr lang="en-US" altLang="ko-KR" sz="1600" dirty="0" smtClean="0"/>
-              <a:t>RY_JAVA_HOME </a:t>
-            </a:r>
-            <a:r>
-              <a:rPr lang="ko-KR" altLang="en-US" sz="1600" dirty="0" smtClean="0"/>
-              <a:t>환경변수를 지정해주고 </a:t>
-            </a:r>
-            <a:r>
-              <a:rPr lang="ko-KR" altLang="en-US" sz="1600" dirty="0" err="1" smtClean="0"/>
-              <a:t>유통모듈의</a:t>
-            </a:r>
-            <a:r>
-              <a:rPr lang="ko-KR" altLang="en-US" sz="1600" dirty="0" smtClean="0"/>
-              <a:t> 모든 실행스크립트에서 </a:t>
-            </a:r>
-            <a:r>
-              <a:rPr lang="en-US" altLang="ko-KR" sz="1600" dirty="0" smtClean="0"/>
-              <a:t>java</a:t>
-            </a:r>
-            <a:r>
-              <a:rPr lang="ko-KR" altLang="en-US" sz="1600" dirty="0"/>
-              <a:t>를</a:t>
-            </a:r>
-            <a:r>
-              <a:rPr lang="ko-KR" altLang="en-US" sz="1600" dirty="0" smtClean="0"/>
-              <a:t> </a:t>
-            </a:r>
-            <a:r>
-              <a:rPr lang="en-US" altLang="ko-KR" sz="1600" dirty="0" smtClean="0"/>
-              <a:t>RY_JAVA_HOME/bin/java </a:t>
-            </a:r>
-            <a:r>
-              <a:rPr lang="ko-KR" altLang="en-US" sz="1600" dirty="0" smtClean="0"/>
-              <a:t>으로 수정해준다</a:t>
-            </a:r>
-            <a:r>
-              <a:rPr lang="en-US" altLang="ko-KR" sz="1600" dirty="0" smtClean="0"/>
-              <a:t>. </a:t>
-            </a:r>
-            <a:r>
-              <a:rPr lang="en-US" altLang="ko-KR" sz="1600" dirty="0" err="1" smtClean="0"/>
-              <a:t>ebms</a:t>
-            </a:r>
-            <a:r>
-              <a:rPr lang="en-US" altLang="ko-KR" sz="1600" dirty="0" smtClean="0"/>
-              <a:t>/messaging/bin/derby_shutdown.sh, derby_startup.sh </a:t>
-            </a:r>
-            <a:r>
-              <a:rPr lang="ko-KR" altLang="en-US" sz="1600" dirty="0" smtClean="0"/>
-              <a:t>도 수정</a:t>
-            </a:r>
-            <a:r>
-              <a:rPr lang="en-US" altLang="ko-KR" sz="1600" dirty="0" smtClean="0"/>
-              <a:t>. </a:t>
-            </a:r>
-            <a:r>
-              <a:rPr lang="en-US" altLang="ko-KR" sz="1600" dirty="0" err="1" smtClean="0"/>
-              <a:t>ebms</a:t>
-            </a:r>
-            <a:r>
-              <a:rPr lang="en-US" altLang="ko-KR" sz="1600" dirty="0" smtClean="0"/>
-              <a:t>/messaging/bin, </a:t>
-            </a:r>
-            <a:r>
-              <a:rPr lang="en-US" altLang="ko-KR" sz="1600" dirty="0" err="1" smtClean="0"/>
-              <a:t>ebms</a:t>
-            </a:r>
-            <a:r>
-              <a:rPr lang="en-US" altLang="ko-KR" sz="1600" dirty="0" smtClean="0"/>
-              <a:t>/monitoring/bin</a:t>
-            </a:r>
-            <a:r>
-              <a:rPr lang="ko-KR" altLang="en-US" sz="1600" dirty="0" smtClean="0"/>
-              <a:t>의 </a:t>
-            </a:r>
-            <a:r>
-              <a:rPr lang="en-US" altLang="ko-KR" sz="1600" dirty="0" smtClean="0"/>
-              <a:t>catalina.sh, tool-wrapper.sh, catalinabymonitor.sh </a:t>
-            </a:r>
-            <a:r>
-              <a:rPr lang="ko-KR" altLang="en-US" sz="1600" dirty="0" smtClean="0"/>
-              <a:t>의 </a:t>
-            </a:r>
-            <a:r>
-              <a:rPr lang="en-US" altLang="ko-KR" sz="1600" dirty="0" smtClean="0"/>
-              <a:t>JAVA_HOME  </a:t>
-            </a:r>
-            <a:r>
-              <a:rPr lang="ko-KR" altLang="en-US" sz="1600" dirty="0" smtClean="0"/>
-              <a:t>재설정</a:t>
-            </a:r>
-            <a:r>
-              <a:rPr lang="en-US" altLang="ko-KR" sz="1600" dirty="0" smtClean="0"/>
-              <a:t>. </a:t>
-            </a:r>
-            <a:r>
-              <a:rPr lang="ko-KR" altLang="en-US" sz="1600" dirty="0" smtClean="0"/>
-              <a:t>모듈 설치 가이드</a:t>
-            </a:r>
-            <a:r>
-              <a:rPr lang="en-US" altLang="ko-KR" sz="1600" dirty="0" smtClean="0"/>
-              <a:t>(</a:t>
-            </a:r>
-            <a:r>
-              <a:rPr lang="ko-KR" altLang="en-US" sz="1600" dirty="0" smtClean="0"/>
-              <a:t>별첨</a:t>
-            </a:r>
-            <a:r>
-              <a:rPr lang="en-US" altLang="ko-KR" sz="1600" dirty="0" smtClean="0"/>
-              <a:t>2.2 </a:t>
-            </a:r>
-            <a:r>
-              <a:rPr lang="ko-KR" altLang="en-US" sz="1600" dirty="0" smtClean="0"/>
-              <a:t>참고</a:t>
-            </a:r>
-            <a:r>
-              <a:rPr lang="en-US" altLang="ko-KR" sz="1600" dirty="0" smtClean="0"/>
-              <a:t>) </a:t>
-            </a:r>
-            <a:r>
-              <a:rPr lang="ko-KR" altLang="en-US" sz="1600" dirty="0" smtClean="0"/>
-              <a:t>잘 읽고 그대로 따라하면 됨</a:t>
-            </a:r>
-            <a:r>
-              <a:rPr lang="en-US" altLang="ko-KR" sz="1600" dirty="0" smtClean="0"/>
-              <a:t>.</a:t>
-            </a:r>
-            <a:endParaRPr lang="en-US" altLang="ko-KR" sz="1600" dirty="0" smtClean="0"/>
-          </a:p>
-          <a:p>
-            <a:pPr marL="342900" indent="-342900">
-              <a:buAutoNum type="arabicPeriod"/>
-            </a:pPr>
             <a:endParaRPr lang="en-US" altLang="ko-KR" sz="1600" dirty="0"/>
           </a:p>
           <a:p>
-            <a:r>
-              <a:rPr lang="en-US" altLang="ko-KR" sz="1600" dirty="0"/>
-              <a:t>6</a:t>
-            </a:r>
-            <a:r>
-              <a:rPr lang="en-US" altLang="ko-KR" sz="1600" dirty="0" smtClean="0"/>
-              <a:t>. relay/</a:t>
-            </a:r>
-            <a:r>
-              <a:rPr lang="en-US" altLang="ko-KR" sz="1600" dirty="0" err="1" smtClean="0"/>
-              <a:t>config</a:t>
-            </a:r>
-            <a:r>
-              <a:rPr lang="en-US" altLang="ko-KR" sz="1600" dirty="0"/>
-              <a:t>/</a:t>
-            </a:r>
-            <a:r>
-              <a:rPr lang="ko-KR" altLang="en-US" sz="1600" dirty="0"/>
-              <a:t>의 </a:t>
-            </a:r>
-            <a:r>
-              <a:rPr lang="en-US" altLang="ko-KR" sz="1600" dirty="0"/>
-              <a:t>?_properties.xml </a:t>
-            </a:r>
-            <a:r>
-              <a:rPr lang="ko-KR" altLang="en-US" sz="1600" dirty="0"/>
-              <a:t>파일을 적절히 선택하여 이름을 바꿔준다</a:t>
-            </a:r>
-            <a:r>
-              <a:rPr lang="en-US" altLang="ko-KR" sz="1600" dirty="0" smtClean="0"/>
-              <a:t>. </a:t>
-            </a:r>
-          </a:p>
-          <a:p>
-            <a:r>
-              <a:rPr lang="en-US" altLang="ko-KR" sz="1600" dirty="0" smtClean="0"/>
-              <a:t>	ex) T_properties.xml </a:t>
-            </a:r>
-            <a:r>
-              <a:rPr lang="en-US" altLang="ko-KR" sz="1600" dirty="0"/>
-              <a:t>=&gt; properties.xml </a:t>
-            </a:r>
-            <a:r>
-              <a:rPr lang="ko-KR" altLang="en-US" sz="1600" dirty="0"/>
-              <a:t>로 </a:t>
-            </a:r>
-            <a:r>
-              <a:rPr lang="ko-KR" altLang="en-US" sz="1600" dirty="0" err="1"/>
-              <a:t>작업해줌</a:t>
-            </a:r>
-            <a:r>
-              <a:rPr lang="en-US" altLang="ko-KR" sz="1600" dirty="0" smtClean="0"/>
-              <a:t>. </a:t>
-            </a:r>
-            <a:r>
-              <a:rPr lang="ko-KR" altLang="en-US" sz="1600" dirty="0" smtClean="0"/>
-              <a:t>복사하면서 이름 </a:t>
-            </a:r>
-            <a:r>
-              <a:rPr lang="ko-KR" altLang="en-US" sz="1600" dirty="0" err="1" smtClean="0"/>
-              <a:t>바꿔도됨</a:t>
-            </a:r>
-            <a:r>
-              <a:rPr lang="en-US" altLang="ko-KR" sz="1600" dirty="0" smtClean="0"/>
-              <a:t>.</a:t>
-            </a:r>
-            <a:endParaRPr lang="en-US" altLang="ko-KR" sz="1600" dirty="0"/>
-          </a:p>
-          <a:p>
-            <a:r>
-              <a:rPr lang="en-US" altLang="ko-KR" sz="1600" dirty="0"/>
-              <a:t>properties.xml </a:t>
-            </a:r>
-            <a:r>
-              <a:rPr lang="ko-KR" altLang="en-US" sz="1600" dirty="0"/>
-              <a:t>파일 안에 </a:t>
-            </a:r>
-            <a:r>
-              <a:rPr lang="en-US" altLang="ko-KR" sz="1600" dirty="0" err="1"/>
-              <a:t>serverproperty</a:t>
-            </a:r>
-            <a:r>
-              <a:rPr lang="en-US" altLang="ko-KR" sz="1600" dirty="0"/>
-              <a:t> &gt; system(id), </a:t>
-            </a:r>
-            <a:r>
-              <a:rPr lang="en-US" altLang="ko-KR" sz="1600" dirty="0" err="1"/>
-              <a:t>replaypath</a:t>
-            </a:r>
-            <a:r>
-              <a:rPr lang="en-US" altLang="ko-KR" sz="1600" dirty="0"/>
-              <a:t>// </a:t>
-            </a:r>
-            <a:r>
-              <a:rPr lang="en-US" altLang="ko-KR" sz="1600" dirty="0" err="1"/>
-              <a:t>gpkiproperty</a:t>
-            </a:r>
-            <a:r>
-              <a:rPr lang="en-US" altLang="ko-KR" sz="1600" dirty="0"/>
-              <a:t> &gt; </a:t>
-            </a:r>
-            <a:r>
-              <a:rPr lang="en-US" altLang="ko-KR" sz="1600" dirty="0" err="1"/>
-              <a:t>gpkiserverid</a:t>
-            </a:r>
-            <a:r>
-              <a:rPr lang="en-US" altLang="ko-KR" sz="1600" dirty="0"/>
-              <a:t>, </a:t>
-            </a:r>
-            <a:r>
-              <a:rPr lang="en-US" altLang="ko-KR" sz="1600" dirty="0" err="1"/>
-              <a:t>gpkipath</a:t>
-            </a:r>
-            <a:r>
-              <a:rPr lang="en-US" altLang="ko-KR" sz="1600" dirty="0"/>
-              <a:t>, pin</a:t>
-            </a:r>
-            <a:r>
-              <a:rPr lang="ko-KR" altLang="en-US" sz="1600" dirty="0"/>
-              <a:t>를 수정한다</a:t>
-            </a:r>
-            <a:r>
-              <a:rPr lang="en-US" altLang="ko-KR" sz="1600" dirty="0"/>
-              <a:t>.</a:t>
-            </a:r>
-          </a:p>
-          <a:p>
-            <a:r>
-              <a:rPr lang="en-US" altLang="ko-KR" sz="1600" dirty="0"/>
-              <a:t>ex) &lt;SYSTEM TYPE="DOCUMENT" ID</a:t>
-            </a:r>
-            <a:r>
-              <a:rPr lang="en-US" altLang="ko-KR" sz="1600" dirty="0" smtClean="0"/>
-              <a:t>=“DOCB55105301"/&gt;  (DOC + </a:t>
-            </a:r>
-            <a:r>
-              <a:rPr lang="ko-KR" altLang="en-US" sz="1600" dirty="0" err="1" smtClean="0"/>
-              <a:t>기관코드</a:t>
-            </a:r>
-            <a:r>
-              <a:rPr lang="en-US" altLang="ko-KR" sz="1600" dirty="0" smtClean="0"/>
-              <a:t>(7) + </a:t>
-            </a:r>
-            <a:r>
-              <a:rPr lang="ko-KR" altLang="en-US" sz="1600" dirty="0" smtClean="0"/>
-              <a:t>일련번호</a:t>
-            </a:r>
-            <a:r>
-              <a:rPr lang="en-US" altLang="ko-KR" sz="1600" dirty="0" smtClean="0"/>
-              <a:t>(2))</a:t>
-            </a:r>
-            <a:endParaRPr lang="en-US" altLang="ko-KR" sz="1600" dirty="0"/>
-          </a:p>
-          <a:p>
-            <a:r>
-              <a:rPr lang="en-US" altLang="ko-KR" sz="1600" dirty="0" err="1" smtClean="0"/>
-              <a:t>Serverproperty</a:t>
-            </a:r>
-            <a:r>
-              <a:rPr lang="ko-KR" altLang="en-US" sz="1600" dirty="0" smtClean="0"/>
-              <a:t>의 </a:t>
-            </a:r>
-            <a:r>
-              <a:rPr lang="en-US" altLang="ko-KR" sz="1600" dirty="0" smtClean="0"/>
-              <a:t>id</a:t>
-            </a:r>
-            <a:r>
-              <a:rPr lang="ko-KR" altLang="en-US" sz="1600" dirty="0"/>
-              <a:t>는 </a:t>
-            </a:r>
-            <a:r>
-              <a:rPr lang="en-US" altLang="ko-KR" sz="1600" dirty="0" smtClean="0"/>
-              <a:t>DOC </a:t>
-            </a:r>
-            <a:r>
-              <a:rPr lang="en-US" altLang="ko-KR" sz="1600" dirty="0"/>
-              <a:t>+ </a:t>
-            </a:r>
-            <a:r>
-              <a:rPr lang="ko-KR" altLang="en-US" sz="1600" dirty="0" err="1"/>
-              <a:t>기관코드</a:t>
-            </a:r>
-            <a:r>
-              <a:rPr lang="en-US" altLang="ko-KR" sz="1600" dirty="0"/>
-              <a:t>7</a:t>
-            </a:r>
-            <a:r>
-              <a:rPr lang="ko-KR" altLang="en-US" sz="1600" dirty="0"/>
-              <a:t>자리 </a:t>
-            </a:r>
-            <a:r>
-              <a:rPr lang="en-US" altLang="ko-KR" sz="1600" dirty="0"/>
-              <a:t>+ </a:t>
-            </a:r>
-            <a:r>
-              <a:rPr lang="ko-KR" altLang="en-US" sz="1600" dirty="0"/>
-              <a:t>일련번호 </a:t>
-            </a:r>
-            <a:r>
-              <a:rPr lang="en-US" altLang="ko-KR" sz="1600" dirty="0" smtClean="0"/>
-              <a:t>01</a:t>
-            </a:r>
-            <a:r>
-              <a:rPr lang="en-US" altLang="ko-KR" sz="1600" dirty="0"/>
-              <a:t>~   </a:t>
-            </a:r>
-            <a:r>
-              <a:rPr lang="ko-KR" altLang="en-US" sz="1600" dirty="0"/>
-              <a:t>로 </a:t>
-            </a:r>
-            <a:r>
-              <a:rPr lang="ko-KR" altLang="en-US" sz="1600" dirty="0" smtClean="0"/>
-              <a:t>구성 보통 일련번호는 </a:t>
-            </a:r>
-            <a:r>
-              <a:rPr lang="en-US" altLang="ko-KR" sz="1600" dirty="0" smtClean="0"/>
-              <a:t>01</a:t>
-            </a:r>
-            <a:r>
-              <a:rPr lang="ko-KR" altLang="en-US" sz="1600" dirty="0" smtClean="0"/>
-              <a:t>로 하면 </a:t>
-            </a:r>
-            <a:r>
-              <a:rPr lang="ko-KR" altLang="en-US" sz="1600" dirty="0" err="1" smtClean="0"/>
-              <a:t>거의됨</a:t>
-            </a:r>
-            <a:endParaRPr lang="en-US" altLang="ko-KR" sz="1600" dirty="0"/>
-          </a:p>
-          <a:p>
-            <a:r>
-              <a:rPr lang="en-US" altLang="ko-KR" sz="1600" dirty="0"/>
-              <a:t>&lt;RELAYPATH&gt;/home/</a:t>
-            </a:r>
-            <a:r>
-              <a:rPr lang="en-US" altLang="ko-KR" sz="1600" dirty="0" err="1"/>
-              <a:t>jmocha</a:t>
-            </a:r>
-            <a:r>
-              <a:rPr lang="en-US" altLang="ko-KR" sz="1600" dirty="0"/>
-              <a:t>/relay&lt;/RELAYPATH&gt;</a:t>
-            </a:r>
-          </a:p>
-          <a:p>
-            <a:endParaRPr lang="en-US" altLang="ko-KR" sz="1600" dirty="0"/>
-          </a:p>
-          <a:p>
-            <a:r>
-              <a:rPr lang="en-US" altLang="ko-KR" sz="1600" dirty="0"/>
-              <a:t>&lt;GPKISERVERID&gt;SVRB551053001&lt;/</a:t>
-            </a:r>
-            <a:r>
-              <a:rPr lang="en-US" altLang="ko-KR" sz="1600" dirty="0" smtClean="0"/>
-              <a:t>GPKISERVERID&gt; (GPKI</a:t>
-            </a:r>
-            <a:r>
-              <a:rPr lang="ko-KR" altLang="en-US" sz="1600" dirty="0" smtClean="0"/>
-              <a:t>서버아이디는 </a:t>
-            </a:r>
-            <a:r>
-              <a:rPr lang="en-US" altLang="ko-KR" sz="1600" dirty="0" smtClean="0"/>
-              <a:t>GPKI </a:t>
-            </a:r>
-            <a:r>
-              <a:rPr lang="ko-KR" altLang="en-US" sz="1600" dirty="0" smtClean="0"/>
-              <a:t>인증서의 </a:t>
-            </a:r>
-            <a:r>
-              <a:rPr lang="ko-KR" altLang="en-US" sz="1600" dirty="0" err="1" smtClean="0"/>
-              <a:t>파일이름과</a:t>
-            </a:r>
-            <a:r>
-              <a:rPr lang="ko-KR" altLang="en-US" sz="1600" dirty="0" smtClean="0"/>
-              <a:t> 동일</a:t>
-            </a:r>
-            <a:r>
-              <a:rPr lang="en-US" altLang="ko-KR" sz="1600" dirty="0" smtClean="0"/>
-              <a:t>)</a:t>
-            </a:r>
-            <a:endParaRPr lang="en-US" altLang="ko-KR" sz="1600" dirty="0"/>
-          </a:p>
-          <a:p>
-            <a:r>
-              <a:rPr lang="en-US" altLang="ko-KR" sz="1600" dirty="0"/>
-              <a:t>&lt;GPKIPATH&gt;/home/</a:t>
-            </a:r>
-            <a:r>
-              <a:rPr lang="en-US" altLang="ko-KR" sz="1600" dirty="0" err="1"/>
-              <a:t>jmocha</a:t>
-            </a:r>
-            <a:r>
-              <a:rPr lang="en-US" altLang="ko-KR" sz="1600" dirty="0"/>
-              <a:t>/relay/</a:t>
-            </a:r>
-            <a:r>
-              <a:rPr lang="en-US" altLang="ko-KR" sz="1600" dirty="0" err="1"/>
-              <a:t>gpki</a:t>
-            </a:r>
-            <a:r>
-              <a:rPr lang="en-US" altLang="ko-KR" sz="1600" dirty="0"/>
-              <a:t>/&lt;/GPKIPATH&gt;   (</a:t>
-            </a:r>
-            <a:r>
-              <a:rPr lang="ko-KR" altLang="en-US" sz="1600" dirty="0"/>
-              <a:t>제일 끝에 </a:t>
-            </a:r>
-            <a:r>
-              <a:rPr lang="en-US" altLang="ko-KR" sz="1600" dirty="0"/>
-              <a:t>‘/’ </a:t>
-            </a:r>
-            <a:r>
-              <a:rPr lang="ko-KR" altLang="en-US" sz="1600" dirty="0"/>
-              <a:t>까지 필수</a:t>
-            </a:r>
-            <a:r>
-              <a:rPr lang="en-US" altLang="ko-KR" sz="1600" dirty="0"/>
-              <a:t>)</a:t>
-            </a:r>
-          </a:p>
-          <a:p>
-            <a:r>
-              <a:rPr lang="en-US" altLang="ko-KR" sz="1600" dirty="0"/>
-              <a:t>&lt;PIN&gt;&lt;![CDATA[</a:t>
-            </a:r>
-            <a:r>
-              <a:rPr lang="en-US" altLang="ko-KR" sz="1600" dirty="0" err="1"/>
-              <a:t>passwordexample</a:t>
-            </a:r>
-            <a:r>
-              <a:rPr lang="en-US" altLang="ko-KR" sz="1600" dirty="0"/>
-              <a:t>]]&gt;&lt;/PIN&gt;   (</a:t>
-            </a:r>
-            <a:r>
-              <a:rPr lang="ko-KR" altLang="en-US" sz="1600" dirty="0"/>
-              <a:t>사이트에 적절한 패스워드</a:t>
-            </a:r>
-            <a:r>
-              <a:rPr lang="en-US" altLang="ko-KR" sz="1600" dirty="0"/>
-              <a:t>)</a:t>
-            </a:r>
-          </a:p>
-          <a:p>
-            <a:pPr marL="342900" indent="-342900">
-              <a:buAutoNum type="arabicPeriod"/>
-            </a:pPr>
-            <a:endParaRPr lang="en-US" altLang="ko-KR" sz="1600" dirty="0" smtClean="0"/>
-          </a:p>
-          <a:p>
-            <a:pPr marL="800100" lvl="1" indent="-342900">
-              <a:buAutoNum type="arabicPeriod"/>
-            </a:pPr>
+            <a:pPr lvl="1"/>
             <a:endParaRPr lang="en-US" altLang="ko-KR" sz="1600" dirty="0"/>
           </a:p>
         </p:txBody>
       </p:sp>
       <p:pic>
         <p:nvPicPr>
-          <p:cNvPr id="2" name="그림 1"/>
+          <p:cNvPr id="4" name="그림 3"/>
           <p:cNvPicPr>
             <a:picLocks noChangeAspect="1"/>
           </p:cNvPicPr>
@@ -3968,8 +5977,32 @@
         </p:blipFill>
         <p:spPr>
           <a:xfrm>
-            <a:off x="8829675" y="6898065"/>
-            <a:ext cx="4476750" cy="1047750"/>
+            <a:off x="1335087" y="2216150"/>
+            <a:ext cx="5000625" cy="1866900"/>
+          </a:xfrm>
+          <a:prstGeom prst="rect">
+            <a:avLst/>
+          </a:prstGeom>
+        </p:spPr>
+      </p:pic>
+      <p:pic>
+        <p:nvPicPr>
+          <p:cNvPr id="5" name="그림 4"/>
+          <p:cNvPicPr>
+            <a:picLocks noChangeAspect="1"/>
+          </p:cNvPicPr>
+          <p:nvPr/>
+        </p:nvPicPr>
+        <p:blipFill>
+          <a:blip r:embed="rId3"/>
+          <a:stretch>
+            <a:fillRect/>
+          </a:stretch>
+        </p:blipFill>
+        <p:spPr>
+          <a:xfrm>
+            <a:off x="1335087" y="4556125"/>
+            <a:ext cx="4610100" cy="819150"/>
           </a:xfrm>
           <a:prstGeom prst="rect">
             <a:avLst/>
@@ -4015,7 +6048,7 @@
         <p:spPr>
           <a:xfrm>
             <a:off x="948690" y="651510"/>
-            <a:ext cx="10469880" cy="6801862"/>
+            <a:ext cx="10469880" cy="4555093"/>
           </a:xfrm>
           <a:prstGeom prst="rect">
             <a:avLst/>
@@ -4035,16 +6068,47 @@
             <a:endParaRPr lang="en-US" altLang="ko-KR" b="1" dirty="0" smtClean="0"/>
           </a:p>
           <a:p>
+            <a:endParaRPr lang="en-US" altLang="ko-KR" sz="1600" dirty="0"/>
+          </a:p>
+          <a:p>
             <a:pPr marL="342900" indent="-342900">
               <a:buAutoNum type="arabicPeriod"/>
             </a:pPr>
             <a:r>
               <a:rPr lang="ko-KR" altLang="en-US" sz="1600" dirty="0" err="1" smtClean="0"/>
-              <a:t>환경변수는</a:t>
-            </a:r>
-            <a:r>
-              <a:rPr lang="ko-KR" altLang="en-US" sz="1600" dirty="0" smtClean="0"/>
-              <a:t> 이것만 등록 하면 됨</a:t>
+              <a:t>문서유통</a:t>
+            </a:r>
+            <a:r>
+              <a:rPr lang="ko-KR" altLang="en-US" sz="1600" dirty="0" smtClean="0"/>
+              <a:t> 모듈은 </a:t>
+            </a:r>
+            <a:r>
+              <a:rPr lang="en-US" altLang="ko-KR" sz="1600" dirty="0" err="1" smtClean="0"/>
+              <a:t>jdk</a:t>
+            </a:r>
+            <a:r>
+              <a:rPr lang="en-US" altLang="ko-KR" sz="1600" dirty="0" smtClean="0"/>
+              <a:t> 1.4(32bit)</a:t>
+            </a:r>
+            <a:r>
+              <a:rPr lang="ko-KR" altLang="en-US" sz="1600" dirty="0" smtClean="0"/>
+              <a:t>를 필요로 하기 때문에</a:t>
+            </a:r>
+            <a:r>
+              <a:rPr lang="en-US" altLang="ko-KR" sz="1600" dirty="0" smtClean="0"/>
+              <a:t>, </a:t>
+            </a:r>
+            <a:r>
+              <a:rPr lang="en-US" altLang="ko-KR" sz="1600" dirty="0" err="1" smtClean="0"/>
+              <a:t>jdk</a:t>
+            </a:r>
+            <a:r>
+              <a:rPr lang="en-US" altLang="ko-KR" sz="1600" dirty="0" smtClean="0"/>
+              <a:t> 1.4</a:t>
+            </a:r>
+            <a:r>
+              <a:rPr lang="ko-KR" altLang="en-US" sz="1600" dirty="0" smtClean="0"/>
+              <a:t>를 설치해준다</a:t>
             </a:r>
             <a:r>
               <a:rPr lang="en-US" altLang="ko-KR" sz="1600" dirty="0" smtClean="0"/>
@@ -4057,375 +6121,81 @@
             </a:pPr>
             <a:r>
               <a:rPr lang="en-US" altLang="ko-KR" sz="1600" dirty="0"/>
-              <a:t>export LIBPATH=$LIBPATH:/</a:t>
-            </a:r>
-            <a:r>
-              <a:rPr lang="en-US" altLang="ko-KR" sz="1600" dirty="0" err="1"/>
-              <a:t>usr</a:t>
-            </a:r>
-            <a:r>
-              <a:rPr lang="en-US" altLang="ko-KR" sz="1600" dirty="0"/>
-              <a:t>/lib:/</a:t>
-            </a:r>
-            <a:r>
-              <a:rPr lang="en-US" altLang="ko-KR" sz="1600" dirty="0" err="1"/>
-              <a:t>usr</a:t>
-            </a:r>
-            <a:r>
-              <a:rPr lang="en-US" altLang="ko-KR" sz="1600" dirty="0"/>
-              <a:t>/lib64:/home/</a:t>
-            </a:r>
-            <a:r>
-              <a:rPr lang="en-US" altLang="ko-KR" sz="1600" dirty="0" err="1"/>
-              <a:t>jmocha</a:t>
-            </a:r>
-            <a:r>
-              <a:rPr lang="en-US" altLang="ko-KR" sz="1600" dirty="0"/>
-              <a:t>/relay/lib</a:t>
-            </a:r>
-          </a:p>
-          <a:p>
-            <a:pPr marL="800100" lvl="1" indent="-342900">
-              <a:buAutoNum type="arabicPeriod"/>
-            </a:pPr>
-            <a:r>
-              <a:rPr lang="en-US" altLang="ko-KR" sz="1600" dirty="0"/>
-              <a:t>export LD_LIBRARY_PATH=$LD_LIBRARY_PATH:/</a:t>
-            </a:r>
-            <a:r>
-              <a:rPr lang="en-US" altLang="ko-KR" sz="1600" dirty="0" err="1"/>
-              <a:t>usr</a:t>
-            </a:r>
-            <a:r>
-              <a:rPr lang="en-US" altLang="ko-KR" sz="1600" dirty="0"/>
-              <a:t>/lib:/</a:t>
-            </a:r>
-            <a:r>
-              <a:rPr lang="en-US" altLang="ko-KR" sz="1600" dirty="0" err="1"/>
-              <a:t>usr</a:t>
-            </a:r>
-            <a:r>
-              <a:rPr lang="en-US" altLang="ko-KR" sz="1600" dirty="0"/>
-              <a:t>/lib64:/home/</a:t>
-            </a:r>
-            <a:r>
-              <a:rPr lang="en-US" altLang="ko-KR" sz="1600" dirty="0" err="1"/>
-              <a:t>jmocha</a:t>
-            </a:r>
-            <a:r>
-              <a:rPr lang="en-US" altLang="ko-KR" sz="1600" dirty="0"/>
-              <a:t>/relay/lib</a:t>
-            </a:r>
-          </a:p>
-          <a:p>
-            <a:pPr marL="800100" lvl="1" indent="-342900">
-              <a:buAutoNum type="arabicPeriod"/>
-            </a:pPr>
-            <a:r>
-              <a:rPr lang="en-US" altLang="ko-KR" sz="1600" dirty="0"/>
-              <a:t>export SHLIB_PATH=$SHLIB_PATH:/</a:t>
-            </a:r>
-            <a:r>
-              <a:rPr lang="en-US" altLang="ko-KR" sz="1600" dirty="0" err="1"/>
-              <a:t>usr</a:t>
-            </a:r>
-            <a:r>
-              <a:rPr lang="en-US" altLang="ko-KR" sz="1600" dirty="0"/>
-              <a:t>/lib:/</a:t>
-            </a:r>
-            <a:r>
-              <a:rPr lang="en-US" altLang="ko-KR" sz="1600" dirty="0" err="1"/>
-              <a:t>usr</a:t>
-            </a:r>
-            <a:r>
-              <a:rPr lang="en-US" altLang="ko-KR" sz="1600" dirty="0"/>
-              <a:t>/lib64:/home/</a:t>
-            </a:r>
-            <a:r>
-              <a:rPr lang="en-US" altLang="ko-KR" sz="1600" dirty="0" err="1"/>
-              <a:t>jmocha</a:t>
-            </a:r>
-            <a:r>
-              <a:rPr lang="en-US" altLang="ko-KR" sz="1600" dirty="0"/>
-              <a:t>/relay/lib</a:t>
-            </a:r>
-          </a:p>
-          <a:p>
-            <a:pPr marL="800100" lvl="1" indent="-342900">
-              <a:buAutoNum type="arabicPeriod"/>
-            </a:pPr>
-            <a:r>
-              <a:rPr lang="en-US" altLang="ko-KR" sz="1600" dirty="0"/>
-              <a:t>export RELAY_HOME=/</a:t>
-            </a:r>
-            <a:r>
-              <a:rPr lang="en-US" altLang="ko-KR" sz="1600" dirty="0" smtClean="0"/>
-              <a:t>home/</a:t>
+              <a:t> </a:t>
             </a:r>
             <a:r>
               <a:rPr lang="en-US" altLang="ko-KR" sz="1600" dirty="0" err="1" smtClean="0"/>
-              <a:t>jmocha</a:t>
-            </a:r>
-            <a:r>
-              <a:rPr lang="en-US" altLang="ko-KR" sz="1600" dirty="0" smtClean="0"/>
-              <a:t>/relay</a:t>
-            </a:r>
-          </a:p>
-          <a:p>
-            <a:pPr marL="800100" lvl="1" indent="-342900">
-              <a:buAutoNum type="arabicPeriod"/>
-            </a:pPr>
-            <a:endParaRPr lang="en-US" altLang="ko-KR" sz="1600" dirty="0"/>
-          </a:p>
-          <a:p>
-            <a:pPr marL="800100" lvl="1" indent="-342900">
-              <a:buAutoNum type="arabicPeriod"/>
-            </a:pPr>
-            <a:r>
-              <a:rPr lang="en-US" altLang="ko-KR" sz="1600" dirty="0"/>
-              <a:t>export RY_JAVA_HOME=/</a:t>
-            </a:r>
-            <a:r>
-              <a:rPr lang="en-US" altLang="ko-KR" sz="1600" dirty="0" smtClean="0"/>
-              <a:t>home/</a:t>
-            </a:r>
-            <a:r>
-              <a:rPr lang="en-US" altLang="ko-KR" sz="1600" dirty="0" err="1" smtClean="0"/>
-              <a:t>jmocha</a:t>
-            </a:r>
-            <a:r>
-              <a:rPr lang="en-US" altLang="ko-KR" sz="1600" dirty="0" smtClean="0"/>
-              <a:t>/jdk1.4 (jdk1.4 </a:t>
-            </a:r>
-            <a:r>
-              <a:rPr lang="ko-KR" altLang="en-US" sz="1600" dirty="0" smtClean="0"/>
-              <a:t>경로에 따라 적절히 수정</a:t>
-            </a:r>
-            <a:r>
-              <a:rPr lang="en-US" altLang="ko-KR" sz="1600" dirty="0" smtClean="0"/>
-              <a:t>)</a:t>
-            </a:r>
-          </a:p>
-          <a:p>
-            <a:pPr marL="342900" indent="-342900">
-              <a:buAutoNum type="arabicPeriod"/>
-            </a:pPr>
-            <a:r>
-              <a:rPr lang="ko-KR" altLang="en-US" sz="1600" dirty="0" smtClean="0"/>
-              <a:t>위의 명령을 적절히 </a:t>
-            </a:r>
-            <a:r>
-              <a:rPr lang="en-US" altLang="ko-KR" sz="1600" dirty="0" smtClean="0"/>
-              <a:t>~</a:t>
-            </a:r>
-            <a:r>
-              <a:rPr lang="en-US" altLang="ko-KR" sz="1600" dirty="0" err="1" smtClean="0"/>
-              <a:t>jmocha</a:t>
-            </a:r>
-            <a:r>
-              <a:rPr lang="en-US" altLang="ko-KR" sz="1600" dirty="0" smtClean="0"/>
-              <a:t>/.</a:t>
-            </a:r>
-            <a:r>
-              <a:rPr lang="en-US" altLang="ko-KR" sz="1600" dirty="0" err="1" smtClean="0"/>
-              <a:t>bashrc</a:t>
-            </a:r>
-            <a:r>
-              <a:rPr lang="en-US" altLang="ko-KR" sz="1600" dirty="0" smtClean="0"/>
-              <a:t> </a:t>
-            </a:r>
-            <a:r>
-              <a:rPr lang="ko-KR" altLang="en-US" sz="1600" dirty="0" smtClean="0"/>
-              <a:t>에도 등록해준다</a:t>
-            </a:r>
-            <a:r>
-              <a:rPr lang="en-US" altLang="ko-KR" sz="1600" dirty="0" smtClean="0"/>
-              <a:t>.</a:t>
-            </a:r>
-          </a:p>
-          <a:p>
-            <a:pPr marL="342900" indent="-342900">
-              <a:buAutoNum type="arabicPeriod"/>
-            </a:pPr>
-            <a:r>
-              <a:rPr lang="en-US" altLang="ko-KR" sz="1600" dirty="0" smtClean="0"/>
-              <a:t>LDAP </a:t>
-            </a:r>
-            <a:r>
-              <a:rPr lang="ko-KR" altLang="en-US" sz="1600" dirty="0" smtClean="0"/>
-              <a:t>연결이 되는지 </a:t>
-            </a:r>
-            <a:r>
-              <a:rPr lang="en-US" altLang="ko-KR" sz="1600" dirty="0" smtClean="0"/>
-              <a:t>telnet </a:t>
-            </a:r>
-            <a:r>
-              <a:rPr lang="ko-KR" altLang="en-US" sz="1600" dirty="0" smtClean="0"/>
-              <a:t>연결 해봄</a:t>
-            </a:r>
-            <a:r>
-              <a:rPr lang="en-US" altLang="ko-KR" sz="1600" dirty="0" smtClean="0"/>
-              <a:t>. </a:t>
+              <a:t>jdk</a:t>
+            </a:r>
+            <a:r>
+              <a:rPr lang="en-US" altLang="ko-KR" sz="1600" dirty="0" smtClean="0"/>
+              <a:t> 1.4</a:t>
+            </a:r>
+            <a:r>
+              <a:rPr lang="ko-KR" altLang="en-US" sz="1600" dirty="0" smtClean="0"/>
+              <a:t>를 </a:t>
             </a:r>
             <a:r>
               <a:rPr lang="ko-KR" altLang="en-US" sz="1600" dirty="0" err="1" smtClean="0"/>
-              <a:t>중계모듈</a:t>
-            </a:r>
-            <a:r>
-              <a:rPr lang="ko-KR" altLang="en-US" sz="1600" dirty="0" smtClean="0"/>
-              <a:t> 설치 가이드의</a:t>
-            </a:r>
-            <a:r>
-              <a:rPr lang="en-US" altLang="ko-KR" sz="1600" dirty="0" smtClean="0"/>
-              <a:t> </a:t>
-            </a:r>
-            <a:r>
-              <a:rPr lang="ko-KR" altLang="en-US" sz="1600" dirty="0" smtClean="0"/>
-              <a:t>다</a:t>
-            </a:r>
-            <a:r>
-              <a:rPr lang="en-US" altLang="ko-KR" sz="1600" dirty="0" smtClean="0"/>
-              <a:t>.</a:t>
-            </a:r>
-            <a:r>
-              <a:rPr lang="ko-KR" altLang="en-US" sz="1600" dirty="0" smtClean="0"/>
-              <a:t>네트워크 설정의 확인 참고</a:t>
-            </a:r>
-            <a:r>
-              <a:rPr lang="en-US" altLang="ko-KR" sz="1600" dirty="0" smtClean="0"/>
-              <a:t>.</a:t>
-            </a:r>
-          </a:p>
-          <a:p>
-            <a:pPr marL="342900" indent="-342900">
-              <a:buAutoNum type="arabicPeriod"/>
-            </a:pPr>
-            <a:r>
-              <a:rPr lang="en-US" altLang="ko-KR" sz="1600" dirty="0" smtClean="0"/>
-              <a:t>centos 7</a:t>
-            </a:r>
-            <a:r>
-              <a:rPr lang="ko-KR" altLang="en-US" sz="1600" dirty="0" smtClean="0"/>
-              <a:t>이상 버전일 경우</a:t>
-            </a:r>
-            <a:r>
-              <a:rPr lang="en-US" altLang="ko-KR" sz="1600" dirty="0" smtClean="0"/>
-              <a:t>, yum -y install gilbc.i686</a:t>
-            </a:r>
-            <a:br>
-              <a:rPr lang="en-US" altLang="ko-KR" sz="1600" dirty="0" smtClean="0"/>
-            </a:br>
-            <a:r>
-              <a:rPr lang="en-US" altLang="ko-KR" sz="1600" dirty="0" smtClean="0"/>
-              <a:t>centos 6</a:t>
-            </a:r>
-            <a:r>
-              <a:rPr lang="ko-KR" altLang="en-US" sz="1600" dirty="0" smtClean="0"/>
-              <a:t>버전일 경우</a:t>
-            </a:r>
-            <a:r>
-              <a:rPr lang="en-US" altLang="ko-KR" sz="1600" dirty="0" smtClean="0"/>
-              <a:t>,</a:t>
+              <a:t>설치할때</a:t>
+            </a:r>
+            <a:r>
+              <a:rPr lang="en-US" altLang="ko-KR" sz="1600" dirty="0" smtClean="0"/>
+              <a:t>, ld-linux.so.2</a:t>
+            </a:r>
+            <a:r>
+              <a:rPr lang="ko-KR" altLang="en-US" sz="1600" dirty="0" smtClean="0"/>
+              <a:t>가 없다고 에러가 난다면</a:t>
+            </a:r>
+            <a:r>
+              <a:rPr lang="en-US" altLang="ko-KR" sz="1600" dirty="0" smtClean="0"/>
+              <a:t>, yum -y install ld-linux.so.2</a:t>
             </a:r>
             <a:r>
               <a:rPr lang="ko-KR" altLang="en-US" sz="1600" dirty="0"/>
               <a:t> </a:t>
             </a:r>
+            <a:r>
+              <a:rPr lang="ko-KR" altLang="en-US" sz="1600" dirty="0" smtClean="0"/>
+              <a:t>로 설치 후 시도한다</a:t>
+            </a:r>
+            <a:r>
+              <a:rPr lang="en-US" altLang="ko-KR" sz="1600" dirty="0" smtClean="0"/>
+              <a:t>.</a:t>
+            </a:r>
+          </a:p>
+          <a:p>
+            <a:pPr marL="800100" lvl="1" indent="-342900">
+              <a:buAutoNum type="arabicPeriod"/>
+            </a:pPr>
+            <a:endParaRPr lang="en-US" altLang="ko-KR" sz="1600" dirty="0"/>
+          </a:p>
+          <a:p>
+            <a:pPr marL="800100" lvl="1" indent="-342900">
+              <a:buAutoNum type="arabicPeriod"/>
+            </a:pPr>
             <a:endParaRPr lang="en-US" altLang="ko-KR" sz="1600" dirty="0" smtClean="0"/>
           </a:p>
           <a:p>
-            <a:pPr lvl="2"/>
-            <a:r>
-              <a:rPr lang="en-US" altLang="ko-KR" sz="1600" dirty="0" err="1"/>
-              <a:t>wget</a:t>
-            </a:r>
-            <a:r>
-              <a:rPr lang="en-US" altLang="ko-KR" sz="1600" dirty="0"/>
-              <a:t> http://copr-be.cloud.fedoraproject.org/results/mosquito/myrepo-el6/epel-6-i386/glibc-2.17-55.fc20/glibc-2.17-55.el6.i686.rpm</a:t>
-            </a:r>
-          </a:p>
-          <a:p>
-            <a:pPr lvl="2"/>
-            <a:r>
-              <a:rPr lang="en-US" altLang="ko-KR" sz="1600" dirty="0" err="1"/>
-              <a:t>wget</a:t>
-            </a:r>
-            <a:r>
-              <a:rPr lang="en-US" altLang="ko-KR" sz="1600" dirty="0"/>
-              <a:t> http://copr-be.cloud.fedoraproject.org/results/mosquito/myrepo-el6/epel-6-i386/glibc-2.17-55.fc20/glibc-common-2.17-55.el6.i686.rpm</a:t>
-            </a:r>
-          </a:p>
-          <a:p>
-            <a:pPr lvl="2"/>
-            <a:r>
-              <a:rPr lang="en-US" altLang="ko-KR" sz="1600" dirty="0" err="1"/>
-              <a:t>wget</a:t>
-            </a:r>
-            <a:r>
-              <a:rPr lang="en-US" altLang="ko-KR" sz="1600" dirty="0"/>
-              <a:t> http://copr-be.cloud.fedoraproject.org/results/mosquito/myrepo-el6/epel-6-i386/glibc-2.17-55.fc20/glibc-devel-2.17-55.el6.i686.rpm</a:t>
-            </a:r>
-          </a:p>
-          <a:p>
-            <a:pPr lvl="2"/>
-            <a:r>
-              <a:rPr lang="en-US" altLang="ko-KR" sz="1600" dirty="0" err="1"/>
-              <a:t>wget</a:t>
-            </a:r>
-            <a:r>
-              <a:rPr lang="en-US" altLang="ko-KR" sz="1600" dirty="0"/>
-              <a:t> http://copr-be.cloud.fedoraproject.org/results/mosquito/myrepo-el6/epel-6-i386/glibc-2.17-55.fc20/glibc-headers-2.17-55.el6.i686.rpm</a:t>
-            </a:r>
-          </a:p>
-          <a:p>
-            <a:pPr marL="1257300" lvl="2" indent="-342900">
+            <a:pPr marL="800100" lvl="1" indent="-342900">
               <a:buAutoNum type="arabicPeriod"/>
             </a:pPr>
             <a:endParaRPr lang="en-US" altLang="ko-KR" sz="1600" dirty="0"/>
           </a:p>
           <a:p>
-            <a:pPr lvl="2"/>
-            <a:r>
-              <a:rPr lang="en-US" altLang="ko-KR" sz="1600" dirty="0" err="1"/>
-              <a:t>sudo</a:t>
-            </a:r>
-            <a:r>
-              <a:rPr lang="en-US" altLang="ko-KR" sz="1600" dirty="0"/>
-              <a:t> rpm -</a:t>
-            </a:r>
-            <a:r>
-              <a:rPr lang="en-US" altLang="ko-KR" sz="1600" dirty="0" err="1"/>
-              <a:t>Uvh</a:t>
-            </a:r>
-            <a:r>
-              <a:rPr lang="en-US" altLang="ko-KR" sz="1600" dirty="0"/>
-              <a:t> glibc-2.17-55.el6.i686.rpm \</a:t>
-            </a:r>
-          </a:p>
-          <a:p>
-            <a:pPr lvl="2"/>
-            <a:r>
-              <a:rPr lang="en-US" altLang="ko-KR" sz="1600" dirty="0"/>
-              <a:t>glibc-common-2.17-55.el6.i686.rpm \</a:t>
-            </a:r>
-          </a:p>
-          <a:p>
-            <a:pPr lvl="2"/>
-            <a:r>
-              <a:rPr lang="en-US" altLang="ko-KR" sz="1600" dirty="0"/>
-              <a:t>glibc-devel-2.17-55.el6.i686.rpm \</a:t>
-            </a:r>
-          </a:p>
-          <a:p>
-            <a:pPr lvl="2"/>
-            <a:r>
-              <a:rPr lang="en-US" altLang="ko-KR" sz="1600" dirty="0"/>
-              <a:t>glibc-headers-2.17-55.el6.i686.rpm</a:t>
-            </a:r>
+            <a:pPr marL="800100" lvl="1" indent="-342900">
+              <a:buAutoNum type="arabicPeriod"/>
+            </a:pPr>
+            <a:endParaRPr lang="en-US" altLang="ko-KR" sz="1600" dirty="0" smtClean="0"/>
+          </a:p>
+          <a:p>
+            <a:pPr marL="800100" lvl="1" indent="-342900">
+              <a:buAutoNum type="arabicPeriod"/>
+            </a:pPr>
             <a:endParaRPr lang="en-US" altLang="ko-KR" sz="1600" dirty="0"/>
           </a:p>
           <a:p>
-            <a:pPr marL="342900" indent="-342900">
+            <a:pPr marL="800100" lvl="1" indent="-342900">
               <a:buAutoNum type="arabicPeriod"/>
             </a:pPr>
             <a:endParaRPr lang="en-US" altLang="ko-KR" sz="1600" dirty="0" smtClean="0"/>
@@ -4434,14 +6204,72 @@
             <a:pPr marL="800100" lvl="1" indent="-342900">
               <a:buAutoNum type="arabicPeriod"/>
             </a:pPr>
+            <a:endParaRPr lang="en-US" altLang="ko-KR" sz="1600" dirty="0" smtClean="0"/>
+          </a:p>
+          <a:p>
+            <a:pPr marL="800100" lvl="1" indent="-342900">
+              <a:buAutoNum type="arabicPeriod"/>
+            </a:pPr>
             <a:endParaRPr lang="en-US" altLang="ko-KR" sz="1600" dirty="0"/>
+          </a:p>
+          <a:p>
+            <a:pPr marL="800100" lvl="1" indent="-342900">
+              <a:buAutoNum type="arabicPeriod"/>
+            </a:pPr>
+            <a:endParaRPr lang="en-US" altLang="ko-KR" sz="1600" dirty="0" smtClean="0"/>
+          </a:p>
+          <a:p>
+            <a:pPr marL="800100" lvl="1" indent="-342900">
+              <a:buAutoNum type="arabicPeriod"/>
+            </a:pPr>
+            <a:endParaRPr lang="en-US" altLang="ko-KR" sz="1600" dirty="0"/>
+          </a:p>
+          <a:p>
+            <a:pPr marL="800100" lvl="1" indent="-342900">
+              <a:buAutoNum type="arabicPeriod"/>
+            </a:pPr>
+            <a:endParaRPr lang="en-US" altLang="ko-KR" sz="1600" dirty="0" smtClean="0"/>
+          </a:p>
+          <a:p>
+            <a:pPr marL="800100" lvl="1" indent="-342900">
+              <a:buAutoNum type="arabicPeriod"/>
+            </a:pPr>
+            <a:endParaRPr lang="en-US" altLang="ko-KR" sz="1600" dirty="0"/>
+          </a:p>
+          <a:p>
+            <a:pPr lvl="1"/>
+            <a:endParaRPr lang="en-US" altLang="ko-KR" sz="1600" dirty="0" smtClean="0"/>
           </a:p>
         </p:txBody>
       </p:sp>
+      <p:pic>
+        <p:nvPicPr>
+          <p:cNvPr id="6" name="그림 5"/>
+          <p:cNvPicPr>
+            <a:picLocks noChangeAspect="1"/>
+          </p:cNvPicPr>
+          <p:nvPr/>
+        </p:nvPicPr>
+        <p:blipFill>
+          <a:blip r:embed="rId2"/>
+          <a:stretch>
+            <a:fillRect/>
+          </a:stretch>
+        </p:blipFill>
+        <p:spPr>
+          <a:xfrm>
+            <a:off x="2473325" y="1716087"/>
+            <a:ext cx="5772150" cy="3019425"/>
+          </a:xfrm>
+          <a:prstGeom prst="rect">
+            <a:avLst/>
+          </a:prstGeom>
+        </p:spPr>
+      </p:pic>
     </p:spTree>
     <p:extLst>
       <p:ext uri="{BB962C8B-B14F-4D97-AF65-F5344CB8AC3E}">
-        <p14:creationId xmlns:p14="http://schemas.microsoft.com/office/powerpoint/2010/main" val="645260729"/>
+        <p14:creationId xmlns:p14="http://schemas.microsoft.com/office/powerpoint/2010/main" val="3208394468"/>
       </p:ext>
     </p:extLst>
   </p:cSld>
@@ -4477,7 +6305,7 @@
         <p:spPr>
           <a:xfrm>
             <a:off x="948690" y="651510"/>
-            <a:ext cx="10469880" cy="5816977"/>
+            <a:ext cx="10469880" cy="8125301"/>
           </a:xfrm>
           <a:prstGeom prst="rect">
             <a:avLst/>
@@ -4491,10 +6319,13 @@
           <a:lstStyle/>
           <a:p>
             <a:r>
-              <a:rPr lang="ko-KR" altLang="en-US" sz="2000" b="1" dirty="0" smtClean="0"/>
+              <a:rPr lang="ko-KR" altLang="en-US" b="1" dirty="0" smtClean="0"/>
               <a:t>유통서버에서</a:t>
             </a:r>
-            <a:endParaRPr lang="en-US" altLang="ko-KR" sz="1600" b="1" dirty="0" smtClean="0"/>
+            <a:endParaRPr lang="en-US" altLang="ko-KR" b="1" dirty="0" smtClean="0"/>
+          </a:p>
+          <a:p>
+            <a:endParaRPr lang="en-US" altLang="ko-KR" sz="1600" dirty="0"/>
           </a:p>
           <a:p>
             <a:pPr marL="342900" indent="-342900">
@@ -4502,475 +6333,361 @@
             </a:pPr>
             <a:r>
               <a:rPr lang="en-US" altLang="ko-KR" sz="1600" dirty="0" smtClean="0"/>
-              <a:t>GPKI </a:t>
-            </a:r>
-            <a:r>
-              <a:rPr lang="ko-KR" altLang="en-US" sz="1600" dirty="0" smtClean="0"/>
-              <a:t>모듈 설정 방법</a:t>
-            </a:r>
-            <a:r>
-              <a:rPr lang="en-US" altLang="ko-KR" sz="1600" dirty="0" smtClean="0"/>
-              <a:t>.</a:t>
-            </a:r>
-          </a:p>
-          <a:p>
-            <a:pPr marL="800100" lvl="1" indent="-342900">
-              <a:buAutoNum type="arabicPeriod"/>
-            </a:pPr>
+              <a:t>JAVA_HOME</a:t>
+            </a:r>
+            <a:r>
+              <a:rPr lang="ko-KR" altLang="en-US" sz="1600" dirty="0" smtClean="0"/>
+              <a:t>이 이미 다른 버전의 </a:t>
+            </a:r>
             <a:r>
               <a:rPr lang="en-US" altLang="ko-KR" sz="1600" dirty="0" err="1" smtClean="0"/>
-              <a:t>gpki</a:t>
-            </a:r>
-            <a:r>
-              <a:rPr lang="ko-KR" altLang="en-US" sz="1600" dirty="0" smtClean="0"/>
-              <a:t>표준 </a:t>
-            </a:r>
-            <a:r>
-              <a:rPr lang="en-US" altLang="ko-KR" sz="1600" dirty="0" err="1" smtClean="0"/>
-              <a:t>api</a:t>
-            </a:r>
-            <a:r>
-              <a:rPr lang="en-US" altLang="ko-KR" sz="1600" dirty="0" smtClean="0"/>
-              <a:t> </a:t>
-            </a:r>
-            <a:r>
-              <a:rPr lang="ko-KR" altLang="en-US" sz="1600" dirty="0" smtClean="0"/>
-              <a:t>압축 파일을 해제 </a:t>
-            </a:r>
-            <a:r>
-              <a:rPr lang="en-US" altLang="ko-KR" sz="1600" dirty="0" smtClean="0"/>
-              <a:t>(</a:t>
-            </a:r>
-            <a:r>
-              <a:rPr lang="ko-KR" altLang="en-US" sz="1600" dirty="0" smtClean="0"/>
-              <a:t>보통 암호는 </a:t>
-            </a:r>
-            <a:r>
-              <a:rPr lang="en-US" altLang="ko-KR" sz="1600" dirty="0" smtClean="0"/>
-              <a:t>818)</a:t>
-            </a:r>
-            <a:br>
-              <a:rPr lang="en-US" altLang="ko-KR" sz="1600" dirty="0" smtClean="0"/>
-            </a:br>
-            <a:r>
-              <a:rPr lang="ko-KR" altLang="en-US" sz="1600" dirty="0" smtClean="0"/>
-              <a:t>임시라이센스</a:t>
-            </a:r>
-            <a:r>
-              <a:rPr lang="en-US" altLang="ko-KR" sz="1600" dirty="0" smtClean="0"/>
-              <a:t>, </a:t>
-            </a:r>
-            <a:r>
-              <a:rPr lang="ko-KR" altLang="en-US" sz="1600" dirty="0" smtClean="0"/>
-              <a:t>정상라이센스</a:t>
-            </a:r>
-            <a:r>
-              <a:rPr lang="en-US" altLang="ko-KR" sz="1600" dirty="0" smtClean="0"/>
-              <a:t>, </a:t>
-            </a:r>
-            <a:r>
-              <a:rPr lang="ko-KR" altLang="en-US" sz="1600" dirty="0" smtClean="0"/>
-              <a:t>모듈이 생김</a:t>
-            </a:r>
-            <a:r>
-              <a:rPr lang="en-US" altLang="ko-KR" sz="1600" dirty="0" smtClean="0"/>
-              <a:t>.</a:t>
-            </a:r>
-            <a:br>
-              <a:rPr lang="en-US" altLang="ko-KR" sz="1600" dirty="0" smtClean="0"/>
-            </a:br>
-            <a:r>
-              <a:rPr lang="ko-KR" altLang="en-US" sz="1600" dirty="0" smtClean="0"/>
-              <a:t>임시라이센스는 기간이 </a:t>
-            </a:r>
-            <a:r>
-              <a:rPr lang="en-US" altLang="ko-KR" sz="1600" dirty="0" smtClean="0"/>
-              <a:t>3</a:t>
-            </a:r>
-            <a:r>
-              <a:rPr lang="ko-KR" altLang="en-US" sz="1600" dirty="0" smtClean="0"/>
-              <a:t>개월이고</a:t>
+              <a:t>jdk</a:t>
+            </a:r>
+            <a:r>
+              <a:rPr lang="ko-KR" altLang="en-US" sz="1600" dirty="0" smtClean="0"/>
+              <a:t>로 이미 있거나</a:t>
+            </a:r>
+            <a:r>
+              <a:rPr lang="en-US" altLang="ko-KR" sz="1600" dirty="0" smtClean="0"/>
+              <a:t>, java -version </a:t>
+            </a:r>
+            <a:r>
+              <a:rPr lang="ko-KR" altLang="en-US" sz="1600" dirty="0" smtClean="0"/>
+              <a:t>했을 때</a:t>
             </a:r>
             <a:r>
               <a:rPr lang="en-US" altLang="ko-KR" sz="1600" dirty="0"/>
               <a:t> </a:t>
             </a:r>
             <a:r>
+              <a:rPr lang="en-US" altLang="ko-KR" sz="1600" dirty="0" smtClean="0"/>
+              <a:t>jdk1.4 </a:t>
+            </a:r>
+            <a:r>
+              <a:rPr lang="ko-KR" altLang="en-US" sz="1600" dirty="0" smtClean="0"/>
+              <a:t>가 아닌 다른 버전이 실행될 경우</a:t>
+            </a:r>
+            <a:r>
+              <a:rPr lang="en-US" altLang="ko-KR" sz="1600" dirty="0" smtClean="0"/>
+              <a:t>, </a:t>
+            </a:r>
+            <a:r>
+              <a:rPr lang="ko-KR" altLang="en-US" sz="1600" dirty="0" err="1" smtClean="0"/>
+              <a:t>유통모듈</a:t>
+            </a:r>
+            <a:r>
+              <a:rPr lang="ko-KR" altLang="en-US" sz="1600" dirty="0" smtClean="0"/>
+              <a:t> 설치 가이드에 따라서 </a:t>
+            </a:r>
+            <a:r>
+              <a:rPr lang="en-US" altLang="ko-KR" sz="1600" dirty="0" smtClean="0"/>
+              <a:t>RY_JAVA_HOME </a:t>
+            </a:r>
+            <a:r>
+              <a:rPr lang="ko-KR" altLang="en-US" sz="1600" dirty="0" smtClean="0"/>
+              <a:t>환경변수를 지정해주고 </a:t>
+            </a:r>
+            <a:r>
+              <a:rPr lang="ko-KR" altLang="en-US" sz="1600" dirty="0" err="1" smtClean="0"/>
+              <a:t>유통모듈의</a:t>
+            </a:r>
+            <a:r>
+              <a:rPr lang="ko-KR" altLang="en-US" sz="1600" dirty="0" smtClean="0"/>
+              <a:t> 모든 실행스크립트에서 </a:t>
+            </a:r>
+            <a:r>
+              <a:rPr lang="en-US" altLang="ko-KR" sz="1600" dirty="0" smtClean="0"/>
+              <a:t>java</a:t>
+            </a:r>
+            <a:r>
+              <a:rPr lang="ko-KR" altLang="en-US" sz="1600" dirty="0"/>
+              <a:t>를</a:t>
+            </a:r>
+            <a:r>
+              <a:rPr lang="ko-KR" altLang="en-US" sz="1600" dirty="0" smtClean="0"/>
+              <a:t> </a:t>
+            </a:r>
+            <a:r>
+              <a:rPr lang="en-US" altLang="ko-KR" sz="1600" dirty="0" smtClean="0"/>
+              <a:t>RY_JAVA_HOME/bin/java </a:t>
+            </a:r>
+            <a:r>
+              <a:rPr lang="ko-KR" altLang="en-US" sz="1600" dirty="0" smtClean="0"/>
+              <a:t>으로 수정해준다</a:t>
+            </a:r>
+            <a:r>
+              <a:rPr lang="en-US" altLang="ko-KR" sz="1600" dirty="0" smtClean="0"/>
+              <a:t>. </a:t>
+            </a:r>
+            <a:r>
               <a:rPr lang="en-US" altLang="ko-KR" sz="1600" dirty="0" err="1" smtClean="0"/>
-              <a:t>ip</a:t>
-            </a:r>
-            <a:r>
-              <a:rPr lang="en-US" altLang="ko-KR" sz="1600" dirty="0" smtClean="0"/>
-              <a:t> </a:t>
-            </a:r>
-            <a:r>
-              <a:rPr lang="ko-KR" altLang="en-US" sz="1600" dirty="0" smtClean="0"/>
-              <a:t>체크를 하지 않음</a:t>
+              <a:t>ebms</a:t>
+            </a:r>
+            <a:r>
+              <a:rPr lang="en-US" altLang="ko-KR" sz="1600" dirty="0" smtClean="0"/>
+              <a:t>/messaging/bin/derby_shutdown.sh, derby_startup.sh </a:t>
+            </a:r>
+            <a:r>
+              <a:rPr lang="ko-KR" altLang="en-US" sz="1600" dirty="0" smtClean="0"/>
+              <a:t>도 수정</a:t>
             </a:r>
             <a:r>
               <a:rPr lang="en-US" altLang="ko-KR" sz="1600" dirty="0" smtClean="0"/>
               <a:t>. </a:t>
             </a:r>
             <a:r>
-              <a:rPr lang="ko-KR" altLang="en-US" sz="1600" dirty="0" smtClean="0"/>
-              <a:t>그래서 정상라이센스로 설치 작업하는게 나음</a:t>
+              <a:rPr lang="en-US" altLang="ko-KR" sz="1600" dirty="0" err="1" smtClean="0"/>
+              <a:t>ebms</a:t>
+            </a:r>
+            <a:r>
+              <a:rPr lang="en-US" altLang="ko-KR" sz="1600" dirty="0" smtClean="0"/>
+              <a:t>/messaging/bin, </a:t>
+            </a:r>
+            <a:r>
+              <a:rPr lang="en-US" altLang="ko-KR" sz="1600" dirty="0" err="1" smtClean="0"/>
+              <a:t>ebms</a:t>
+            </a:r>
+            <a:r>
+              <a:rPr lang="en-US" altLang="ko-KR" sz="1600" dirty="0" smtClean="0"/>
+              <a:t>/monitoring/bin</a:t>
+            </a:r>
+            <a:r>
+              <a:rPr lang="ko-KR" altLang="en-US" sz="1600" dirty="0" smtClean="0"/>
+              <a:t>의 </a:t>
+            </a:r>
+            <a:r>
+              <a:rPr lang="en-US" altLang="ko-KR" sz="1600" dirty="0" smtClean="0"/>
+              <a:t>catalina.sh, tool-wrapper.sh, catalinabymonitor.sh </a:t>
+            </a:r>
+            <a:r>
+              <a:rPr lang="ko-KR" altLang="en-US" sz="1600" dirty="0" smtClean="0"/>
+              <a:t>의 </a:t>
+            </a:r>
+            <a:r>
+              <a:rPr lang="en-US" altLang="ko-KR" sz="1600" dirty="0" smtClean="0"/>
+              <a:t>JAVA_HOME  </a:t>
+            </a:r>
+            <a:r>
+              <a:rPr lang="ko-KR" altLang="en-US" sz="1600" dirty="0" smtClean="0"/>
+              <a:t>재설정</a:t>
+            </a:r>
+            <a:r>
+              <a:rPr lang="en-US" altLang="ko-KR" sz="1600" dirty="0" smtClean="0"/>
+              <a:t>. </a:t>
+            </a:r>
+            <a:r>
+              <a:rPr lang="ko-KR" altLang="en-US" sz="1600" dirty="0" smtClean="0"/>
+              <a:t>모듈 설치 가이드</a:t>
+            </a:r>
+            <a:r>
+              <a:rPr lang="en-US" altLang="ko-KR" sz="1600" dirty="0" smtClean="0"/>
+              <a:t>(</a:t>
+            </a:r>
+            <a:r>
+              <a:rPr lang="ko-KR" altLang="en-US" sz="1600" dirty="0" smtClean="0"/>
+              <a:t>별첨</a:t>
+            </a:r>
+            <a:r>
+              <a:rPr lang="en-US" altLang="ko-KR" sz="1600" dirty="0" smtClean="0"/>
+              <a:t>2.2 </a:t>
+            </a:r>
+            <a:r>
+              <a:rPr lang="ko-KR" altLang="en-US" sz="1600" dirty="0" smtClean="0"/>
+              <a:t>참고</a:t>
+            </a:r>
+            <a:r>
+              <a:rPr lang="en-US" altLang="ko-KR" sz="1600" dirty="0" smtClean="0"/>
+              <a:t>) </a:t>
+            </a:r>
+            <a:r>
+              <a:rPr lang="ko-KR" altLang="en-US" sz="1600" dirty="0" smtClean="0"/>
+              <a:t>잘 읽고 그대로 따라하면 됨</a:t>
             </a:r>
             <a:r>
               <a:rPr lang="en-US" altLang="ko-KR" sz="1600" dirty="0" smtClean="0"/>
               <a:t>.</a:t>
             </a:r>
-            <a:br>
-              <a:rPr lang="en-US" altLang="ko-KR" sz="1600" dirty="0" smtClean="0"/>
-            </a:br>
-            <a:r>
-              <a:rPr lang="ko-KR" altLang="en-US" sz="1600" dirty="0" smtClean="0"/>
-              <a:t>정상라이센스 폴더의 </a:t>
-            </a:r>
-            <a:r>
-              <a:rPr lang="en-US" altLang="ko-KR" sz="1600" dirty="0" err="1" smtClean="0"/>
-              <a:t>gpkiapi.lic</a:t>
-            </a:r>
-            <a:r>
-              <a:rPr lang="en-US" altLang="ko-KR" sz="1600" dirty="0" smtClean="0"/>
-              <a:t> </a:t>
-            </a:r>
-            <a:r>
-              <a:rPr lang="ko-KR" altLang="en-US" sz="1600" dirty="0" smtClean="0"/>
-              <a:t>파일을 </a:t>
-            </a:r>
-            <a:r>
-              <a:rPr lang="en-US" altLang="ko-KR" sz="1600" dirty="0" smtClean="0"/>
-              <a:t>relay/</a:t>
-            </a:r>
-            <a:r>
-              <a:rPr lang="en-US" altLang="ko-KR" sz="1600" dirty="0" err="1" smtClean="0"/>
-              <a:t>gpki</a:t>
-            </a:r>
-            <a:r>
-              <a:rPr lang="en-US" altLang="ko-KR" sz="1600" dirty="0" smtClean="0"/>
-              <a:t>/</a:t>
-            </a:r>
-            <a:r>
-              <a:rPr lang="ko-KR" altLang="en-US" sz="1600" dirty="0" smtClean="0"/>
-              <a:t>를 생성하여 위치시킴</a:t>
-            </a:r>
-            <a:r>
-              <a:rPr lang="en-US" altLang="ko-KR" sz="1600" dirty="0" smtClean="0"/>
-              <a:t>.</a:t>
-            </a:r>
-            <a:br>
-              <a:rPr lang="en-US" altLang="ko-KR" sz="1600" dirty="0" smtClean="0"/>
-            </a:br>
-            <a:r>
-              <a:rPr lang="en-US" altLang="ko-KR" sz="1600" dirty="0" err="1" smtClean="0"/>
-              <a:t>gpki</a:t>
-            </a:r>
-            <a:r>
-              <a:rPr lang="en-US" altLang="ko-KR" sz="1600" dirty="0" smtClean="0"/>
-              <a:t> </a:t>
-            </a:r>
-            <a:r>
-              <a:rPr lang="ko-KR" altLang="en-US" sz="1600" dirty="0" smtClean="0"/>
-              <a:t>인증서 파일도 같은 곳에 위치시킴</a:t>
-            </a:r>
-            <a:r>
-              <a:rPr lang="en-US" altLang="ko-KR" sz="1600" dirty="0" smtClean="0"/>
-              <a:t>.</a:t>
-            </a:r>
-          </a:p>
-          <a:p>
-            <a:pPr marL="800100" lvl="1" indent="-342900">
-              <a:buAutoNum type="arabicPeriod"/>
-            </a:pPr>
+          </a:p>
+          <a:p>
+            <a:r>
+              <a:rPr lang="ko-KR" altLang="en-US" sz="1600" dirty="0" smtClean="0"/>
+              <a:t>수정할 목록</a:t>
+            </a:r>
+            <a:endParaRPr lang="en-US" altLang="ko-KR" sz="1600" dirty="0" smtClean="0"/>
+          </a:p>
+          <a:p>
+            <a:r>
+              <a:rPr lang="en-US" altLang="ko-KR" sz="1200" dirty="0" smtClean="0"/>
+              <a:t>relay/bin/ebms_start.sh</a:t>
+            </a:r>
+            <a:endParaRPr lang="en-US" altLang="ko-KR" sz="1200" dirty="0"/>
+          </a:p>
+          <a:p>
+            <a:r>
+              <a:rPr lang="en-US" altLang="ko-KR" sz="1200" dirty="0" smtClean="0"/>
+              <a:t>relay/bin/ebms_stop.sh</a:t>
+            </a:r>
+            <a:endParaRPr lang="en-US" altLang="ko-KR" sz="1200" dirty="0"/>
+          </a:p>
+          <a:p>
+            <a:r>
+              <a:rPr lang="en-US" altLang="ko-KR" sz="1200" dirty="0" smtClean="0"/>
+              <a:t>relay/bin/module_statuscheck.sh</a:t>
+            </a:r>
+            <a:endParaRPr lang="en-US" altLang="ko-KR" sz="1200" dirty="0"/>
+          </a:p>
+          <a:p>
+            <a:r>
+              <a:rPr lang="en-US" altLang="ko-KR" sz="1200" dirty="0"/>
+              <a:t>relay/bin/monitor_start.sh</a:t>
+            </a:r>
+          </a:p>
+          <a:p>
+            <a:r>
+              <a:rPr lang="en-US" altLang="ko-KR" sz="1200" dirty="0"/>
+              <a:t>relay/bin/monitor_stop.sh</a:t>
+            </a:r>
+          </a:p>
+          <a:p>
+            <a:r>
+              <a:rPr lang="en-US" altLang="ko-KR" sz="1200" dirty="0"/>
+              <a:t>relay/bin/relay_start.sh</a:t>
+            </a:r>
+          </a:p>
+          <a:p>
+            <a:r>
+              <a:rPr lang="en-US" altLang="ko-KR" sz="1200" dirty="0" smtClean="0"/>
+              <a:t>relay/bin/relay_stop.sh</a:t>
+            </a:r>
+          </a:p>
+          <a:p>
+            <a:r>
+              <a:rPr lang="en-US" altLang="ko-KR" sz="1200" dirty="0" smtClean="0"/>
+              <a:t>-----------------------------------------------------------</a:t>
+            </a:r>
+            <a:endParaRPr lang="en-US" altLang="ko-KR" sz="1200" dirty="0"/>
+          </a:p>
+          <a:p>
+            <a:r>
+              <a:rPr lang="en-US" altLang="ko-KR" sz="1200" dirty="0"/>
+              <a:t>relay/bin/system/start_ebms.sh</a:t>
+            </a:r>
+          </a:p>
+          <a:p>
+            <a:r>
+              <a:rPr lang="en-US" altLang="ko-KR" sz="1200" dirty="0"/>
+              <a:t>relay/bin/system/start_ebmsreceiverbymont.sh</a:t>
+            </a:r>
+          </a:p>
+          <a:p>
+            <a:r>
+              <a:rPr lang="en-US" altLang="ko-KR" sz="1200" dirty="0"/>
+              <a:t>relay/bin/system/start_monitor2.sh</a:t>
+            </a:r>
+          </a:p>
+          <a:p>
+            <a:r>
+              <a:rPr lang="en-US" altLang="ko-KR" sz="1200" dirty="0"/>
+              <a:t>relay/bin/system/stop_ebms.sh</a:t>
+            </a:r>
+          </a:p>
+          <a:p>
+            <a:r>
+              <a:rPr lang="en-US" altLang="ko-KR" sz="1200" dirty="0" smtClean="0"/>
+              <a:t>relay/bin/system/stop_ebmsreceiverbymont.sh</a:t>
+            </a:r>
+          </a:p>
+          <a:p>
+            <a:r>
+              <a:rPr lang="en-US" altLang="ko-KR" sz="1200" dirty="0" smtClean="0"/>
+              <a:t>--------------------------------------------------------------</a:t>
+            </a:r>
+          </a:p>
+          <a:p>
+            <a:r>
+              <a:rPr lang="en-US" altLang="ko-KR" sz="1200" dirty="0"/>
+              <a:t>relay/ebms/messaging/bin/catalina.sh</a:t>
+            </a:r>
+          </a:p>
+          <a:p>
+            <a:r>
+              <a:rPr lang="en-US" altLang="ko-KR" sz="1200" dirty="0"/>
+              <a:t>relay/ebms/messaging/bin/catalinabymonitor.sh</a:t>
+            </a:r>
+          </a:p>
+          <a:p>
+            <a:r>
+              <a:rPr lang="en-US" altLang="ko-KR" sz="1200" dirty="0"/>
+              <a:t>relay/ebms/messaging/bin/tool-wrapper.sh</a:t>
+            </a:r>
+          </a:p>
+          <a:p>
+            <a:r>
+              <a:rPr lang="en-US" altLang="ko-KR" sz="1200" dirty="0"/>
+              <a:t>relay/ebms/messaging/bin/derby_startup.sh</a:t>
+            </a:r>
+          </a:p>
+          <a:p>
+            <a:r>
+              <a:rPr lang="en-US" altLang="ko-KR" sz="1200" dirty="0"/>
+              <a:t>relay/ebms/messaging/bin/derby_shutdown.sh</a:t>
+            </a:r>
+          </a:p>
+          <a:p>
+            <a:r>
+              <a:rPr lang="en-US" altLang="ko-KR" sz="1200" dirty="0" smtClean="0"/>
+              <a:t>----------------------------------------------------------------</a:t>
+            </a:r>
+          </a:p>
+          <a:p>
+            <a:r>
+              <a:rPr lang="en-US" altLang="ko-KR" sz="1200" dirty="0"/>
+              <a:t>relay/ebms/monitoring/bin/catalina.sh</a:t>
+            </a:r>
+          </a:p>
+          <a:p>
+            <a:r>
+              <a:rPr lang="en-US" altLang="ko-KR" sz="1200" dirty="0"/>
+              <a:t>relay/ebms/monitoring/bin/tool-wrapper.sh</a:t>
+            </a:r>
+          </a:p>
+          <a:p>
             <a:endParaRPr lang="en-US" altLang="ko-KR" sz="1600" dirty="0"/>
           </a:p>
           <a:p>
-            <a:pPr marL="800100" lvl="1" indent="-342900">
+            <a:pPr marL="342900" indent="-342900">
               <a:buAutoNum type="arabicPeriod"/>
             </a:pPr>
             <a:endParaRPr lang="en-US" altLang="ko-KR" sz="1600" dirty="0" smtClean="0"/>
           </a:p>
           <a:p>
-            <a:pPr marL="800100" lvl="1" indent="-342900">
+            <a:pPr marL="342900" indent="-342900">
+              <a:buAutoNum type="arabicPeriod"/>
+            </a:pPr>
+            <a:endParaRPr lang="en-US" altLang="ko-KR" sz="1600" dirty="0"/>
+          </a:p>
+          <a:p>
+            <a:pPr marL="342900" indent="-342900">
               <a:buAutoNum type="arabicPeriod"/>
             </a:pPr>
             <a:endParaRPr lang="en-US" altLang="ko-KR" sz="1600" dirty="0" smtClean="0"/>
           </a:p>
           <a:p>
-            <a:pPr marL="800100" lvl="1" indent="-342900">
+            <a:pPr marL="342900" indent="-342900">
+              <a:buAutoNum type="arabicPeriod"/>
+            </a:pPr>
+            <a:endParaRPr lang="en-US" altLang="ko-KR" sz="1600" dirty="0" smtClean="0"/>
+          </a:p>
+          <a:p>
+            <a:pPr marL="342900" indent="-342900">
               <a:buAutoNum type="arabicPeriod"/>
             </a:pPr>
             <a:endParaRPr lang="en-US" altLang="ko-KR" sz="1600" dirty="0"/>
           </a:p>
           <a:p>
-            <a:pPr marL="800100" lvl="1" indent="-342900">
-              <a:buAutoNum type="arabicPeriod"/>
-            </a:pPr>
-            <a:endParaRPr lang="en-US" altLang="ko-KR" sz="1600" dirty="0" smtClean="0"/>
-          </a:p>
-          <a:p>
-            <a:pPr marL="800100" lvl="1" indent="-342900">
-              <a:buAutoNum type="arabicPeriod"/>
-            </a:pPr>
-            <a:endParaRPr lang="en-US" altLang="ko-KR" sz="1600" dirty="0" smtClean="0"/>
-          </a:p>
-          <a:p>
-            <a:pPr marL="800100" lvl="1" indent="-342900">
-              <a:buAutoNum type="arabicPeriod"/>
-            </a:pPr>
-            <a:r>
-              <a:rPr lang="en-US" altLang="ko-KR" sz="1600" dirty="0" smtClean="0"/>
-              <a:t>gpkiapiV1.4.0.0_Linux_2.6.9-34.26AX_32bit_20170501.tgz </a:t>
-            </a:r>
-            <a:r>
-              <a:rPr lang="ko-KR" altLang="en-US" sz="1600" dirty="0" smtClean="0"/>
-              <a:t>를 사용</a:t>
-            </a:r>
-            <a:r>
-              <a:rPr lang="en-US" altLang="ko-KR" sz="1600" dirty="0" smtClean="0"/>
-              <a:t>. </a:t>
-            </a:r>
-            <a:r>
-              <a:rPr lang="ko-KR" altLang="en-US" sz="1600" dirty="0" smtClean="0"/>
-              <a:t>압축 해제</a:t>
-            </a:r>
-            <a:endParaRPr lang="en-US" altLang="ko-KR" sz="1600" dirty="0" smtClean="0"/>
-          </a:p>
-          <a:p>
-            <a:pPr marL="800100" lvl="1" indent="-342900">
-              <a:buAutoNum type="arabicPeriod"/>
-            </a:pPr>
-            <a:r>
-              <a:rPr lang="ko-KR" altLang="en-US" sz="1600" dirty="0" smtClean="0"/>
-              <a:t>압축 해제하여 생성된 폴더 안에 </a:t>
-            </a:r>
-            <a:r>
-              <a:rPr lang="en-US" altLang="ko-KR" sz="1600" dirty="0" err="1" smtClean="0"/>
-              <a:t>conf</a:t>
-            </a:r>
-            <a:r>
-              <a:rPr lang="en-US" altLang="ko-KR" sz="1600" dirty="0" smtClean="0"/>
-              <a:t>/</a:t>
-            </a:r>
-            <a:r>
-              <a:rPr lang="en-US" altLang="ko-KR" sz="1600" dirty="0" err="1" smtClean="0"/>
-              <a:t>gpkiapi.conf</a:t>
-            </a:r>
-            <a:r>
-              <a:rPr lang="en-US" altLang="ko-KR" sz="1600" dirty="0" smtClean="0"/>
-              <a:t> </a:t>
-            </a:r>
-            <a:r>
-              <a:rPr lang="ko-KR" altLang="en-US" sz="1600" dirty="0" smtClean="0"/>
-              <a:t>파일을 </a:t>
-            </a:r>
-            <a:r>
-              <a:rPr lang="en-US" altLang="ko-KR" sz="1600" dirty="0" smtClean="0"/>
-              <a:t>relay/</a:t>
-            </a:r>
-            <a:r>
-              <a:rPr lang="en-US" altLang="ko-KR" sz="1600" dirty="0" err="1" smtClean="0"/>
-              <a:t>config</a:t>
-            </a:r>
-            <a:r>
-              <a:rPr lang="en-US" altLang="ko-KR" sz="1600" dirty="0" smtClean="0"/>
-              <a:t>/</a:t>
-            </a:r>
-            <a:r>
-              <a:rPr lang="ko-KR" altLang="en-US" sz="1600" dirty="0" smtClean="0"/>
-              <a:t>에 파일과 교체</a:t>
-            </a:r>
-            <a:endParaRPr lang="en-US" altLang="ko-KR" sz="1600" dirty="0" smtClean="0"/>
-          </a:p>
-          <a:p>
-            <a:pPr marL="800100" lvl="1" indent="-342900">
-              <a:buAutoNum type="arabicPeriod"/>
-            </a:pPr>
-            <a:r>
-              <a:rPr lang="ko-KR" altLang="en-US" sz="1600" dirty="0" smtClean="0"/>
-              <a:t>압축 해제하여 생성된 폴더 안에 </a:t>
-            </a:r>
-            <a:r>
-              <a:rPr lang="en-US" altLang="ko-KR" sz="1600" dirty="0" smtClean="0"/>
-              <a:t>lib/ </a:t>
-            </a:r>
-            <a:r>
-              <a:rPr lang="ko-KR" altLang="en-US" sz="1600" dirty="0" smtClean="0"/>
-              <a:t>안에 모든 파일을 </a:t>
-            </a:r>
-            <a:r>
-              <a:rPr lang="en-US" altLang="ko-KR" sz="1600" dirty="0" smtClean="0"/>
-              <a:t>relay/lib</a:t>
-            </a:r>
-            <a:r>
-              <a:rPr lang="ko-KR" altLang="en-US" sz="1600" dirty="0" smtClean="0"/>
-              <a:t>로 복사</a:t>
-            </a:r>
-            <a:r>
-              <a:rPr lang="en-US" altLang="ko-KR" sz="1600" dirty="0" smtClean="0"/>
-              <a:t>.</a:t>
-            </a:r>
-          </a:p>
-          <a:p>
-            <a:pPr marL="800100" lvl="1" indent="-342900">
-              <a:buAutoNum type="arabicPeriod"/>
-            </a:pPr>
-            <a:r>
-              <a:rPr lang="en-US" altLang="ko-KR" sz="1600" dirty="0" smtClean="0"/>
-              <a:t>32bitso </a:t>
-            </a:r>
-            <a:r>
-              <a:rPr lang="ko-KR" altLang="en-US" sz="1600" dirty="0" smtClean="0"/>
-              <a:t>모음을 압축해제하여 </a:t>
-            </a:r>
-            <a:r>
-              <a:rPr lang="en-US" altLang="ko-KR" sz="1600" dirty="0" smtClean="0"/>
-              <a:t>relay/lib </a:t>
-            </a:r>
-            <a:r>
-              <a:rPr lang="ko-KR" altLang="en-US" sz="1600" dirty="0" err="1" smtClean="0"/>
-              <a:t>폴더안에</a:t>
-            </a:r>
-            <a:r>
-              <a:rPr lang="ko-KR" altLang="en-US" sz="1600" dirty="0" smtClean="0"/>
-              <a:t> 위치</a:t>
-            </a:r>
-            <a:r>
-              <a:rPr lang="en-US" altLang="ko-KR" sz="1600" dirty="0" smtClean="0"/>
-              <a:t>.</a:t>
-            </a:r>
-          </a:p>
-          <a:p>
-            <a:pPr marL="1257300" lvl="2" indent="-342900">
-              <a:buAutoNum type="arabicPeriod"/>
-            </a:pPr>
-            <a:r>
-              <a:rPr lang="en-US" altLang="ko-KR" sz="1600" dirty="0" smtClean="0"/>
-              <a:t>relay/lib </a:t>
-            </a:r>
-            <a:r>
-              <a:rPr lang="ko-KR" altLang="en-US" sz="1600" dirty="0" smtClean="0"/>
-              <a:t>에서 </a:t>
-            </a:r>
-            <a:r>
-              <a:rPr lang="en-US" altLang="ko-KR" sz="1600" dirty="0" err="1" smtClean="0"/>
-              <a:t>ldd</a:t>
-            </a:r>
-            <a:r>
-              <a:rPr lang="en-US" altLang="ko-KR" sz="1600" dirty="0" smtClean="0"/>
-              <a:t> </a:t>
-            </a:r>
-            <a:r>
-              <a:rPr lang="en-US" altLang="ko-KR" sz="1600" dirty="0" err="1" smtClean="0"/>
-              <a:t>gpkiapi_info</a:t>
-            </a:r>
-            <a:r>
-              <a:rPr lang="en-US" altLang="ko-KR" sz="1600" dirty="0" smtClean="0"/>
-              <a:t>, </a:t>
-            </a:r>
-            <a:r>
-              <a:rPr lang="en-US" altLang="ko-KR" sz="1600" dirty="0" err="1" smtClean="0"/>
-              <a:t>ldd</a:t>
-            </a:r>
-            <a:r>
-              <a:rPr lang="en-US" altLang="ko-KR" sz="1600" dirty="0" smtClean="0"/>
-              <a:t> libgpkiapi.so, </a:t>
-            </a:r>
-            <a:r>
-              <a:rPr lang="en-US" altLang="ko-KR" sz="1600" dirty="0" err="1" smtClean="0"/>
-              <a:t>ldd</a:t>
-            </a:r>
-            <a:r>
-              <a:rPr lang="en-US" altLang="ko-KR" sz="1600" dirty="0"/>
-              <a:t> </a:t>
-            </a:r>
-            <a:r>
-              <a:rPr lang="en-US" altLang="ko-KR" sz="1600" dirty="0" smtClean="0"/>
-              <a:t>liblber.so, </a:t>
-            </a:r>
-            <a:r>
-              <a:rPr lang="en-US" altLang="ko-KR" sz="1600" dirty="0" err="1" smtClean="0"/>
-              <a:t>ldd</a:t>
-            </a:r>
-            <a:r>
-              <a:rPr lang="en-US" altLang="ko-KR" sz="1600" dirty="0" smtClean="0"/>
-              <a:t> libldap.so</a:t>
-            </a:r>
-            <a:r>
-              <a:rPr lang="ko-KR" altLang="en-US" sz="1600" dirty="0" smtClean="0"/>
-              <a:t>로 의존성을 확인하면서 연결 안된 것은 </a:t>
-            </a:r>
-            <a:r>
-              <a:rPr lang="ko-KR" altLang="en-US" sz="1600" dirty="0" err="1" smtClean="0"/>
-              <a:t>연결해줘야하는데</a:t>
-            </a:r>
-            <a:r>
-              <a:rPr lang="en-US" altLang="ko-KR" sz="1600" dirty="0"/>
-              <a:t> </a:t>
-            </a:r>
-            <a:r>
-              <a:rPr lang="ko-KR" altLang="en-US" sz="1600" dirty="0" smtClean="0"/>
-              <a:t>보통 </a:t>
-            </a:r>
-            <a:r>
-              <a:rPr lang="en-US" altLang="ko-KR" sz="1600" dirty="0" smtClean="0"/>
-              <a:t>32bitso</a:t>
-            </a:r>
-            <a:r>
-              <a:rPr lang="ko-KR" altLang="en-US" sz="1600" dirty="0" smtClean="0"/>
-              <a:t>안에 있으므로 </a:t>
-            </a:r>
-            <a:r>
-              <a:rPr lang="ko-KR" altLang="en-US" sz="1600" dirty="0" err="1" smtClean="0"/>
-              <a:t>심볼릭</a:t>
-            </a:r>
-            <a:r>
-              <a:rPr lang="ko-KR" altLang="en-US" sz="1600" dirty="0" smtClean="0"/>
-              <a:t> 링크로 필요한 파일을 이름 같게 </a:t>
-            </a:r>
-            <a:r>
-              <a:rPr lang="ko-KR" altLang="en-US" sz="1600" dirty="0" err="1" smtClean="0"/>
-              <a:t>위치시켜줌</a:t>
-            </a:r>
-            <a:r>
-              <a:rPr lang="en-US" altLang="ko-KR" sz="1600" dirty="0" smtClean="0"/>
-              <a:t>. </a:t>
-            </a:r>
-            <a:r>
-              <a:rPr lang="ko-KR" altLang="en-US" sz="1600" dirty="0" smtClean="0"/>
-              <a:t>예는 아래</a:t>
-            </a:r>
-            <a:endParaRPr lang="en-US" altLang="ko-KR" sz="1600" dirty="0" smtClean="0"/>
-          </a:p>
-          <a:p>
-            <a:pPr marL="1257300" lvl="2" indent="-342900">
-              <a:buAutoNum type="arabicPeriod"/>
-            </a:pPr>
-            <a:r>
-              <a:rPr lang="en-US" altLang="ko-KR" sz="1600" dirty="0" smtClean="0"/>
-              <a:t>ln -s liblber.so liblber.so.7</a:t>
-            </a:r>
-          </a:p>
-          <a:p>
-            <a:pPr marL="1257300" lvl="2" indent="-342900">
-              <a:buAutoNum type="arabicPeriod"/>
-            </a:pPr>
-            <a:r>
-              <a:rPr lang="en-US" altLang="ko-KR" sz="1600" dirty="0" smtClean="0"/>
-              <a:t>ln -</a:t>
-            </a:r>
-            <a:r>
-              <a:rPr lang="en-US" altLang="ko-KR" sz="1600" dirty="0"/>
-              <a:t>s </a:t>
-            </a:r>
-            <a:r>
-              <a:rPr lang="en-US" altLang="ko-KR" sz="1600" dirty="0" smtClean="0"/>
-              <a:t>32bitso/libk5crypto.so.3.1 </a:t>
-            </a:r>
-            <a:r>
-              <a:rPr lang="en-US" altLang="ko-KR" sz="1600" dirty="0"/>
-              <a:t>libk5crypto.so.3</a:t>
-            </a:r>
+            <a:pPr marL="342900" indent="-342900">
+              <a:buAutoNum type="arabicPeriod"/>
+            </a:pPr>
             <a:endParaRPr lang="en-US" altLang="ko-KR" sz="1600" dirty="0" smtClean="0"/>
           </a:p>
           <a:p>
@@ -4983,7 +6700,7 @@
       </p:sp>
       <p:pic>
         <p:nvPicPr>
-          <p:cNvPr id="2" name="그림 1"/>
+          <p:cNvPr id="6" name="그림 5"/>
           <p:cNvPicPr>
             <a:picLocks noChangeAspect="1"/>
           </p:cNvPicPr>
@@ -4997,8 +6714,32 @@
         </p:blipFill>
         <p:spPr>
           <a:xfrm>
-            <a:off x="1759267" y="2504866"/>
-            <a:ext cx="6181725" cy="1371600"/>
+            <a:off x="5565775" y="5381625"/>
+            <a:ext cx="5276850" cy="1276350"/>
+          </a:xfrm>
+          <a:prstGeom prst="rect">
+            <a:avLst/>
+          </a:prstGeom>
+        </p:spPr>
+      </p:pic>
+      <p:pic>
+        <p:nvPicPr>
+          <p:cNvPr id="7" name="그림 6"/>
+          <p:cNvPicPr>
+            <a:picLocks noChangeAspect="1"/>
+          </p:cNvPicPr>
+          <p:nvPr/>
+        </p:nvPicPr>
+        <p:blipFill>
+          <a:blip r:embed="rId3"/>
+          <a:stretch>
+            <a:fillRect/>
+          </a:stretch>
+        </p:blipFill>
+        <p:spPr>
+          <a:xfrm>
+            <a:off x="3598635" y="2840201"/>
+            <a:ext cx="10436087" cy="845176"/>
           </a:xfrm>
           <a:prstGeom prst="rect">
             <a:avLst/>
@@ -5008,7 +6749,7 @@
     </p:spTree>
     <p:extLst>
       <p:ext uri="{BB962C8B-B14F-4D97-AF65-F5344CB8AC3E}">
-        <p14:creationId xmlns:p14="http://schemas.microsoft.com/office/powerpoint/2010/main" val="613004799"/>
+        <p14:creationId xmlns:p14="http://schemas.microsoft.com/office/powerpoint/2010/main" val="2855727286"/>
       </p:ext>
     </p:extLst>
   </p:cSld>
@@ -5044,7 +6785,7 @@
         <p:spPr>
           <a:xfrm>
             <a:off x="948690" y="651510"/>
-            <a:ext cx="10469880" cy="1384995"/>
+            <a:ext cx="10469880" cy="3570208"/>
           </a:xfrm>
           <a:prstGeom prst="rect">
             <a:avLst/>
@@ -5058,92 +6799,172 @@
           <a:lstStyle/>
           <a:p>
             <a:r>
-              <a:rPr lang="ko-KR" altLang="en-US" sz="2000" b="1" dirty="0" smtClean="0"/>
+              <a:rPr lang="ko-KR" altLang="en-US" b="1" dirty="0" smtClean="0"/>
               <a:t>유통서버에서</a:t>
             </a:r>
-            <a:endParaRPr lang="en-US" altLang="ko-KR" sz="1600" b="1" dirty="0" smtClean="0"/>
-          </a:p>
-          <a:p>
-            <a:pPr marL="342900" indent="-342900">
-              <a:buAutoNum type="arabicPeriod"/>
-            </a:pPr>
-            <a:r>
-              <a:rPr lang="en-US" altLang="ko-KR" sz="1600" dirty="0" smtClean="0"/>
-              <a:t>GPKI </a:t>
-            </a:r>
-            <a:r>
-              <a:rPr lang="ko-KR" altLang="en-US" sz="1600" dirty="0" smtClean="0"/>
-              <a:t>모듈 설정 방법</a:t>
-            </a:r>
-            <a:r>
-              <a:rPr lang="en-US" altLang="ko-KR" sz="1600" dirty="0" smtClean="0"/>
-              <a:t>.</a:t>
-            </a:r>
-          </a:p>
-          <a:p>
-            <a:pPr marL="800100" lvl="1" indent="-342900">
-              <a:buAutoNum type="arabicPeriod"/>
-            </a:pPr>
+            <a:endParaRPr lang="en-US" altLang="ko-KR" b="1" dirty="0" smtClean="0"/>
+          </a:p>
+          <a:p>
+            <a:endParaRPr lang="en-US" altLang="ko-KR" sz="1600" dirty="0"/>
+          </a:p>
+          <a:p>
             <a:r>
               <a:rPr lang="en-US" altLang="ko-KR" sz="1600" dirty="0"/>
-              <a:t>○</a:t>
-            </a:r>
-            <a:r>
-              <a:rPr lang="en-US" altLang="ko-KR" sz="1600" dirty="0" smtClean="0"/>
-              <a:t>gpkiapiV1.4.0.0_20101002_j.zip </a:t>
-            </a:r>
-            <a:r>
-              <a:rPr lang="ko-KR" altLang="en-US" sz="1600" dirty="0" smtClean="0"/>
-              <a:t>파일 해제</a:t>
-            </a:r>
-            <a:endParaRPr lang="en-US" altLang="ko-KR" sz="1600" dirty="0" smtClean="0"/>
-          </a:p>
-          <a:p>
-            <a:pPr marL="800100" lvl="1" indent="-342900">
-              <a:buAutoNum type="arabicPeriod"/>
-            </a:pPr>
-            <a:r>
-              <a:rPr lang="ko-KR" altLang="en-US" sz="1600" dirty="0" err="1" smtClean="0"/>
-              <a:t>해제된폴더</a:t>
+              <a:t>6</a:t>
+            </a:r>
+            <a:r>
+              <a:rPr lang="en-US" altLang="ko-KR" sz="1600" dirty="0" smtClean="0"/>
+              <a:t>. relay/</a:t>
+            </a:r>
+            <a:r>
+              <a:rPr lang="en-US" altLang="ko-KR" sz="1600" dirty="0" err="1" smtClean="0"/>
+              <a:t>config</a:t>
             </a:r>
             <a:r>
               <a:rPr lang="en-US" altLang="ko-KR" sz="1600" dirty="0"/>
               <a:t>/</a:t>
             </a:r>
             <a:r>
-              <a:rPr lang="en-US" altLang="ko-KR" sz="1600" dirty="0" smtClean="0"/>
-              <a:t>lib/libgpkiapi_jni.jar </a:t>
-            </a:r>
-            <a:r>
-              <a:rPr lang="ko-KR" altLang="en-US" sz="1600" dirty="0" smtClean="0"/>
-              <a:t>을 </a:t>
-            </a:r>
-            <a:r>
-              <a:rPr lang="en-US" altLang="ko-KR" sz="1600" dirty="0" smtClean="0"/>
-              <a:t>relay/classes/</a:t>
-            </a:r>
-            <a:r>
-              <a:rPr lang="ko-KR" altLang="en-US" sz="1600" dirty="0" smtClean="0"/>
-              <a:t>에  복사</a:t>
+              <a:rPr lang="ko-KR" altLang="en-US" sz="1600" dirty="0"/>
+              <a:t>의 </a:t>
+            </a:r>
+            <a:r>
+              <a:rPr lang="en-US" altLang="ko-KR" sz="1600" dirty="0"/>
+              <a:t>?_properties.xml </a:t>
+            </a:r>
+            <a:r>
+              <a:rPr lang="ko-KR" altLang="en-US" sz="1600" dirty="0"/>
+              <a:t>파일을 적절히 선택하여 이름을 바꿔준다</a:t>
+            </a:r>
+            <a:r>
+              <a:rPr lang="en-US" altLang="ko-KR" sz="1600" dirty="0" smtClean="0"/>
+              <a:t>. </a:t>
+            </a:r>
+          </a:p>
+          <a:p>
+            <a:r>
+              <a:rPr lang="en-US" altLang="ko-KR" sz="1600" dirty="0" smtClean="0"/>
+              <a:t>	ex) T_properties.xml </a:t>
+            </a:r>
+            <a:r>
+              <a:rPr lang="en-US" altLang="ko-KR" sz="1600" dirty="0"/>
+              <a:t>=&gt; properties.xml </a:t>
+            </a:r>
+            <a:r>
+              <a:rPr lang="ko-KR" altLang="en-US" sz="1600" dirty="0"/>
+              <a:t>로 </a:t>
+            </a:r>
+            <a:r>
+              <a:rPr lang="ko-KR" altLang="en-US" sz="1600" dirty="0" err="1"/>
+              <a:t>작업해줌</a:t>
+            </a:r>
+            <a:r>
+              <a:rPr lang="en-US" altLang="ko-KR" sz="1600" dirty="0" smtClean="0"/>
+              <a:t>. </a:t>
+            </a:r>
+            <a:r>
+              <a:rPr lang="ko-KR" altLang="en-US" sz="1600" dirty="0" smtClean="0"/>
+              <a:t>복사하면서 이름 </a:t>
+            </a:r>
+            <a:r>
+              <a:rPr lang="ko-KR" altLang="en-US" sz="1600" dirty="0" err="1" smtClean="0"/>
+              <a:t>바꿔도됨</a:t>
             </a:r>
             <a:r>
               <a:rPr lang="en-US" altLang="ko-KR" sz="1600" dirty="0" smtClean="0"/>
               <a:t>.</a:t>
             </a:r>
+          </a:p>
+          <a:p>
             <a:endParaRPr lang="en-US" altLang="ko-KR" sz="1600" dirty="0"/>
           </a:p>
           <a:p>
+            <a:endParaRPr lang="en-US" altLang="ko-KR" sz="1600" dirty="0" smtClean="0"/>
+          </a:p>
+          <a:p>
+            <a:endParaRPr lang="en-US" altLang="ko-KR" sz="1600" dirty="0"/>
+          </a:p>
+          <a:p>
+            <a:endParaRPr lang="en-US" altLang="ko-KR" sz="1600" dirty="0" smtClean="0"/>
+          </a:p>
+          <a:p>
+            <a:endParaRPr lang="en-US" altLang="ko-KR" sz="1600" dirty="0" smtClean="0"/>
+          </a:p>
+          <a:p>
+            <a:endParaRPr lang="en-US" altLang="ko-KR" sz="1600" dirty="0"/>
+          </a:p>
+          <a:p>
+            <a:endParaRPr lang="en-US" altLang="ko-KR" sz="1600" dirty="0" smtClean="0"/>
+          </a:p>
+          <a:p>
+            <a:endParaRPr lang="en-US" altLang="ko-KR" sz="1600" dirty="0"/>
+          </a:p>
+          <a:p>
+            <a:pPr marL="342900" indent="-342900">
+              <a:buAutoNum type="arabicPeriod"/>
+            </a:pPr>
+            <a:endParaRPr lang="en-US" altLang="ko-KR" sz="1600" dirty="0" smtClean="0"/>
+          </a:p>
+          <a:p>
             <a:pPr marL="800100" lvl="1" indent="-342900">
               <a:buAutoNum type="arabicPeriod"/>
             </a:pPr>
-            <a:endParaRPr lang="en-US" altLang="ko-KR" sz="1600" dirty="0" smtClean="0"/>
+            <a:endParaRPr lang="en-US" altLang="ko-KR" sz="1600" dirty="0"/>
           </a:p>
         </p:txBody>
       </p:sp>
+      <p:pic>
+        <p:nvPicPr>
+          <p:cNvPr id="2" name="그림 1"/>
+          <p:cNvPicPr>
+            <a:picLocks noChangeAspect="1"/>
+          </p:cNvPicPr>
+          <p:nvPr/>
+        </p:nvPicPr>
+        <p:blipFill>
+          <a:blip r:embed="rId2"/>
+          <a:stretch>
+            <a:fillRect/>
+          </a:stretch>
+        </p:blipFill>
+        <p:spPr>
+          <a:xfrm>
+            <a:off x="8931275" y="5636181"/>
+            <a:ext cx="4476750" cy="1047750"/>
+          </a:xfrm>
+          <a:prstGeom prst="rect">
+            <a:avLst/>
+          </a:prstGeom>
+        </p:spPr>
+      </p:pic>
+      <p:pic>
+        <p:nvPicPr>
+          <p:cNvPr id="4" name="그림 3"/>
+          <p:cNvPicPr>
+            <a:picLocks noChangeAspect="1"/>
+          </p:cNvPicPr>
+          <p:nvPr/>
+        </p:nvPicPr>
+        <p:blipFill>
+          <a:blip r:embed="rId3"/>
+          <a:stretch>
+            <a:fillRect/>
+          </a:stretch>
+        </p:blipFill>
+        <p:spPr>
+          <a:xfrm>
+            <a:off x="1037590" y="1802448"/>
+            <a:ext cx="5029200" cy="1895475"/>
+          </a:xfrm>
+          <a:prstGeom prst="rect">
+            <a:avLst/>
+          </a:prstGeom>
+        </p:spPr>
+      </p:pic>
     </p:spTree>
     <p:extLst>
       <p:ext uri="{BB962C8B-B14F-4D97-AF65-F5344CB8AC3E}">
-        <p14:creationId xmlns:p14="http://schemas.microsoft.com/office/powerpoint/2010/main" val="2663777004"/>
+        <p14:creationId xmlns:p14="http://schemas.microsoft.com/office/powerpoint/2010/main" val="4066251600"/>
       </p:ext>
     </p:extLst>
   </p:cSld>
@@ -5179,7 +7000,7 @@
         <p:spPr>
           <a:xfrm>
             <a:off x="948690" y="651510"/>
-            <a:ext cx="10469880" cy="4339650"/>
+            <a:ext cx="10469880" cy="4062651"/>
           </a:xfrm>
           <a:prstGeom prst="rect">
             <a:avLst/>
@@ -5194,563 +7015,353 @@
           <a:p>
             <a:r>
               <a:rPr lang="ko-KR" altLang="en-US" b="1" dirty="0" smtClean="0"/>
-              <a:t>그룹웨어서버에서</a:t>
+              <a:t>유통서버에서</a:t>
             </a:r>
             <a:endParaRPr lang="en-US" altLang="ko-KR" b="1" dirty="0" smtClean="0"/>
           </a:p>
           <a:p>
-            <a:pPr marL="342900" indent="-342900">
-              <a:buAutoNum type="arabicPeriod"/>
-            </a:pPr>
+            <a:endParaRPr lang="en-US" altLang="ko-KR" sz="1600" dirty="0"/>
+          </a:p>
+          <a:p>
+            <a:r>
+              <a:rPr lang="en-US" altLang="ko-KR" sz="1600" dirty="0"/>
+              <a:t>6</a:t>
+            </a:r>
+            <a:r>
+              <a:rPr lang="en-US" altLang="ko-KR" sz="1600" dirty="0" smtClean="0"/>
+              <a:t>. </a:t>
+            </a:r>
+            <a:endParaRPr lang="en-US" altLang="ko-KR" sz="1600" dirty="0"/>
+          </a:p>
+          <a:p>
+            <a:r>
+              <a:rPr lang="en-US" altLang="ko-KR" sz="1600" dirty="0"/>
+              <a:t>properties.xml </a:t>
+            </a:r>
+            <a:r>
+              <a:rPr lang="ko-KR" altLang="en-US" sz="1600" dirty="0"/>
+              <a:t>파일 안에 </a:t>
+            </a:r>
+            <a:r>
+              <a:rPr lang="en-US" altLang="ko-KR" sz="1600" dirty="0" err="1"/>
+              <a:t>serverproperty</a:t>
+            </a:r>
+            <a:r>
+              <a:rPr lang="en-US" altLang="ko-KR" sz="1600" dirty="0"/>
+              <a:t> &gt; system(id), </a:t>
+            </a:r>
+            <a:r>
+              <a:rPr lang="en-US" altLang="ko-KR" sz="1600" dirty="0" err="1"/>
+              <a:t>replaypath</a:t>
+            </a:r>
+            <a:r>
+              <a:rPr lang="en-US" altLang="ko-KR" sz="1600" dirty="0"/>
+              <a:t>// </a:t>
+            </a:r>
+            <a:r>
+              <a:rPr lang="en-US" altLang="ko-KR" sz="1600" dirty="0" err="1"/>
+              <a:t>gpkiproperty</a:t>
+            </a:r>
+            <a:r>
+              <a:rPr lang="en-US" altLang="ko-KR" sz="1600" dirty="0"/>
+              <a:t> &gt; </a:t>
+            </a:r>
+            <a:r>
+              <a:rPr lang="en-US" altLang="ko-KR" sz="1600" dirty="0" err="1"/>
+              <a:t>gpkiserverid</a:t>
+            </a:r>
+            <a:r>
+              <a:rPr lang="en-US" altLang="ko-KR" sz="1600" dirty="0"/>
+              <a:t>, </a:t>
+            </a:r>
+            <a:r>
+              <a:rPr lang="en-US" altLang="ko-KR" sz="1600" dirty="0" err="1"/>
+              <a:t>gpkipath</a:t>
+            </a:r>
+            <a:r>
+              <a:rPr lang="en-US" altLang="ko-KR" sz="1600" dirty="0"/>
+              <a:t>, pin</a:t>
+            </a:r>
+            <a:r>
+              <a:rPr lang="ko-KR" altLang="en-US" sz="1600" dirty="0"/>
+              <a:t>를 수정한다</a:t>
+            </a:r>
+            <a:r>
+              <a:rPr lang="en-US" altLang="ko-KR" sz="1600" dirty="0"/>
+              <a:t>.</a:t>
+            </a:r>
+          </a:p>
+          <a:p>
+            <a:r>
+              <a:rPr lang="en-US" altLang="ko-KR" sz="1600" dirty="0"/>
+              <a:t>ex) &lt;SYSTEM TYPE="DOCUMENT" ID</a:t>
+            </a:r>
+            <a:r>
+              <a:rPr lang="en-US" altLang="ko-KR" sz="1600" dirty="0" smtClean="0"/>
+              <a:t>=“DOCB55105301"/&gt;  (DOC + </a:t>
+            </a:r>
+            <a:r>
+              <a:rPr lang="ko-KR" altLang="en-US" sz="1600" dirty="0" err="1" smtClean="0"/>
+              <a:t>기관코드</a:t>
+            </a:r>
+            <a:r>
+              <a:rPr lang="en-US" altLang="ko-KR" sz="1600" dirty="0" smtClean="0"/>
+              <a:t>(7) + </a:t>
+            </a:r>
+            <a:r>
+              <a:rPr lang="ko-KR" altLang="en-US" sz="1600" dirty="0" smtClean="0"/>
+              <a:t>일련번호</a:t>
+            </a:r>
+            <a:r>
+              <a:rPr lang="en-US" altLang="ko-KR" sz="1600" dirty="0" smtClean="0"/>
+              <a:t>(2))</a:t>
+            </a:r>
+            <a:endParaRPr lang="en-US" altLang="ko-KR" sz="1600" dirty="0"/>
+          </a:p>
+          <a:p>
             <a:r>
               <a:rPr lang="en-US" altLang="ko-KR" sz="1600" dirty="0" err="1" smtClean="0"/>
-              <a:t>ezflow</a:t>
+              <a:t>Serverproperty</a:t>
             </a:r>
             <a:r>
               <a:rPr lang="ko-KR" altLang="en-US" sz="1600" dirty="0" smtClean="0"/>
               <a:t>의 </a:t>
             </a:r>
             <a:r>
-              <a:rPr lang="en-US" altLang="ko-KR" sz="1600" dirty="0" err="1" smtClean="0"/>
-              <a:t>config.properties</a:t>
-            </a:r>
-            <a:r>
-              <a:rPr lang="en-US" altLang="ko-KR" sz="1600" dirty="0" smtClean="0"/>
-              <a:t> </a:t>
-            </a:r>
-            <a:r>
-              <a:rPr lang="ko-KR" altLang="en-US" sz="1600" dirty="0" smtClean="0"/>
-              <a:t>에</a:t>
-            </a:r>
+              <a:rPr lang="en-US" altLang="ko-KR" sz="1600" dirty="0" smtClean="0"/>
+              <a:t>id</a:t>
+            </a:r>
+            <a:r>
+              <a:rPr lang="ko-KR" altLang="en-US" sz="1600" dirty="0"/>
+              <a:t>는 </a:t>
+            </a:r>
+            <a:r>
+              <a:rPr lang="en-US" altLang="ko-KR" sz="1600" dirty="0" smtClean="0"/>
+              <a:t>DOC </a:t>
+            </a:r>
+            <a:r>
+              <a:rPr lang="en-US" altLang="ko-KR" sz="1600" dirty="0"/>
+              <a:t>+ </a:t>
+            </a:r>
+            <a:r>
+              <a:rPr lang="ko-KR" altLang="en-US" sz="1600" dirty="0" err="1"/>
+              <a:t>기관코드</a:t>
+            </a:r>
+            <a:r>
+              <a:rPr lang="en-US" altLang="ko-KR" sz="1600" dirty="0"/>
+              <a:t>7</a:t>
+            </a:r>
+            <a:r>
+              <a:rPr lang="ko-KR" altLang="en-US" sz="1600" dirty="0"/>
+              <a:t>자리 </a:t>
+            </a:r>
+            <a:r>
+              <a:rPr lang="en-US" altLang="ko-KR" sz="1600" dirty="0"/>
+              <a:t>+ </a:t>
+            </a:r>
+            <a:r>
+              <a:rPr lang="ko-KR" altLang="en-US" sz="1600" dirty="0"/>
+              <a:t>일련번호 </a:t>
+            </a:r>
+            <a:r>
+              <a:rPr lang="en-US" altLang="ko-KR" sz="1600" dirty="0" smtClean="0"/>
+              <a:t>01</a:t>
+            </a:r>
+            <a:r>
+              <a:rPr lang="en-US" altLang="ko-KR" sz="1600" dirty="0"/>
+              <a:t>~   </a:t>
+            </a:r>
+            <a:r>
+              <a:rPr lang="ko-KR" altLang="en-US" sz="1600" dirty="0"/>
+              <a:t>로 </a:t>
+            </a:r>
+            <a:r>
+              <a:rPr lang="ko-KR" altLang="en-US" sz="1600" dirty="0" smtClean="0"/>
+              <a:t>구성 보통 일련번호는 </a:t>
+            </a:r>
+            <a:r>
+              <a:rPr lang="en-US" altLang="ko-KR" sz="1600" dirty="0" smtClean="0"/>
+              <a:t>01</a:t>
+            </a:r>
+            <a:r>
+              <a:rPr lang="ko-KR" altLang="en-US" sz="1600" dirty="0" smtClean="0"/>
+              <a:t>로 하면 </a:t>
+            </a:r>
+            <a:r>
+              <a:rPr lang="ko-KR" altLang="en-US" sz="1600" dirty="0" err="1" smtClean="0"/>
+              <a:t>거의됨</a:t>
+            </a:r>
+            <a:endParaRPr lang="en-US" altLang="ko-KR" sz="1600" dirty="0"/>
+          </a:p>
+          <a:p>
+            <a:r>
+              <a:rPr lang="en-US" altLang="ko-KR" sz="1600" dirty="0"/>
+              <a:t>&lt;RELAYPATH&gt;/home/</a:t>
+            </a:r>
+            <a:r>
+              <a:rPr lang="en-US" altLang="ko-KR" sz="1600" dirty="0" err="1"/>
+              <a:t>jmocha</a:t>
+            </a:r>
+            <a:r>
+              <a:rPr lang="en-US" altLang="ko-KR" sz="1600" dirty="0"/>
+              <a:t>/relay&lt;/RELAYPATH&gt;</a:t>
+            </a:r>
+          </a:p>
+          <a:p>
+            <a:endParaRPr lang="en-US" altLang="ko-KR" sz="1600" dirty="0"/>
+          </a:p>
+          <a:p>
+            <a:r>
+              <a:rPr lang="en-US" altLang="ko-KR" sz="1600" dirty="0"/>
+              <a:t>&lt;GPKISERVERID&gt;SVRB551053001&lt;/</a:t>
+            </a:r>
+            <a:r>
+              <a:rPr lang="en-US" altLang="ko-KR" sz="1600" dirty="0" smtClean="0"/>
+              <a:t>GPKISERVERID&gt; (GPKI</a:t>
+            </a:r>
+            <a:r>
+              <a:rPr lang="ko-KR" altLang="en-US" sz="1600" dirty="0" smtClean="0"/>
+              <a:t>서버아이디는 </a:t>
+            </a:r>
+            <a:r>
+              <a:rPr lang="en-US" altLang="ko-KR" sz="1600" dirty="0" smtClean="0"/>
+              <a:t>GPKI </a:t>
+            </a:r>
+            <a:r>
+              <a:rPr lang="ko-KR" altLang="en-US" sz="1600" dirty="0" smtClean="0"/>
+              <a:t>인증서의 </a:t>
+            </a:r>
+            <a:r>
+              <a:rPr lang="ko-KR" altLang="en-US" sz="1600" dirty="0" err="1" smtClean="0"/>
+              <a:t>파일이름과</a:t>
+            </a:r>
+            <a:r>
+              <a:rPr lang="ko-KR" altLang="en-US" sz="1600" dirty="0" smtClean="0"/>
+              <a:t> 동일</a:t>
+            </a:r>
+            <a:r>
+              <a:rPr lang="en-US" altLang="ko-KR" sz="1600" dirty="0" smtClean="0"/>
+              <a:t>)</a:t>
+            </a:r>
+            <a:endParaRPr lang="en-US" altLang="ko-KR" sz="1600" dirty="0"/>
+          </a:p>
+          <a:p>
+            <a:r>
+              <a:rPr lang="en-US" altLang="ko-KR" sz="1600" dirty="0"/>
+              <a:t>&lt;GPKIPATH&gt;/home/</a:t>
+            </a:r>
+            <a:r>
+              <a:rPr lang="en-US" altLang="ko-KR" sz="1600" dirty="0" err="1"/>
+              <a:t>jmocha</a:t>
+            </a:r>
+            <a:r>
+              <a:rPr lang="en-US" altLang="ko-KR" sz="1600" dirty="0"/>
+              <a:t>/relay/</a:t>
+            </a:r>
+            <a:r>
+              <a:rPr lang="en-US" altLang="ko-KR" sz="1600" dirty="0" err="1"/>
+              <a:t>gpki</a:t>
+            </a:r>
+            <a:r>
+              <a:rPr lang="en-US" altLang="ko-KR" sz="1600" dirty="0"/>
+              <a:t>/&lt;/GPKIPATH&gt;   (</a:t>
+            </a:r>
+            <a:r>
+              <a:rPr lang="ko-KR" altLang="en-US" sz="1600" dirty="0"/>
+              <a:t>제일 끝에 </a:t>
+            </a:r>
+            <a:r>
+              <a:rPr lang="en-US" altLang="ko-KR" sz="1600" dirty="0"/>
+              <a:t>‘/’ </a:t>
+            </a:r>
+            <a:r>
+              <a:rPr lang="ko-KR" altLang="en-US" sz="1600" dirty="0"/>
+              <a:t>까지 필수</a:t>
+            </a:r>
+            <a:r>
+              <a:rPr lang="en-US" altLang="ko-KR" sz="1600" dirty="0"/>
+              <a:t>)</a:t>
+            </a:r>
+          </a:p>
+          <a:p>
+            <a:r>
+              <a:rPr lang="en-US" altLang="ko-KR" sz="1600" dirty="0"/>
+              <a:t>&lt;PIN&gt;&lt;![CDATA[</a:t>
+            </a:r>
+            <a:r>
+              <a:rPr lang="en-US" altLang="ko-KR" sz="1600" dirty="0" err="1"/>
+              <a:t>passwordexample</a:t>
+            </a:r>
+            <a:r>
+              <a:rPr lang="en-US" altLang="ko-KR" sz="1600" dirty="0"/>
+              <a:t>]]&gt;&lt;/PIN&gt;   (</a:t>
+            </a:r>
+            <a:r>
+              <a:rPr lang="ko-KR" altLang="en-US" sz="1600" dirty="0"/>
+              <a:t>사이트에 적절한 패스워드</a:t>
+            </a:r>
+            <a:r>
+              <a:rPr lang="en-US" altLang="ko-KR" sz="1600" dirty="0"/>
+              <a:t>)</a:t>
+            </a:r>
+          </a:p>
+          <a:p>
             <a:endParaRPr lang="en-US" altLang="ko-KR" sz="1600" dirty="0" smtClean="0"/>
           </a:p>
           <a:p>
+            <a:endParaRPr lang="en-US" altLang="ko-KR" sz="1600" dirty="0" smtClean="0"/>
+          </a:p>
+          <a:p>
+            <a:r>
+              <a:rPr lang="ko-KR" altLang="en-US" sz="1600" dirty="0" err="1" smtClean="0"/>
+              <a:t>다음화면</a:t>
+            </a:r>
+            <a:r>
+              <a:rPr lang="ko-KR" altLang="en-US" sz="1600" dirty="0" smtClean="0"/>
+              <a:t> 참고</a:t>
+            </a:r>
+            <a:r>
+              <a:rPr lang="en-US" altLang="ko-KR" sz="1600" dirty="0" smtClean="0"/>
+              <a:t>……………………….</a:t>
+            </a:r>
+            <a:endParaRPr lang="en-US" altLang="ko-KR" sz="1600" dirty="0" smtClean="0"/>
+          </a:p>
+          <a:p>
             <a:pPr marL="800100" lvl="1" indent="-342900">
               <a:buAutoNum type="arabicPeriod"/>
             </a:pPr>
-            <a:r>
-              <a:rPr lang="en-US" altLang="ko-KR" sz="1600" dirty="0" err="1" smtClean="0"/>
-              <a:t>relay_root</a:t>
-            </a:r>
-            <a:r>
-              <a:rPr lang="en-US" altLang="ko-KR" sz="1600" dirty="0" smtClean="0"/>
-              <a:t> = /home/</a:t>
-            </a:r>
-            <a:r>
-              <a:rPr lang="en-US" altLang="ko-KR" sz="1600" dirty="0" err="1" smtClean="0"/>
-              <a:t>jmocha</a:t>
-            </a:r>
-            <a:r>
-              <a:rPr lang="en-US" altLang="ko-KR" sz="1600" dirty="0" smtClean="0"/>
-              <a:t>/</a:t>
-            </a:r>
-            <a:r>
-              <a:rPr lang="en-US" altLang="ko-KR" sz="1600" dirty="0" err="1" smtClean="0"/>
-              <a:t>ezEKP</a:t>
-            </a:r>
-            <a:r>
-              <a:rPr lang="en-US" altLang="ko-KR" sz="1600" dirty="0" smtClean="0"/>
-              <a:t>/</a:t>
-            </a:r>
-            <a:r>
-              <a:rPr lang="en-US" altLang="ko-KR" sz="1600" dirty="0" err="1" smtClean="0"/>
-              <a:t>ezFlow</a:t>
-            </a:r>
-            <a:r>
-              <a:rPr lang="en-US" altLang="ko-KR" sz="1600" dirty="0" smtClean="0"/>
-              <a:t>/</a:t>
-            </a:r>
-            <a:r>
-              <a:rPr lang="en-US" altLang="ko-KR" sz="1600" dirty="0" err="1" smtClean="0"/>
-              <a:t>webapps</a:t>
-            </a:r>
-            <a:r>
-              <a:rPr lang="en-US" altLang="ko-KR" sz="1600" dirty="0" smtClean="0"/>
-              <a:t>/ROOT</a:t>
-            </a:r>
-          </a:p>
-          <a:p>
-            <a:pPr marL="800100" lvl="1" indent="-342900">
-              <a:buAutoNum type="arabicPeriod"/>
-            </a:pPr>
-            <a:r>
-              <a:rPr lang="en-US" altLang="ko-KR" sz="1600" dirty="0" err="1" smtClean="0"/>
-              <a:t>upload_relay.ROOT</a:t>
-            </a:r>
-            <a:r>
-              <a:rPr lang="en-US" altLang="ko-KR" sz="1600" dirty="0" smtClean="0"/>
-              <a:t> = /relay</a:t>
-            </a:r>
-          </a:p>
-          <a:p>
-            <a:pPr marL="800100" lvl="1" indent="-342900">
-              <a:buAutoNum type="arabicPeriod"/>
-            </a:pPr>
-            <a:r>
-              <a:rPr lang="en-US" altLang="ko-KR" sz="1600" dirty="0" err="1" smtClean="0"/>
-              <a:t>upload_relay.R_DocPath</a:t>
-            </a:r>
-            <a:r>
-              <a:rPr lang="en-US" altLang="ko-KR" sz="1600" dirty="0" smtClean="0"/>
-              <a:t> = /files/</a:t>
-            </a:r>
-            <a:r>
-              <a:rPr lang="en-US" altLang="ko-KR" sz="1600" dirty="0" err="1" smtClean="0"/>
-              <a:t>upload_approval</a:t>
-            </a:r>
-            <a:r>
-              <a:rPr lang="en-US" altLang="ko-KR" sz="1600" dirty="0" smtClean="0"/>
-              <a:t> </a:t>
-            </a:r>
-            <a:r>
-              <a:rPr lang="ko-KR" altLang="en-US" sz="1600" dirty="0" smtClean="0"/>
-              <a:t>로 설정</a:t>
-            </a:r>
-            <a:r>
-              <a:rPr lang="en-US" altLang="ko-KR" sz="1600" dirty="0" smtClean="0"/>
-              <a:t>.</a:t>
-            </a:r>
-          </a:p>
-          <a:p>
-            <a:pPr marL="342900" indent="-342900">
-              <a:buAutoNum type="arabicPeriod"/>
-            </a:pPr>
-            <a:r>
-              <a:rPr lang="en-US" altLang="ko-KR" sz="1600" dirty="0" err="1" smtClean="0"/>
-              <a:t>ezflow</a:t>
-            </a:r>
-            <a:r>
-              <a:rPr lang="ko-KR" altLang="en-US" sz="1600" dirty="0" smtClean="0"/>
-              <a:t>가 설치된 서버에서</a:t>
-            </a:r>
             <a:endParaRPr lang="en-US" altLang="ko-KR" sz="1600" dirty="0"/>
-          </a:p>
-          <a:p>
-            <a:pPr marL="800100" lvl="1" indent="-342900">
-              <a:buAutoNum type="arabicPeriod"/>
-            </a:pPr>
-            <a:r>
-              <a:rPr lang="en-US" altLang="ko-KR" sz="1600" dirty="0" smtClean="0"/>
-              <a:t>/home/</a:t>
-            </a:r>
-            <a:r>
-              <a:rPr lang="en-US" altLang="ko-KR" sz="1600" dirty="0" err="1" smtClean="0"/>
-              <a:t>jmocha</a:t>
-            </a:r>
-            <a:r>
-              <a:rPr lang="en-US" altLang="ko-KR" sz="1600" dirty="0" smtClean="0"/>
-              <a:t>/</a:t>
-            </a:r>
-            <a:r>
-              <a:rPr lang="en-US" altLang="ko-KR" sz="1600" dirty="0" err="1" smtClean="0"/>
-              <a:t>ezEKP</a:t>
-            </a:r>
-            <a:r>
-              <a:rPr lang="en-US" altLang="ko-KR" sz="1600" dirty="0" smtClean="0"/>
-              <a:t>/</a:t>
-            </a:r>
-            <a:r>
-              <a:rPr lang="en-US" altLang="ko-KR" sz="1600" dirty="0" err="1" smtClean="0"/>
-              <a:t>ezFlow</a:t>
-            </a:r>
-            <a:r>
-              <a:rPr lang="en-US" altLang="ko-KR" sz="1600" dirty="0" smtClean="0"/>
-              <a:t>/</a:t>
-            </a:r>
-            <a:r>
-              <a:rPr lang="en-US" altLang="ko-KR" sz="1600" dirty="0" err="1" smtClean="0"/>
-              <a:t>webapps</a:t>
-            </a:r>
-            <a:r>
-              <a:rPr lang="en-US" altLang="ko-KR" sz="1600" dirty="0" smtClean="0"/>
-              <a:t>/ROOT/</a:t>
-            </a:r>
-            <a:r>
-              <a:rPr lang="en-US" altLang="ko-KR" sz="1600" dirty="0" err="1" smtClean="0"/>
-              <a:t>fileroot</a:t>
-            </a:r>
-            <a:r>
-              <a:rPr lang="en-US" altLang="ko-KR" sz="1600" dirty="0" smtClean="0"/>
-              <a:t>/0/files</a:t>
-            </a:r>
-            <a:r>
-              <a:rPr lang="ko-KR" altLang="en-US" sz="1600" dirty="0" smtClean="0"/>
-              <a:t>에 </a:t>
-            </a:r>
-            <a:r>
-              <a:rPr lang="en-US" altLang="ko-KR" sz="1600" dirty="0" smtClean="0"/>
-              <a:t>/home/</a:t>
-            </a:r>
-            <a:r>
-              <a:rPr lang="en-US" altLang="ko-KR" sz="1600" dirty="0" err="1" smtClean="0"/>
-              <a:t>jmocha</a:t>
-            </a:r>
-            <a:r>
-              <a:rPr lang="en-US" altLang="ko-KR" sz="1600" dirty="0" smtClean="0"/>
-              <a:t>/relay</a:t>
-            </a:r>
-            <a:r>
-              <a:rPr lang="ko-KR" altLang="en-US" sz="1600" dirty="0" smtClean="0"/>
-              <a:t>를 </a:t>
-            </a:r>
-            <a:r>
-              <a:rPr lang="ko-KR" altLang="en-US" sz="1600" dirty="0" err="1" smtClean="0"/>
-              <a:t>심볼릭</a:t>
-            </a:r>
-            <a:r>
-              <a:rPr lang="ko-KR" altLang="en-US" sz="1600" dirty="0" smtClean="0"/>
-              <a:t> 링크 생성</a:t>
-            </a:r>
-            <a:r>
-              <a:rPr lang="en-US" altLang="ko-KR" sz="1600" dirty="0" smtClean="0"/>
-              <a:t>. (</a:t>
-            </a:r>
-            <a:r>
-              <a:rPr lang="ko-KR" altLang="en-US" sz="1600" dirty="0" err="1" smtClean="0"/>
-              <a:t>유통서버와</a:t>
-            </a:r>
-            <a:r>
-              <a:rPr lang="ko-KR" altLang="en-US" sz="1600" dirty="0" smtClean="0"/>
-              <a:t> </a:t>
-            </a:r>
-            <a:r>
-              <a:rPr lang="en-US" altLang="ko-KR" sz="1600" dirty="0" err="1" smtClean="0"/>
-              <a:t>ezFlow</a:t>
-            </a:r>
-            <a:r>
-              <a:rPr lang="ko-KR" altLang="en-US" sz="1600" dirty="0" smtClean="0"/>
-              <a:t>서버가 분리되어 있을 경우</a:t>
-            </a:r>
-            <a:r>
-              <a:rPr lang="en-US" altLang="ko-KR" sz="1600" dirty="0" smtClean="0"/>
-              <a:t>, </a:t>
-            </a:r>
-            <a:r>
-              <a:rPr lang="ko-KR" altLang="en-US" sz="1600" dirty="0" err="1" smtClean="0"/>
-              <a:t>마운트한</a:t>
-            </a:r>
-            <a:r>
-              <a:rPr lang="ko-KR" altLang="en-US" sz="1600" dirty="0" smtClean="0"/>
-              <a:t> </a:t>
-            </a:r>
-            <a:r>
-              <a:rPr lang="en-US" altLang="ko-KR" sz="1600" dirty="0" smtClean="0"/>
-              <a:t>relay</a:t>
-            </a:r>
-            <a:r>
-              <a:rPr lang="ko-KR" altLang="en-US" sz="1600" dirty="0" smtClean="0"/>
-              <a:t>에는 </a:t>
-            </a:r>
-            <a:r>
-              <a:rPr lang="en-US" altLang="ko-KR" sz="1600" dirty="0" smtClean="0"/>
-              <a:t>data</a:t>
-            </a:r>
-            <a:r>
-              <a:rPr lang="ko-KR" altLang="en-US" sz="1600" dirty="0" smtClean="0"/>
-              <a:t>와 </a:t>
-            </a:r>
-            <a:r>
-              <a:rPr lang="en-US" altLang="ko-KR" sz="1600" dirty="0" err="1" smtClean="0"/>
-              <a:t>dtd</a:t>
-            </a:r>
-            <a:r>
-              <a:rPr lang="en-US" altLang="ko-KR" sz="1600" dirty="0" smtClean="0"/>
-              <a:t> </a:t>
-            </a:r>
-            <a:r>
-              <a:rPr lang="ko-KR" altLang="en-US" sz="1600" dirty="0" smtClean="0"/>
-              <a:t>폴더가 있어야함</a:t>
-            </a:r>
-            <a:r>
-              <a:rPr lang="en-US" altLang="ko-KR" sz="1600" dirty="0" smtClean="0"/>
-              <a:t>. data</a:t>
-            </a:r>
-            <a:r>
-              <a:rPr lang="ko-KR" altLang="en-US" sz="1600" dirty="0" smtClean="0"/>
-              <a:t>만 </a:t>
-            </a:r>
-            <a:r>
-              <a:rPr lang="ko-KR" altLang="en-US" sz="1600" dirty="0" err="1" smtClean="0"/>
-              <a:t>마운트하고</a:t>
-            </a:r>
-            <a:r>
-              <a:rPr lang="ko-KR" altLang="en-US" sz="1600" dirty="0" smtClean="0"/>
-              <a:t> </a:t>
-            </a:r>
-            <a:r>
-              <a:rPr lang="en-US" altLang="ko-KR" sz="1600" dirty="0" err="1" smtClean="0"/>
-              <a:t>dtd</a:t>
-            </a:r>
-            <a:r>
-              <a:rPr lang="ko-KR" altLang="en-US" sz="1600" dirty="0" smtClean="0"/>
-              <a:t>는 별도로 복사해줘도 동작함</a:t>
-            </a:r>
-            <a:r>
-              <a:rPr lang="en-US" altLang="ko-KR" sz="1600" dirty="0" smtClean="0"/>
-              <a:t>.)</a:t>
-            </a:r>
-          </a:p>
-          <a:p>
-            <a:pPr marL="800100" lvl="1" indent="-342900">
-              <a:buAutoNum type="arabicPeriod"/>
-            </a:pPr>
-            <a:r>
-              <a:rPr lang="en-US" altLang="ko-KR" sz="1600" dirty="0" smtClean="0"/>
-              <a:t>/home/</a:t>
-            </a:r>
-            <a:r>
-              <a:rPr lang="en-US" altLang="ko-KR" sz="1600" dirty="0" err="1" smtClean="0"/>
-              <a:t>jmocha</a:t>
-            </a:r>
-            <a:r>
-              <a:rPr lang="en-US" altLang="ko-KR" sz="1600" dirty="0" smtClean="0"/>
-              <a:t>/</a:t>
-            </a:r>
-            <a:r>
-              <a:rPr lang="en-US" altLang="ko-KR" sz="1600" dirty="0" err="1" smtClean="0"/>
-              <a:t>ezEKP</a:t>
-            </a:r>
-            <a:r>
-              <a:rPr lang="en-US" altLang="ko-KR" sz="1600" dirty="0" smtClean="0"/>
-              <a:t>/</a:t>
-            </a:r>
-            <a:r>
-              <a:rPr lang="en-US" altLang="ko-KR" sz="1600" dirty="0" err="1" smtClean="0"/>
-              <a:t>ezFlow</a:t>
-            </a:r>
-            <a:r>
-              <a:rPr lang="en-US" altLang="ko-KR" sz="1600" dirty="0" smtClean="0"/>
-              <a:t>/</a:t>
-            </a:r>
-            <a:r>
-              <a:rPr lang="en-US" altLang="ko-KR" sz="1600" dirty="0" err="1" smtClean="0"/>
-              <a:t>webapps</a:t>
-            </a:r>
-            <a:r>
-              <a:rPr lang="en-US" altLang="ko-KR" sz="1600" dirty="0" smtClean="0"/>
-              <a:t>/ROOT/</a:t>
-            </a:r>
-            <a:r>
-              <a:rPr lang="en-US" altLang="ko-KR" sz="1600" dirty="0" err="1" smtClean="0"/>
-              <a:t>fileroot</a:t>
-            </a:r>
-            <a:r>
-              <a:rPr lang="en-US" altLang="ko-KR" sz="1600" dirty="0" smtClean="0"/>
-              <a:t>/0/files/</a:t>
-            </a:r>
-            <a:r>
-              <a:rPr lang="en-US" altLang="ko-KR" sz="1600" dirty="0" err="1" smtClean="0"/>
-              <a:t>upload_approval</a:t>
-            </a:r>
-            <a:r>
-              <a:rPr lang="en-US" altLang="ko-KR" sz="1600" dirty="0" smtClean="0"/>
-              <a:t>/ </a:t>
-            </a:r>
-            <a:r>
-              <a:rPr lang="ko-KR" altLang="en-US" sz="1600" dirty="0" smtClean="0"/>
-              <a:t>에 </a:t>
-            </a:r>
-            <a:r>
-              <a:rPr lang="en-US" altLang="ko-KR" sz="1600" dirty="0" err="1" smtClean="0"/>
-              <a:t>exPack</a:t>
-            </a:r>
-            <a:r>
-              <a:rPr lang="en-US" altLang="ko-KR" sz="1600" dirty="0" smtClean="0"/>
-              <a:t> </a:t>
-            </a:r>
-            <a:r>
-              <a:rPr lang="ko-KR" altLang="en-US" sz="1600" dirty="0" smtClean="0"/>
-              <a:t>관련 폴더들을 </a:t>
-            </a:r>
-            <a:r>
-              <a:rPr lang="ko-KR" altLang="en-US" sz="1600" dirty="0" err="1" smtClean="0"/>
-              <a:t>위치시켜야함</a:t>
-            </a:r>
-            <a:r>
-              <a:rPr lang="en-US" altLang="ko-KR" sz="1600" dirty="0" smtClean="0"/>
-              <a:t>.</a:t>
-            </a:r>
-          </a:p>
-          <a:p>
-            <a:pPr marL="800100" lvl="1" indent="-342900">
-              <a:buAutoNum type="arabicPeriod"/>
-            </a:pPr>
-            <a:r>
-              <a:rPr lang="ko-KR" altLang="en-US" sz="1600" dirty="0" smtClean="0"/>
-              <a:t>한글기안기로 발송할 경우</a:t>
-            </a:r>
-            <a:r>
-              <a:rPr lang="en-US" altLang="ko-KR" sz="1600" dirty="0" smtClean="0"/>
-              <a:t>, ROOT/files/</a:t>
-            </a:r>
-            <a:r>
-              <a:rPr lang="en-US" altLang="ko-KR" sz="1600" dirty="0" err="1" smtClean="0"/>
-              <a:t>upload_approvalgG</a:t>
-            </a:r>
-            <a:r>
-              <a:rPr lang="en-US" altLang="ko-KR" sz="1600" dirty="0" smtClean="0"/>
-              <a:t>/ </a:t>
-            </a:r>
-            <a:r>
-              <a:rPr lang="ko-KR" altLang="en-US" sz="1600" dirty="0" smtClean="0"/>
-              <a:t>에 </a:t>
-            </a:r>
-            <a:r>
-              <a:rPr lang="ko-KR" altLang="en-US" sz="1600" dirty="0" err="1" smtClean="0"/>
-              <a:t>로고파일과</a:t>
-            </a:r>
-            <a:r>
-              <a:rPr lang="ko-KR" altLang="en-US" sz="1600" dirty="0" smtClean="0"/>
-              <a:t> </a:t>
-            </a:r>
-            <a:r>
-              <a:rPr lang="ko-KR" altLang="en-US" sz="1600" dirty="0" err="1" smtClean="0"/>
-              <a:t>심볼파일을</a:t>
-            </a:r>
-            <a:r>
-              <a:rPr lang="ko-KR" altLang="en-US" sz="1600" dirty="0" smtClean="0"/>
-              <a:t> 위치시켜주고</a:t>
-            </a:r>
-            <a:r>
-              <a:rPr lang="en-US" altLang="ko-KR" sz="1600" dirty="0" smtClean="0"/>
-              <a:t>, ezSimsaG_HWP.js </a:t>
-            </a:r>
-            <a:r>
-              <a:rPr lang="ko-KR" altLang="en-US" sz="1600" dirty="0" smtClean="0"/>
-              <a:t>에서 </a:t>
-            </a:r>
-            <a:r>
-              <a:rPr lang="en-US" altLang="ko-KR" sz="1600" dirty="0" err="1" smtClean="0"/>
-              <a:t>makeXML</a:t>
-            </a:r>
-            <a:r>
-              <a:rPr lang="en-US" altLang="ko-KR" sz="1600" dirty="0" smtClean="0"/>
-              <a:t> </a:t>
-            </a:r>
-            <a:r>
-              <a:rPr lang="ko-KR" altLang="en-US" sz="1600" dirty="0" err="1" smtClean="0"/>
-              <a:t>함수내용</a:t>
-            </a:r>
-            <a:r>
-              <a:rPr lang="ko-KR" altLang="en-US" sz="1600" dirty="0" smtClean="0"/>
-              <a:t> 중 </a:t>
-            </a:r>
-            <a:r>
-              <a:rPr lang="en-US" altLang="ko-KR" sz="1600" dirty="0" smtClean="0"/>
-              <a:t>logo, </a:t>
-            </a:r>
-            <a:r>
-              <a:rPr lang="en-US" altLang="ko-KR" sz="1600" dirty="0" err="1" smtClean="0"/>
-              <a:t>simbol</a:t>
-            </a:r>
-            <a:r>
-              <a:rPr lang="ko-KR" altLang="en-US" sz="1600" dirty="0"/>
-              <a:t> </a:t>
-            </a:r>
-            <a:r>
-              <a:rPr lang="ko-KR" altLang="en-US" sz="1600" dirty="0" smtClean="0"/>
-              <a:t>처리 부분에서 </a:t>
-            </a:r>
-            <a:r>
-              <a:rPr lang="en-US" altLang="ko-KR" sz="1600" dirty="0" err="1" smtClean="0"/>
-              <a:t>setDocumentElement</a:t>
-            </a:r>
-            <a:r>
-              <a:rPr lang="ko-KR" altLang="en-US" sz="1600" dirty="0" smtClean="0"/>
-              <a:t>의 파일명을 실제 로고</a:t>
-            </a:r>
-            <a:r>
-              <a:rPr lang="en-US" altLang="ko-KR" sz="1600" dirty="0" smtClean="0"/>
-              <a:t>, </a:t>
-            </a:r>
-            <a:r>
-              <a:rPr lang="ko-KR" altLang="en-US" sz="1600" dirty="0" smtClean="0"/>
-              <a:t>심볼 파일과 맞춰준다</a:t>
-            </a:r>
-            <a:r>
-              <a:rPr lang="en-US" altLang="ko-KR" sz="1600" dirty="0" smtClean="0"/>
-              <a:t>.</a:t>
-            </a:r>
-          </a:p>
-          <a:p>
-            <a:pPr marL="800100" lvl="1" indent="-342900">
-              <a:buAutoNum type="arabicPeriod"/>
-            </a:pPr>
-            <a:endParaRPr lang="en-US" altLang="ko-KR" sz="1600" dirty="0"/>
-          </a:p>
-          <a:p>
-            <a:pPr marL="342900" indent="-342900">
-              <a:buAutoNum type="arabicPeriod"/>
-            </a:pPr>
-            <a:r>
-              <a:rPr lang="en-US" altLang="ko-KR" sz="1600" dirty="0" smtClean="0"/>
-              <a:t>relay/</a:t>
-            </a:r>
-            <a:r>
-              <a:rPr lang="en-US" altLang="ko-KR" sz="1600" dirty="0" err="1" smtClean="0"/>
-              <a:t>dtd</a:t>
-            </a:r>
-            <a:r>
-              <a:rPr lang="en-US" altLang="ko-KR" sz="1600" dirty="0" smtClean="0"/>
-              <a:t>/</a:t>
-            </a:r>
-            <a:r>
-              <a:rPr lang="ko-KR" altLang="en-US" sz="1600" dirty="0" smtClean="0"/>
-              <a:t>에 </a:t>
-            </a:r>
-            <a:r>
-              <a:rPr lang="en-US" altLang="ko-KR" sz="1600" dirty="0" smtClean="0"/>
-              <a:t>sample.xml</a:t>
-            </a:r>
-            <a:r>
-              <a:rPr lang="ko-KR" altLang="en-US" sz="1600" dirty="0" smtClean="0"/>
-              <a:t>을 백업하고 빈 껍데기 </a:t>
-            </a:r>
-            <a:r>
-              <a:rPr lang="en-US" altLang="ko-KR" sz="1600" dirty="0" smtClean="0"/>
-              <a:t>sample.xml</a:t>
-            </a:r>
-            <a:r>
-              <a:rPr lang="ko-KR" altLang="en-US" sz="1600" dirty="0" smtClean="0"/>
-              <a:t>로 교체</a:t>
-            </a:r>
-            <a:r>
-              <a:rPr lang="en-US" altLang="ko-KR" sz="1600" dirty="0"/>
-              <a:t>. </a:t>
-            </a:r>
-            <a:r>
-              <a:rPr lang="en-US" altLang="ko-KR" sz="1600" dirty="0" smtClean="0"/>
-              <a:t>send-</a:t>
-            </a:r>
-            <a:r>
-              <a:rPr lang="en-US" altLang="ko-KR" sz="1600" dirty="0" err="1" smtClean="0"/>
-              <a:t>orgcode</a:t>
-            </a:r>
-            <a:r>
-              <a:rPr lang="ko-KR" altLang="en-US" sz="1600" dirty="0" smtClean="0"/>
-              <a:t>가 없으면 </a:t>
-            </a:r>
-            <a:r>
-              <a:rPr lang="ko-KR" altLang="en-US" sz="1600" dirty="0" err="1" smtClean="0"/>
-              <a:t>에러남</a:t>
-            </a:r>
-            <a:r>
-              <a:rPr lang="en-US" altLang="ko-KR" sz="1600" dirty="0" smtClean="0"/>
-              <a:t>.</a:t>
-            </a:r>
-          </a:p>
-          <a:p>
-            <a:pPr marL="800100" lvl="1" indent="-342900">
-              <a:buAutoNum type="arabicPeriod"/>
-            </a:pPr>
-            <a:endParaRPr lang="en-US" altLang="ko-KR" dirty="0"/>
           </a:p>
         </p:txBody>
       </p:sp>
+      <p:pic>
+        <p:nvPicPr>
+          <p:cNvPr id="2" name="그림 1"/>
+          <p:cNvPicPr>
+            <a:picLocks noChangeAspect="1"/>
+          </p:cNvPicPr>
+          <p:nvPr/>
+        </p:nvPicPr>
+        <p:blipFill>
+          <a:blip r:embed="rId2"/>
+          <a:stretch>
+            <a:fillRect/>
+          </a:stretch>
+        </p:blipFill>
+        <p:spPr>
+          <a:xfrm>
+            <a:off x="8931275" y="5636181"/>
+            <a:ext cx="4476750" cy="1047750"/>
+          </a:xfrm>
+          <a:prstGeom prst="rect">
+            <a:avLst/>
+          </a:prstGeom>
+        </p:spPr>
+      </p:pic>
     </p:spTree>
     <p:extLst>
       <p:ext uri="{BB962C8B-B14F-4D97-AF65-F5344CB8AC3E}">
-        <p14:creationId xmlns:p14="http://schemas.microsoft.com/office/powerpoint/2010/main" val="1246638275"/>
+        <p14:creationId xmlns:p14="http://schemas.microsoft.com/office/powerpoint/2010/main" val="1017378112"/>
       </p:ext>
     </p:extLst>
   </p:cSld>
@@ -5785,8 +7396,8 @@
         </p:nvSpPr>
         <p:spPr>
           <a:xfrm>
-            <a:off x="880110" y="640080"/>
-            <a:ext cx="10469880" cy="2246769"/>
+            <a:off x="948690" y="651510"/>
+            <a:ext cx="10469880" cy="1107996"/>
           </a:xfrm>
           <a:prstGeom prst="rect">
             <a:avLst/>
@@ -5800,245 +7411,80 @@
           <a:lstStyle/>
           <a:p>
             <a:r>
-              <a:rPr lang="en-US" altLang="ko-KR" sz="3200" dirty="0" err="1" smtClean="0"/>
-              <a:t>tenant_config</a:t>
-            </a:r>
-            <a:r>
-              <a:rPr lang="en-US" altLang="ko-KR" sz="3200" dirty="0" smtClean="0"/>
-              <a:t> </a:t>
-            </a:r>
-            <a:r>
-              <a:rPr lang="ko-KR" altLang="en-US" sz="3200" dirty="0" smtClean="0"/>
-              <a:t>설정</a:t>
-            </a:r>
-            <a:r>
-              <a:rPr lang="en-US" altLang="ko-KR" sz="3200" dirty="0" smtClean="0"/>
-              <a:t>.</a:t>
-            </a:r>
+              <a:rPr lang="ko-KR" altLang="en-US" b="1" dirty="0" smtClean="0"/>
+              <a:t>유통서버에서</a:t>
+            </a:r>
+            <a:endParaRPr lang="en-US" altLang="ko-KR" b="1" dirty="0" smtClean="0"/>
+          </a:p>
+          <a:p>
+            <a:endParaRPr lang="en-US" altLang="ko-KR" sz="1600" dirty="0"/>
+          </a:p>
+          <a:p>
+            <a:pPr marL="342900" indent="-342900">
+              <a:buAutoNum type="arabicPeriod"/>
+            </a:pPr>
+            <a:endParaRPr lang="en-US" altLang="ko-KR" sz="1600" dirty="0" smtClean="0"/>
           </a:p>
           <a:p>
             <a:pPr marL="800100" lvl="1" indent="-342900">
               <a:buAutoNum type="arabicPeriod"/>
             </a:pPr>
-            <a:r>
-              <a:rPr lang="en-US" altLang="ko-KR" dirty="0" err="1" smtClean="0"/>
-              <a:t>tbl_codelist</a:t>
-            </a:r>
-            <a:r>
-              <a:rPr lang="ko-KR" altLang="en-US" dirty="0" smtClean="0"/>
-              <a:t>에서 </a:t>
-            </a:r>
-            <a:r>
-              <a:rPr lang="ko-KR" altLang="en-US" dirty="0" err="1" smtClean="0"/>
-              <a:t>유통양식</a:t>
-            </a:r>
-            <a:r>
-              <a:rPr lang="ko-KR" altLang="en-US" dirty="0" smtClean="0"/>
-              <a:t> 경로</a:t>
-            </a:r>
-            <a:r>
-              <a:rPr lang="en-US" altLang="ko-KR" dirty="0" smtClean="0"/>
-              <a:t>(A36, 003)</a:t>
-            </a:r>
-            <a:r>
-              <a:rPr lang="ko-KR" altLang="en-US" dirty="0" smtClean="0"/>
-              <a:t>를 </a:t>
-            </a:r>
-            <a:r>
-              <a:rPr lang="ko-KR" altLang="en-US" dirty="0" err="1" smtClean="0"/>
-              <a:t>웹기안기</a:t>
-            </a:r>
-            <a:r>
-              <a:rPr lang="en-US" altLang="ko-KR" dirty="0" smtClean="0"/>
-              <a:t>/</a:t>
-            </a:r>
-            <a:r>
-              <a:rPr lang="ko-KR" altLang="en-US" dirty="0" smtClean="0"/>
-              <a:t>한글기안기에 맞게 양식 경로 설정</a:t>
-            </a:r>
-            <a:r>
-              <a:rPr lang="en-US" altLang="ko-KR" dirty="0" smtClean="0"/>
-              <a:t>.</a:t>
-            </a:r>
-            <a:endParaRPr lang="en-US" altLang="ko-KR" dirty="0"/>
-          </a:p>
-          <a:p>
-            <a:pPr lvl="1"/>
-            <a:r>
-              <a:rPr lang="en-US" altLang="ko-KR" dirty="0" smtClean="0"/>
-              <a:t>ex) </a:t>
-            </a:r>
-            <a:r>
-              <a:rPr lang="en-US" altLang="ko-KR" dirty="0" err="1" smtClean="0"/>
-              <a:t>hwp</a:t>
-            </a:r>
-            <a:r>
-              <a:rPr lang="en-US" altLang="ko-KR" dirty="0" smtClean="0"/>
-              <a:t> = /files/</a:t>
-            </a:r>
-            <a:r>
-              <a:rPr lang="en-US" altLang="ko-KR" dirty="0" err="1" smtClean="0"/>
-              <a:t>upload_approvalG</a:t>
-            </a:r>
-            <a:r>
-              <a:rPr lang="en-US" altLang="ko-KR" dirty="0" smtClean="0"/>
-              <a:t>/form/relay001.hwp</a:t>
-            </a:r>
-          </a:p>
-          <a:p>
-            <a:pPr lvl="1"/>
-            <a:r>
-              <a:rPr lang="en-US" altLang="ko-KR" dirty="0" smtClean="0"/>
-              <a:t>     </a:t>
-            </a:r>
-            <a:r>
-              <a:rPr lang="en-US" altLang="ko-KR" dirty="0" err="1" smtClean="0"/>
-              <a:t>mht</a:t>
-            </a:r>
-            <a:r>
-              <a:rPr lang="en-US" altLang="ko-KR" dirty="0" smtClean="0"/>
-              <a:t> = /files/</a:t>
-            </a:r>
-            <a:r>
-              <a:rPr lang="en-US" altLang="ko-KR" dirty="0" err="1" smtClean="0"/>
-              <a:t>upload_approvalG</a:t>
-            </a:r>
-            <a:r>
-              <a:rPr lang="en-US" altLang="ko-KR" dirty="0" smtClean="0"/>
-              <a:t>/form/2016000001.mht</a:t>
-            </a:r>
-          </a:p>
-          <a:p>
-            <a:pPr lvl="1"/>
-            <a:endParaRPr lang="en-US" altLang="ko-KR" dirty="0" smtClean="0"/>
-          </a:p>
-          <a:p>
-            <a:pPr marL="800100" lvl="1" indent="-342900">
-              <a:buAutoNum type="arabicPeriod" startAt="2"/>
-            </a:pPr>
-            <a:r>
-              <a:rPr lang="en-US" altLang="ko-KR" dirty="0" err="1" smtClean="0"/>
-              <a:t>UserInfo_RelayG_Type</a:t>
-            </a:r>
-            <a:r>
-              <a:rPr lang="en-US" altLang="ko-KR" dirty="0" smtClean="0"/>
-              <a:t> </a:t>
-            </a:r>
-            <a:r>
-              <a:rPr lang="en-US" altLang="ko-KR" dirty="0"/>
-              <a:t>= </a:t>
-            </a:r>
-            <a:r>
-              <a:rPr lang="en-US" altLang="ko-KR" dirty="0" smtClean="0"/>
-              <a:t>HWP</a:t>
-            </a:r>
-          </a:p>
-          <a:p>
-            <a:pPr marL="800100" lvl="1" indent="-342900">
-              <a:buAutoNum type="arabicPeriod" startAt="2"/>
-            </a:pPr>
-            <a:r>
-              <a:rPr lang="en-US" altLang="ko-KR" dirty="0" err="1" smtClean="0"/>
-              <a:t>config.Run_RelayScheduler</a:t>
-            </a:r>
-            <a:r>
-              <a:rPr lang="en-US" altLang="ko-KR" dirty="0" smtClean="0"/>
-              <a:t> = YES</a:t>
-            </a:r>
+            <a:endParaRPr lang="en-US" altLang="ko-KR" sz="1600" dirty="0"/>
           </a:p>
         </p:txBody>
       </p:sp>
-      <p:sp>
-        <p:nvSpPr>
-          <p:cNvPr id="4" name="TextBox 3"/>
-          <p:cNvSpPr txBox="1"/>
+      <p:pic>
+        <p:nvPicPr>
+          <p:cNvPr id="2" name="그림 1"/>
+          <p:cNvPicPr>
+            <a:picLocks noChangeAspect="1"/>
+          </p:cNvPicPr>
           <p:nvPr/>
-        </p:nvSpPr>
+        </p:nvPicPr>
+        <p:blipFill>
+          <a:blip r:embed="rId2"/>
+          <a:stretch>
+            <a:fillRect/>
+          </a:stretch>
+        </p:blipFill>
         <p:spPr>
           <a:xfrm>
-            <a:off x="880110" y="3318510"/>
-            <a:ext cx="10469880" cy="861774"/>
+            <a:off x="8931275" y="5636181"/>
+            <a:ext cx="4476750" cy="1047750"/>
           </a:xfrm>
           <a:prstGeom prst="rect">
             <a:avLst/>
           </a:prstGeom>
-          <a:noFill/>
         </p:spPr>
-        <p:txBody>
-          <a:bodyPr wrap="square" rtlCol="0">
-            <a:spAutoFit/>
-          </a:bodyPr>
-          <a:lstStyle/>
-          <a:p>
-            <a:r>
-              <a:rPr lang="ko-KR" altLang="en-US" sz="3200" dirty="0" smtClean="0"/>
-              <a:t>그룹웨어</a:t>
-            </a:r>
-            <a:r>
-              <a:rPr lang="en-US" altLang="ko-KR" sz="3200" dirty="0" smtClean="0"/>
-              <a:t> </a:t>
-            </a:r>
-            <a:r>
-              <a:rPr lang="ko-KR" altLang="en-US" sz="3200" dirty="0" smtClean="0"/>
-              <a:t>설정</a:t>
-            </a:r>
-            <a:r>
-              <a:rPr lang="en-US" altLang="ko-KR" sz="3200" dirty="0" smtClean="0"/>
-              <a:t>.</a:t>
-            </a:r>
-          </a:p>
-          <a:p>
-            <a:pPr marL="800100" lvl="1" indent="-342900">
-              <a:buAutoNum type="arabicPeriod"/>
-            </a:pPr>
-            <a:r>
-              <a:rPr lang="ko-KR" altLang="en-US" dirty="0" smtClean="0"/>
-              <a:t>관리자 </a:t>
-            </a:r>
-            <a:r>
-              <a:rPr lang="en-US" altLang="ko-KR" dirty="0" smtClean="0"/>
-              <a:t>- </a:t>
-            </a:r>
-            <a:r>
-              <a:rPr lang="ko-KR" altLang="en-US" dirty="0" smtClean="0"/>
-              <a:t>조직도 </a:t>
-            </a:r>
-            <a:r>
-              <a:rPr lang="en-US" altLang="ko-KR" dirty="0" smtClean="0"/>
-              <a:t>- </a:t>
-            </a:r>
-            <a:r>
-              <a:rPr lang="ko-KR" altLang="en-US" dirty="0" err="1" smtClean="0"/>
-              <a:t>외부문서를</a:t>
-            </a:r>
-            <a:r>
-              <a:rPr lang="ko-KR" altLang="en-US" dirty="0" smtClean="0"/>
-              <a:t> 수신할 부서에 </a:t>
-            </a:r>
-            <a:r>
-              <a:rPr lang="ko-KR" altLang="en-US" dirty="0" err="1" smtClean="0"/>
-              <a:t>기관코드를</a:t>
-            </a:r>
-            <a:r>
-              <a:rPr lang="ko-KR" altLang="en-US" dirty="0" smtClean="0"/>
-              <a:t> 입력</a:t>
-            </a:r>
-            <a:r>
-              <a:rPr lang="en-US" altLang="ko-KR" dirty="0" smtClean="0"/>
-              <a:t>.</a:t>
-            </a:r>
-            <a:r>
-              <a:rPr lang="ko-KR" altLang="en-US" dirty="0" smtClean="0"/>
-              <a:t> </a:t>
-            </a:r>
-            <a:endParaRPr lang="en-US" altLang="ko-KR" dirty="0" smtClean="0"/>
-          </a:p>
-        </p:txBody>
-      </p:sp>
+      </p:pic>
+      <p:pic>
+        <p:nvPicPr>
+          <p:cNvPr id="4" name="그림 3"/>
+          <p:cNvPicPr>
+            <a:picLocks noChangeAspect="1"/>
+          </p:cNvPicPr>
+          <p:nvPr/>
+        </p:nvPicPr>
+        <p:blipFill>
+          <a:blip r:embed="rId3"/>
+          <a:stretch>
+            <a:fillRect/>
+          </a:stretch>
+        </p:blipFill>
+        <p:spPr>
+          <a:xfrm>
+            <a:off x="1032933" y="1075788"/>
+            <a:ext cx="8238067" cy="5951764"/>
+          </a:xfrm>
+          <a:prstGeom prst="rect">
+            <a:avLst/>
+          </a:prstGeom>
+        </p:spPr>
+      </p:pic>
     </p:spTree>
     <p:extLst>
       <p:ext uri="{BB962C8B-B14F-4D97-AF65-F5344CB8AC3E}">
-        <p14:creationId xmlns:p14="http://schemas.microsoft.com/office/powerpoint/2010/main" val="2541571713"/>
+        <p14:creationId xmlns:p14="http://schemas.microsoft.com/office/powerpoint/2010/main" val="3946545295"/>
       </p:ext>
     </p:extLst>
   </p:cSld>
@@ -6073,8 +7519,8 @@
         </p:nvSpPr>
         <p:spPr>
           <a:xfrm>
-            <a:off x="880110" y="640080"/>
-            <a:ext cx="10469880" cy="1415772"/>
+            <a:off x="948690" y="651510"/>
+            <a:ext cx="10469880" cy="6801862"/>
           </a:xfrm>
           <a:prstGeom prst="rect">
             <a:avLst/>
@@ -6088,125 +7534,418 @@
           <a:lstStyle/>
           <a:p>
             <a:r>
-              <a:rPr lang="en-US" altLang="ko-KR" sz="3200" dirty="0" err="1" smtClean="0"/>
-              <a:t>config.properties</a:t>
-            </a:r>
-            <a:r>
-              <a:rPr lang="en-US" altLang="ko-KR" sz="3200" dirty="0" smtClean="0"/>
+              <a:rPr lang="ko-KR" altLang="en-US" b="1" dirty="0" smtClean="0"/>
+              <a:t>유통서버에서</a:t>
+            </a:r>
+            <a:endParaRPr lang="en-US" altLang="ko-KR" b="1" dirty="0" smtClean="0"/>
+          </a:p>
+          <a:p>
+            <a:pPr marL="342900" indent="-342900">
+              <a:buAutoNum type="arabicPeriod"/>
+            </a:pPr>
+            <a:r>
+              <a:rPr lang="ko-KR" altLang="en-US" sz="1600" dirty="0" err="1" smtClean="0"/>
+              <a:t>환경변수는</a:t>
+            </a:r>
+            <a:r>
+              <a:rPr lang="ko-KR" altLang="en-US" sz="1600" dirty="0" smtClean="0"/>
+              <a:t> 이것만 등록 하면 됨</a:t>
+            </a:r>
+            <a:r>
+              <a:rPr lang="en-US" altLang="ko-KR" sz="1600" dirty="0" smtClean="0"/>
+              <a:t>.</a:t>
+            </a:r>
+          </a:p>
+          <a:p>
+            <a:pPr marL="800100" lvl="1" indent="-342900">
+              <a:buAutoNum type="arabicPeriod"/>
+            </a:pPr>
+            <a:r>
+              <a:rPr lang="en-US" altLang="ko-KR" sz="1600" dirty="0"/>
+              <a:t>export LIBPATH=$LIBPATH:/</a:t>
+            </a:r>
+            <a:r>
+              <a:rPr lang="en-US" altLang="ko-KR" sz="1600" dirty="0" err="1"/>
+              <a:t>usr</a:t>
+            </a:r>
+            <a:r>
+              <a:rPr lang="en-US" altLang="ko-KR" sz="1600" dirty="0"/>
+              <a:t>/lib:/</a:t>
+            </a:r>
+            <a:r>
+              <a:rPr lang="en-US" altLang="ko-KR" sz="1600" dirty="0" err="1"/>
+              <a:t>usr</a:t>
+            </a:r>
+            <a:r>
+              <a:rPr lang="en-US" altLang="ko-KR" sz="1600" dirty="0"/>
+              <a:t>/lib64:/home/</a:t>
+            </a:r>
+            <a:r>
+              <a:rPr lang="en-US" altLang="ko-KR" sz="1600" dirty="0" err="1"/>
+              <a:t>jmocha</a:t>
+            </a:r>
+            <a:r>
+              <a:rPr lang="en-US" altLang="ko-KR" sz="1600" dirty="0"/>
+              <a:t>/relay/lib</a:t>
+            </a:r>
+          </a:p>
+          <a:p>
+            <a:pPr marL="800100" lvl="1" indent="-342900">
+              <a:buAutoNum type="arabicPeriod"/>
+            </a:pPr>
+            <a:r>
+              <a:rPr lang="en-US" altLang="ko-KR" sz="1600" dirty="0"/>
+              <a:t>export LD_LIBRARY_PATH=$LD_LIBRARY_PATH:/</a:t>
+            </a:r>
+            <a:r>
+              <a:rPr lang="en-US" altLang="ko-KR" sz="1600" dirty="0" err="1"/>
+              <a:t>usr</a:t>
+            </a:r>
+            <a:r>
+              <a:rPr lang="en-US" altLang="ko-KR" sz="1600" dirty="0"/>
+              <a:t>/lib:/</a:t>
+            </a:r>
+            <a:r>
+              <a:rPr lang="en-US" altLang="ko-KR" sz="1600" dirty="0" err="1"/>
+              <a:t>usr</a:t>
+            </a:r>
+            <a:r>
+              <a:rPr lang="en-US" altLang="ko-KR" sz="1600" dirty="0"/>
+              <a:t>/lib64:/home/</a:t>
+            </a:r>
+            <a:r>
+              <a:rPr lang="en-US" altLang="ko-KR" sz="1600" dirty="0" err="1"/>
+              <a:t>jmocha</a:t>
+            </a:r>
+            <a:r>
+              <a:rPr lang="en-US" altLang="ko-KR" sz="1600" dirty="0"/>
+              <a:t>/relay/lib</a:t>
+            </a:r>
+          </a:p>
+          <a:p>
+            <a:pPr marL="800100" lvl="1" indent="-342900">
+              <a:buAutoNum type="arabicPeriod"/>
+            </a:pPr>
+            <a:r>
+              <a:rPr lang="en-US" altLang="ko-KR" sz="1600" dirty="0"/>
+              <a:t>export SHLIB_PATH=$SHLIB_PATH:/</a:t>
+            </a:r>
+            <a:r>
+              <a:rPr lang="en-US" altLang="ko-KR" sz="1600" dirty="0" err="1"/>
+              <a:t>usr</a:t>
+            </a:r>
+            <a:r>
+              <a:rPr lang="en-US" altLang="ko-KR" sz="1600" dirty="0"/>
+              <a:t>/lib:/</a:t>
+            </a:r>
+            <a:r>
+              <a:rPr lang="en-US" altLang="ko-KR" sz="1600" dirty="0" err="1"/>
+              <a:t>usr</a:t>
+            </a:r>
+            <a:r>
+              <a:rPr lang="en-US" altLang="ko-KR" sz="1600" dirty="0"/>
+              <a:t>/lib64:/home/</a:t>
+            </a:r>
+            <a:r>
+              <a:rPr lang="en-US" altLang="ko-KR" sz="1600" dirty="0" err="1"/>
+              <a:t>jmocha</a:t>
+            </a:r>
+            <a:r>
+              <a:rPr lang="en-US" altLang="ko-KR" sz="1600" dirty="0"/>
+              <a:t>/relay/lib</a:t>
+            </a:r>
+          </a:p>
+          <a:p>
+            <a:pPr marL="800100" lvl="1" indent="-342900">
+              <a:buAutoNum type="arabicPeriod"/>
+            </a:pPr>
+            <a:r>
+              <a:rPr lang="en-US" altLang="ko-KR" sz="1600" dirty="0"/>
+              <a:t>export RELAY_HOME=/</a:t>
+            </a:r>
+            <a:r>
+              <a:rPr lang="en-US" altLang="ko-KR" sz="1600" dirty="0" smtClean="0"/>
+              <a:t>home/</a:t>
+            </a:r>
+            <a:r>
+              <a:rPr lang="en-US" altLang="ko-KR" sz="1600" dirty="0" err="1" smtClean="0"/>
+              <a:t>jmocha</a:t>
+            </a:r>
+            <a:r>
+              <a:rPr lang="en-US" altLang="ko-KR" sz="1600" dirty="0" smtClean="0"/>
+              <a:t>/relay</a:t>
+            </a:r>
+          </a:p>
+          <a:p>
+            <a:pPr marL="800100" lvl="1" indent="-342900">
+              <a:buAutoNum type="arabicPeriod"/>
+            </a:pPr>
+            <a:endParaRPr lang="en-US" altLang="ko-KR" sz="1600" dirty="0"/>
+          </a:p>
+          <a:p>
+            <a:pPr marL="800100" lvl="1" indent="-342900">
+              <a:buAutoNum type="arabicPeriod"/>
+            </a:pPr>
+            <a:r>
+              <a:rPr lang="en-US" altLang="ko-KR" sz="1600" dirty="0"/>
+              <a:t>export RY_JAVA_HOME=/</a:t>
+            </a:r>
+            <a:r>
+              <a:rPr lang="en-US" altLang="ko-KR" sz="1600" dirty="0" smtClean="0"/>
+              <a:t>home/</a:t>
+            </a:r>
+            <a:r>
+              <a:rPr lang="en-US" altLang="ko-KR" sz="1600" dirty="0" err="1" smtClean="0"/>
+              <a:t>jmocha</a:t>
+            </a:r>
+            <a:r>
+              <a:rPr lang="en-US" altLang="ko-KR" sz="1600" dirty="0" smtClean="0"/>
+              <a:t>/jdk1.4 (jdk1.4 </a:t>
+            </a:r>
+            <a:r>
+              <a:rPr lang="ko-KR" altLang="en-US" sz="1600" dirty="0" smtClean="0"/>
+              <a:t>경로에 따라 적절히 수정</a:t>
+            </a:r>
+            <a:r>
+              <a:rPr lang="en-US" altLang="ko-KR" sz="1600" dirty="0" smtClean="0"/>
+              <a:t>)</a:t>
+            </a:r>
+          </a:p>
+          <a:p>
+            <a:pPr marL="342900" indent="-342900">
+              <a:buAutoNum type="arabicPeriod"/>
+            </a:pPr>
+            <a:r>
+              <a:rPr lang="ko-KR" altLang="en-US" sz="1600" dirty="0" smtClean="0"/>
+              <a:t>위의 명령을 적절히 </a:t>
+            </a:r>
+            <a:r>
+              <a:rPr lang="en-US" altLang="ko-KR" sz="1600" dirty="0" smtClean="0"/>
+              <a:t>~</a:t>
+            </a:r>
+            <a:r>
+              <a:rPr lang="en-US" altLang="ko-KR" sz="1600" dirty="0" err="1" smtClean="0"/>
+              <a:t>jmocha</a:t>
+            </a:r>
+            <a:r>
+              <a:rPr lang="en-US" altLang="ko-KR" sz="1600" dirty="0" smtClean="0"/>
+              <a:t>/.</a:t>
+            </a:r>
+            <a:r>
+              <a:rPr lang="en-US" altLang="ko-KR" sz="1600" dirty="0" err="1" smtClean="0"/>
+              <a:t>bashrc</a:t>
+            </a:r>
+            <a:r>
+              <a:rPr lang="en-US" altLang="ko-KR" sz="1600" dirty="0" smtClean="0"/>
               <a:t> </a:t>
             </a:r>
             <a:r>
-              <a:rPr lang="ko-KR" altLang="en-US" sz="3200" dirty="0" smtClean="0"/>
-              <a:t>설정</a:t>
-            </a:r>
-            <a:r>
-              <a:rPr lang="en-US" altLang="ko-KR" sz="3200" dirty="0" smtClean="0"/>
+              <a:rPr lang="ko-KR" altLang="en-US" sz="1600" dirty="0" smtClean="0"/>
+              <a:t>에도 등록해준다</a:t>
+            </a:r>
+            <a:r>
+              <a:rPr lang="en-US" altLang="ko-KR" sz="1600" dirty="0" smtClean="0"/>
               <a:t>.</a:t>
             </a:r>
           </a:p>
           <a:p>
+            <a:pPr marL="342900" indent="-342900">
+              <a:buAutoNum type="arabicPeriod"/>
+            </a:pPr>
+            <a:r>
+              <a:rPr lang="en-US" altLang="ko-KR" sz="1600" dirty="0" smtClean="0"/>
+              <a:t>LDAP </a:t>
+            </a:r>
+            <a:r>
+              <a:rPr lang="ko-KR" altLang="en-US" sz="1600" dirty="0" smtClean="0"/>
+              <a:t>연결이 되는지 </a:t>
+            </a:r>
+            <a:r>
+              <a:rPr lang="en-US" altLang="ko-KR" sz="1600" dirty="0" smtClean="0"/>
+              <a:t>telnet </a:t>
+            </a:r>
+            <a:r>
+              <a:rPr lang="ko-KR" altLang="en-US" sz="1600" dirty="0" smtClean="0"/>
+              <a:t>연결 해봄</a:t>
+            </a:r>
+            <a:r>
+              <a:rPr lang="en-US" altLang="ko-KR" sz="1600" dirty="0" smtClean="0"/>
+              <a:t>. </a:t>
+            </a:r>
+            <a:r>
+              <a:rPr lang="ko-KR" altLang="en-US" sz="1600" dirty="0" err="1" smtClean="0"/>
+              <a:t>중계모듈</a:t>
+            </a:r>
+            <a:r>
+              <a:rPr lang="ko-KR" altLang="en-US" sz="1600" dirty="0" smtClean="0"/>
+              <a:t> 설치 가이드의</a:t>
+            </a:r>
+            <a:r>
+              <a:rPr lang="en-US" altLang="ko-KR" sz="1600" dirty="0" smtClean="0"/>
+              <a:t> </a:t>
+            </a:r>
+            <a:r>
+              <a:rPr lang="ko-KR" altLang="en-US" sz="1600" dirty="0" smtClean="0"/>
+              <a:t>다</a:t>
+            </a:r>
+            <a:r>
+              <a:rPr lang="en-US" altLang="ko-KR" sz="1600" dirty="0" smtClean="0"/>
+              <a:t>.</a:t>
+            </a:r>
+            <a:r>
+              <a:rPr lang="ko-KR" altLang="en-US" sz="1600" dirty="0" smtClean="0"/>
+              <a:t>네트워크 설정의 확인 참고</a:t>
+            </a:r>
+            <a:r>
+              <a:rPr lang="en-US" altLang="ko-KR" sz="1600" dirty="0" smtClean="0"/>
+              <a:t>.</a:t>
+            </a:r>
+          </a:p>
+          <a:p>
+            <a:pPr marL="342900" indent="-342900">
+              <a:buAutoNum type="arabicPeriod"/>
+            </a:pPr>
+            <a:r>
+              <a:rPr lang="en-US" altLang="ko-KR" sz="1600" dirty="0" smtClean="0"/>
+              <a:t>centos 7</a:t>
+            </a:r>
+            <a:r>
+              <a:rPr lang="ko-KR" altLang="en-US" sz="1600" dirty="0" smtClean="0"/>
+              <a:t>이상 버전일 경우</a:t>
+            </a:r>
+            <a:r>
+              <a:rPr lang="en-US" altLang="ko-KR" sz="1600" dirty="0" smtClean="0"/>
+              <a:t>, yum -y install gilbc.i686</a:t>
+            </a:r>
+            <a:br>
+              <a:rPr lang="en-US" altLang="ko-KR" sz="1600" dirty="0" smtClean="0"/>
+            </a:br>
+            <a:r>
+              <a:rPr lang="en-US" altLang="ko-KR" sz="1600" dirty="0" smtClean="0"/>
+              <a:t>centos 6</a:t>
+            </a:r>
+            <a:r>
+              <a:rPr lang="ko-KR" altLang="en-US" sz="1600" dirty="0" smtClean="0"/>
+              <a:t>버전일 경우</a:t>
+            </a:r>
+            <a:r>
+              <a:rPr lang="en-US" altLang="ko-KR" sz="1600" dirty="0" smtClean="0"/>
+              <a:t>,</a:t>
+            </a:r>
+            <a:r>
+              <a:rPr lang="ko-KR" altLang="en-US" sz="1600" dirty="0"/>
+              <a:t> </a:t>
+            </a:r>
+            <a:endParaRPr lang="en-US" altLang="ko-KR" sz="1600" dirty="0" smtClean="0"/>
+          </a:p>
+          <a:p>
+            <a:pPr lvl="2"/>
+            <a:r>
+              <a:rPr lang="en-US" altLang="ko-KR" sz="1600" dirty="0" err="1"/>
+              <a:t>wget</a:t>
+            </a:r>
+            <a:r>
+              <a:rPr lang="en-US" altLang="ko-KR" sz="1600" dirty="0"/>
+              <a:t> http://copr-be.cloud.fedoraproject.org/results/mosquito/myrepo-el6/epel-6-i386/glibc-2.17-55.fc20/glibc-2.17-55.el6.i686.rpm</a:t>
+            </a:r>
+          </a:p>
+          <a:p>
+            <a:pPr lvl="2"/>
+            <a:r>
+              <a:rPr lang="en-US" altLang="ko-KR" sz="1600" dirty="0" err="1"/>
+              <a:t>wget</a:t>
+            </a:r>
+            <a:r>
+              <a:rPr lang="en-US" altLang="ko-KR" sz="1600" dirty="0"/>
+              <a:t> http://copr-be.cloud.fedoraproject.org/results/mosquito/myrepo-el6/epel-6-i386/glibc-2.17-55.fc20/glibc-common-2.17-55.el6.i686.rpm</a:t>
+            </a:r>
+          </a:p>
+          <a:p>
+            <a:pPr lvl="2"/>
+            <a:r>
+              <a:rPr lang="en-US" altLang="ko-KR" sz="1600" dirty="0" err="1"/>
+              <a:t>wget</a:t>
+            </a:r>
+            <a:r>
+              <a:rPr lang="en-US" altLang="ko-KR" sz="1600" dirty="0"/>
+              <a:t> http://copr-be.cloud.fedoraproject.org/results/mosquito/myrepo-el6/epel-6-i386/glibc-2.17-55.fc20/glibc-devel-2.17-55.el6.i686.rpm</a:t>
+            </a:r>
+          </a:p>
+          <a:p>
+            <a:pPr lvl="2"/>
+            <a:r>
+              <a:rPr lang="en-US" altLang="ko-KR" sz="1600" dirty="0" err="1"/>
+              <a:t>wget</a:t>
+            </a:r>
+            <a:r>
+              <a:rPr lang="en-US" altLang="ko-KR" sz="1600" dirty="0"/>
+              <a:t> http://copr-be.cloud.fedoraproject.org/results/mosquito/myrepo-el6/epel-6-i386/glibc-2.17-55.fc20/glibc-headers-2.17-55.el6.i686.rpm</a:t>
+            </a:r>
+          </a:p>
+          <a:p>
+            <a:pPr marL="1257300" lvl="2" indent="-342900">
+              <a:buAutoNum type="arabicPeriod"/>
+            </a:pPr>
+            <a:endParaRPr lang="en-US" altLang="ko-KR" sz="1600" dirty="0"/>
+          </a:p>
+          <a:p>
+            <a:pPr lvl="2"/>
+            <a:r>
+              <a:rPr lang="en-US" altLang="ko-KR" sz="1600" dirty="0" err="1"/>
+              <a:t>sudo</a:t>
+            </a:r>
+            <a:r>
+              <a:rPr lang="en-US" altLang="ko-KR" sz="1600" dirty="0"/>
+              <a:t> rpm -</a:t>
+            </a:r>
+            <a:r>
+              <a:rPr lang="en-US" altLang="ko-KR" sz="1600" dirty="0" err="1"/>
+              <a:t>Uvh</a:t>
+            </a:r>
+            <a:r>
+              <a:rPr lang="en-US" altLang="ko-KR" sz="1600" dirty="0"/>
+              <a:t> glibc-2.17-55.el6.i686.rpm \</a:t>
+            </a:r>
+          </a:p>
+          <a:p>
+            <a:pPr lvl="2"/>
+            <a:r>
+              <a:rPr lang="en-US" altLang="ko-KR" sz="1600" dirty="0"/>
+              <a:t>glibc-common-2.17-55.el6.i686.rpm \</a:t>
+            </a:r>
+          </a:p>
+          <a:p>
+            <a:pPr lvl="2"/>
+            <a:r>
+              <a:rPr lang="en-US" altLang="ko-KR" sz="1600" dirty="0"/>
+              <a:t>glibc-devel-2.17-55.el6.i686.rpm \</a:t>
+            </a:r>
+          </a:p>
+          <a:p>
+            <a:pPr lvl="2"/>
+            <a:r>
+              <a:rPr lang="en-US" altLang="ko-KR" sz="1600" dirty="0"/>
+              <a:t>glibc-headers-2.17-55.el6.i686.rpm</a:t>
+            </a:r>
+          </a:p>
+          <a:p>
+            <a:pPr marL="342900" indent="-342900">
+              <a:buAutoNum type="arabicPeriod"/>
+            </a:pPr>
+            <a:endParaRPr lang="en-US" altLang="ko-KR" sz="1600" dirty="0" smtClean="0"/>
+          </a:p>
+          <a:p>
             <a:pPr marL="800100" lvl="1" indent="-342900">
               <a:buAutoNum type="arabicPeriod"/>
             </a:pPr>
-            <a:r>
-              <a:rPr lang="en-US" altLang="ko-KR" dirty="0" err="1" smtClean="0"/>
-              <a:t>config.</a:t>
-            </a:r>
-            <a:r>
-              <a:rPr lang="en-US" altLang="ko-KR" dirty="0" err="1" smtClean="0"/>
-              <a:t>companyNum</a:t>
-            </a:r>
-            <a:r>
-              <a:rPr lang="en-US" altLang="ko-KR" dirty="0" smtClean="0"/>
-              <a:t> </a:t>
-            </a:r>
-            <a:r>
-              <a:rPr lang="ko-KR" altLang="en-US" dirty="0" smtClean="0"/>
-              <a:t>에 </a:t>
-            </a:r>
-            <a:r>
-              <a:rPr lang="ko-KR" altLang="en-US" dirty="0" err="1" smtClean="0"/>
-              <a:t>기관코드</a:t>
-            </a:r>
-            <a:r>
-              <a:rPr lang="ko-KR" altLang="en-US" dirty="0" smtClean="0"/>
-              <a:t> 입력</a:t>
-            </a:r>
-            <a:r>
-              <a:rPr lang="en-US" altLang="ko-KR" dirty="0" smtClean="0"/>
-              <a:t>.</a:t>
-            </a:r>
-          </a:p>
-          <a:p>
-            <a:pPr marL="800100" lvl="1" indent="-342900">
-              <a:buAutoNum type="arabicPeriod"/>
-            </a:pPr>
-            <a:r>
-              <a:rPr lang="en-US" altLang="ko-KR" dirty="0" err="1" smtClean="0"/>
-              <a:t>relay_root</a:t>
-            </a:r>
-            <a:r>
-              <a:rPr lang="ko-KR" altLang="en-US" dirty="0" smtClean="0"/>
-              <a:t>만 </a:t>
-            </a:r>
-            <a:r>
-              <a:rPr lang="en-US" altLang="ko-KR" dirty="0" smtClean="0"/>
-              <a:t>/home/</a:t>
-            </a:r>
-            <a:r>
-              <a:rPr lang="en-US" altLang="ko-KR" dirty="0" err="1" smtClean="0"/>
-              <a:t>jmocha</a:t>
-            </a:r>
-            <a:r>
-              <a:rPr lang="en-US" altLang="ko-KR" dirty="0" smtClean="0"/>
-              <a:t>/</a:t>
-            </a:r>
-            <a:r>
-              <a:rPr lang="en-US" altLang="ko-KR" dirty="0" err="1" smtClean="0"/>
-              <a:t>ezEKP</a:t>
-            </a:r>
-            <a:r>
-              <a:rPr lang="en-US" altLang="ko-KR" dirty="0" smtClean="0"/>
-              <a:t>/</a:t>
-            </a:r>
-            <a:r>
-              <a:rPr lang="en-US" altLang="ko-KR" dirty="0" err="1" smtClean="0"/>
-              <a:t>ezFlow</a:t>
-            </a:r>
-            <a:r>
-              <a:rPr lang="en-US" altLang="ko-KR" dirty="0" smtClean="0"/>
-              <a:t>/</a:t>
-            </a:r>
-            <a:r>
-              <a:rPr lang="en-US" altLang="ko-KR" dirty="0" err="1" smtClean="0"/>
-              <a:t>webapps</a:t>
-            </a:r>
-            <a:r>
-              <a:rPr lang="en-US" altLang="ko-KR" dirty="0" smtClean="0"/>
-              <a:t>/ROOT</a:t>
-            </a:r>
-            <a:r>
-              <a:rPr lang="en-US" altLang="ko-KR" dirty="0"/>
-              <a:t/>
-            </a:r>
-            <a:br>
-              <a:rPr lang="en-US" altLang="ko-KR" dirty="0"/>
-            </a:br>
-            <a:r>
-              <a:rPr lang="ko-KR" altLang="en-US" dirty="0" smtClean="0"/>
-              <a:t>로 수정</a:t>
-            </a:r>
-            <a:r>
-              <a:rPr lang="en-US" altLang="ko-KR" dirty="0" smtClean="0"/>
-              <a:t>.</a:t>
-            </a:r>
+            <a:endParaRPr lang="en-US" altLang="ko-KR" sz="1600" dirty="0"/>
           </a:p>
         </p:txBody>
       </p:sp>
     </p:spTree>
     <p:extLst>
       <p:ext uri="{BB962C8B-B14F-4D97-AF65-F5344CB8AC3E}">
-        <p14:creationId xmlns:p14="http://schemas.microsoft.com/office/powerpoint/2010/main" val="932094438"/>
+        <p14:creationId xmlns:p14="http://schemas.microsoft.com/office/powerpoint/2010/main" val="645260729"/>
       </p:ext>
     </p:extLst>
   </p:cSld>
@@ -6242,7 +7981,7 @@
         <p:spPr>
           <a:xfrm>
             <a:off x="948690" y="651510"/>
-            <a:ext cx="10469880" cy="5724644"/>
+            <a:ext cx="10469880" cy="3847207"/>
           </a:xfrm>
           <a:prstGeom prst="rect">
             <a:avLst/>
@@ -6256,678 +7995,271 @@
           <a:lstStyle/>
           <a:p>
             <a:r>
-              <a:rPr lang="en-US" altLang="ko-KR" dirty="0" smtClean="0"/>
-              <a:t>NFS </a:t>
-            </a:r>
-            <a:r>
-              <a:rPr lang="ko-KR" altLang="en-US" dirty="0" smtClean="0"/>
-              <a:t>설정방법</a:t>
-            </a:r>
-            <a:endParaRPr lang="en-US" altLang="ko-KR" dirty="0" smtClean="0"/>
-          </a:p>
-          <a:p>
-            <a:r>
-              <a:rPr lang="en-US" altLang="ko-KR" sz="1200" dirty="0"/>
-              <a:t>NFS </a:t>
-            </a:r>
-            <a:r>
-              <a:rPr lang="ko-KR" altLang="en-US" sz="1200" dirty="0" err="1"/>
-              <a:t>마운트하기</a:t>
-            </a:r>
-            <a:r>
-              <a:rPr lang="ko-KR" altLang="en-US" sz="1200" dirty="0"/>
-              <a:t> 위한 방화벽</a:t>
-            </a:r>
-            <a:r>
-              <a:rPr lang="en-US" altLang="ko-KR" sz="1200" dirty="0"/>
+              <a:rPr lang="ko-KR" altLang="en-US" sz="2000" b="1" dirty="0" smtClean="0"/>
+              <a:t>유통서버에서</a:t>
+            </a:r>
+            <a:endParaRPr lang="en-US" altLang="ko-KR" sz="1600" b="1" dirty="0" smtClean="0"/>
+          </a:p>
+          <a:p>
+            <a:pPr marL="342900" indent="-342900">
+              <a:buAutoNum type="arabicPeriod"/>
+            </a:pPr>
+            <a:r>
+              <a:rPr lang="en-US" altLang="ko-KR" sz="1600" dirty="0" smtClean="0"/>
+              <a:t>GPKI </a:t>
+            </a:r>
+            <a:r>
+              <a:rPr lang="ko-KR" altLang="en-US" sz="1600" dirty="0" smtClean="0"/>
+              <a:t>모듈 설정 방법</a:t>
+            </a:r>
+            <a:r>
+              <a:rPr lang="en-US" altLang="ko-KR" sz="1600" dirty="0" smtClean="0"/>
+              <a:t>.</a:t>
+            </a:r>
+          </a:p>
+          <a:p>
+            <a:pPr marL="800100" lvl="1" indent="-342900">
+              <a:buAutoNum type="arabicPeriod"/>
+            </a:pPr>
+            <a:r>
+              <a:rPr lang="en-US" altLang="ko-KR" sz="1600" dirty="0" err="1" smtClean="0"/>
+              <a:t>gpki</a:t>
+            </a:r>
+            <a:r>
+              <a:rPr lang="ko-KR" altLang="en-US" sz="1600" dirty="0" smtClean="0"/>
+              <a:t>표준 </a:t>
+            </a:r>
+            <a:r>
+              <a:rPr lang="en-US" altLang="ko-KR" sz="1600" dirty="0" err="1" smtClean="0"/>
+              <a:t>api</a:t>
+            </a:r>
+            <a:r>
+              <a:rPr lang="en-US" altLang="ko-KR" sz="1600" dirty="0" smtClean="0"/>
+              <a:t> </a:t>
+            </a:r>
+            <a:r>
+              <a:rPr lang="ko-KR" altLang="en-US" sz="1600" dirty="0" smtClean="0"/>
+              <a:t>압축 파일을 해제 </a:t>
+            </a:r>
+            <a:r>
+              <a:rPr lang="en-US" altLang="ko-KR" sz="1600" dirty="0" smtClean="0"/>
+              <a:t>(</a:t>
+            </a:r>
+            <a:r>
+              <a:rPr lang="ko-KR" altLang="en-US" sz="1600" dirty="0" smtClean="0"/>
+              <a:t>보통 암호는 </a:t>
+            </a:r>
+            <a:r>
+              <a:rPr lang="en-US" altLang="ko-KR" sz="1600" dirty="0" smtClean="0"/>
+              <a:t>818)</a:t>
+            </a:r>
+            <a:br>
+              <a:rPr lang="en-US" altLang="ko-KR" sz="1600" dirty="0" smtClean="0"/>
+            </a:br>
+            <a:r>
+              <a:rPr lang="ko-KR" altLang="en-US" sz="1600" dirty="0" smtClean="0"/>
+              <a:t>임시라이센스</a:t>
+            </a:r>
+            <a:r>
+              <a:rPr lang="en-US" altLang="ko-KR" sz="1600" dirty="0" smtClean="0"/>
               <a:t>, </a:t>
             </a:r>
             <a:r>
-              <a:rPr lang="ko-KR" altLang="en-US" sz="1200" dirty="0"/>
-              <a:t>경로 확인</a:t>
-            </a:r>
-            <a:r>
-              <a:rPr lang="en-US" altLang="ko-KR" sz="1200" dirty="0"/>
+              <a:rPr lang="ko-KR" altLang="en-US" sz="1600" dirty="0" smtClean="0"/>
+              <a:t>정상라이센스</a:t>
+            </a:r>
+            <a:r>
+              <a:rPr lang="en-US" altLang="ko-KR" sz="1600" dirty="0" smtClean="0"/>
+              <a:t>, </a:t>
+            </a:r>
+            <a:r>
+              <a:rPr lang="ko-KR" altLang="en-US" sz="1600" dirty="0" smtClean="0"/>
+              <a:t>모듈이 생김</a:t>
+            </a:r>
+            <a:r>
+              <a:rPr lang="en-US" altLang="ko-KR" sz="1600" dirty="0" smtClean="0"/>
               <a:t>.</a:t>
             </a:r>
-          </a:p>
-          <a:p>
-            <a:r>
-              <a:rPr lang="ko-KR" altLang="en-US" sz="1200" dirty="0"/>
-              <a:t>그룹웨어에서 </a:t>
-            </a:r>
-            <a:r>
-              <a:rPr lang="en-US" altLang="ko-KR" sz="1200" dirty="0"/>
-              <a:t>telnet</a:t>
-            </a:r>
-            <a:r>
-              <a:rPr lang="ko-KR" altLang="en-US" sz="1200" dirty="0" smtClean="0"/>
-              <a:t>으로 </a:t>
-            </a:r>
-            <a:r>
-              <a:rPr lang="en-US" altLang="ko-KR" sz="1200" dirty="0" smtClean="0"/>
-              <a:t>111</a:t>
-            </a:r>
-            <a:r>
-              <a:rPr lang="en-US" altLang="ko-KR" sz="1200" dirty="0"/>
-              <a:t>, 2049, 20048 </a:t>
-            </a:r>
-            <a:r>
-              <a:rPr lang="ko-KR" altLang="en-US" sz="1200" dirty="0"/>
-              <a:t>포트 개방 확인</a:t>
-            </a:r>
-          </a:p>
-          <a:p>
-            <a:r>
-              <a:rPr lang="ko-KR" altLang="en-US" sz="1200" dirty="0" err="1"/>
-              <a:t>닫혀있으면</a:t>
-            </a:r>
-            <a:r>
-              <a:rPr lang="en-US" altLang="ko-KR" sz="1200" dirty="0"/>
-              <a:t>, source </a:t>
-            </a:r>
-            <a:r>
-              <a:rPr lang="ko-KR" altLang="en-US" sz="1200" dirty="0"/>
-              <a:t>그룹웨어 </a:t>
-            </a:r>
-            <a:r>
-              <a:rPr lang="en-US" altLang="ko-KR" sz="1200" dirty="0" smtClean="0"/>
-              <a:t>destination </a:t>
-            </a:r>
-            <a:r>
-              <a:rPr lang="ko-KR" altLang="en-US" sz="1200" dirty="0"/>
-              <a:t>문서유통으로 </a:t>
-            </a:r>
-            <a:r>
-              <a:rPr lang="ko-KR" altLang="en-US" sz="1200" dirty="0" err="1"/>
-              <a:t>해당포트</a:t>
-            </a:r>
-            <a:r>
-              <a:rPr lang="ko-KR" altLang="en-US" sz="1200" dirty="0"/>
-              <a:t> 개방 요청</a:t>
-            </a:r>
-            <a:r>
-              <a:rPr lang="en-US" altLang="ko-KR" sz="1200" dirty="0"/>
+            <a:br>
+              <a:rPr lang="en-US" altLang="ko-KR" sz="1600" dirty="0" smtClean="0"/>
+            </a:br>
+            <a:r>
+              <a:rPr lang="ko-KR" altLang="en-US" sz="1600" dirty="0" smtClean="0"/>
+              <a:t>임시라이센스는 기간이 </a:t>
+            </a:r>
+            <a:r>
+              <a:rPr lang="en-US" altLang="ko-KR" sz="1600" dirty="0" smtClean="0"/>
+              <a:t>3</a:t>
+            </a:r>
+            <a:r>
+              <a:rPr lang="ko-KR" altLang="en-US" sz="1600" dirty="0" smtClean="0"/>
+              <a:t>개월이고</a:t>
+            </a:r>
+            <a:r>
+              <a:rPr lang="en-US" altLang="ko-KR" sz="1600" dirty="0"/>
+              <a:t> </a:t>
+            </a:r>
+            <a:r>
+              <a:rPr lang="en-US" altLang="ko-KR" sz="1600" dirty="0" err="1" smtClean="0"/>
+              <a:t>ip</a:t>
+            </a:r>
+            <a:r>
+              <a:rPr lang="en-US" altLang="ko-KR" sz="1600" dirty="0" smtClean="0"/>
+              <a:t> </a:t>
+            </a:r>
+            <a:r>
+              <a:rPr lang="ko-KR" altLang="en-US" sz="1600" dirty="0" smtClean="0"/>
+              <a:t>체크를 하지 않음</a:t>
+            </a:r>
+            <a:r>
+              <a:rPr lang="en-US" altLang="ko-KR" sz="1600" dirty="0" smtClean="0"/>
+              <a:t>. </a:t>
+            </a:r>
+            <a:r>
+              <a:rPr lang="ko-KR" altLang="en-US" sz="1600" dirty="0" smtClean="0"/>
+              <a:t>그래서 정상라이센스로 설치 작업하는게 나음</a:t>
+            </a:r>
+            <a:r>
+              <a:rPr lang="en-US" altLang="ko-KR" sz="1600" dirty="0" smtClean="0"/>
               <a:t>.</a:t>
             </a:r>
-          </a:p>
-          <a:p>
-            <a:endParaRPr lang="en-US" altLang="ko-KR" sz="1200" dirty="0"/>
-          </a:p>
-          <a:p>
-            <a:r>
-              <a:rPr lang="en-US" altLang="ko-KR" sz="1200" dirty="0"/>
-              <a:t>rpm -</a:t>
-            </a:r>
-            <a:r>
-              <a:rPr lang="en-US" altLang="ko-KR" sz="1200" dirty="0" err="1"/>
-              <a:t>qa</a:t>
-            </a:r>
-            <a:r>
-              <a:rPr lang="en-US" altLang="ko-KR" sz="1200" dirty="0"/>
+            <a:br>
+              <a:rPr lang="en-US" altLang="ko-KR" sz="1600" dirty="0" smtClean="0"/>
+            </a:br>
+            <a:r>
+              <a:rPr lang="ko-KR" altLang="en-US" sz="1600" dirty="0" smtClean="0"/>
+              <a:t>정상라이센스 폴더의 </a:t>
+            </a:r>
+            <a:r>
+              <a:rPr lang="en-US" altLang="ko-KR" sz="1600" dirty="0" err="1" smtClean="0"/>
+              <a:t>gpkiapi.lic</a:t>
+            </a:r>
+            <a:r>
+              <a:rPr lang="en-US" altLang="ko-KR" sz="1600" dirty="0" smtClean="0"/>
               <a:t> </a:t>
             </a:r>
             <a:r>
-              <a:rPr lang="en-US" altLang="ko-KR" sz="1200" dirty="0" err="1"/>
-              <a:t>nfs-utils</a:t>
-            </a:r>
-            <a:r>
-              <a:rPr lang="en-US" altLang="ko-KR" sz="1200" dirty="0"/>
+              <a:rPr lang="ko-KR" altLang="en-US" sz="1600" dirty="0" smtClean="0"/>
+              <a:t>파일을 </a:t>
+            </a:r>
+            <a:r>
+              <a:rPr lang="en-US" altLang="ko-KR" sz="1600" dirty="0" smtClean="0"/>
+              <a:t>relay/</a:t>
+            </a:r>
+            <a:r>
+              <a:rPr lang="en-US" altLang="ko-KR" sz="1600" dirty="0" err="1" smtClean="0"/>
+              <a:t>gpki</a:t>
+            </a:r>
+            <a:r>
+              <a:rPr lang="en-US" altLang="ko-KR" sz="1600" dirty="0" smtClean="0"/>
+              <a:t>/</a:t>
+            </a:r>
+            <a:r>
+              <a:rPr lang="ko-KR" altLang="en-US" sz="1600" dirty="0" smtClean="0"/>
+              <a:t>를 생성하여 위치시킴</a:t>
+            </a:r>
+            <a:r>
+              <a:rPr lang="en-US" altLang="ko-KR" sz="1600" dirty="0" smtClean="0"/>
+              <a:t>.</a:t>
+            </a:r>
+            <a:br>
+              <a:rPr lang="en-US" altLang="ko-KR" sz="1600" dirty="0" smtClean="0"/>
+            </a:br>
+            <a:r>
+              <a:rPr lang="en-US" altLang="ko-KR" sz="1600" dirty="0" err="1" smtClean="0"/>
+              <a:t>gpki</a:t>
+            </a:r>
+            <a:r>
+              <a:rPr lang="en-US" altLang="ko-KR" sz="1600" dirty="0" smtClean="0"/>
               <a:t> </a:t>
             </a:r>
             <a:r>
-              <a:rPr lang="ko-KR" altLang="en-US" sz="1200" dirty="0"/>
-              <a:t>로 </a:t>
-            </a:r>
-            <a:r>
-              <a:rPr lang="ko-KR" altLang="en-US" sz="1200" dirty="0" err="1"/>
-              <a:t>설치유무</a:t>
-            </a:r>
-            <a:r>
-              <a:rPr lang="ko-KR" altLang="en-US" sz="1200" dirty="0"/>
-              <a:t> 검색</a:t>
-            </a:r>
-          </a:p>
-          <a:p>
-            <a:r>
-              <a:rPr lang="ko-KR" altLang="en-US" sz="1200" dirty="0"/>
-              <a:t>설치가 안되어 있으면</a:t>
-            </a:r>
-            <a:r>
-              <a:rPr lang="en-US" altLang="ko-KR" sz="1200" dirty="0"/>
-              <a:t>,</a:t>
-            </a:r>
-          </a:p>
-          <a:p>
-            <a:r>
-              <a:rPr lang="en-US" altLang="ko-KR" sz="1200" dirty="0"/>
-              <a:t>yum install -y </a:t>
-            </a:r>
-            <a:r>
-              <a:rPr lang="en-US" altLang="ko-KR" sz="1200" dirty="0" err="1"/>
-              <a:t>nfs-utils</a:t>
-            </a:r>
-            <a:r>
-              <a:rPr lang="en-US" altLang="ko-KR" sz="1200" dirty="0"/>
-              <a:t> </a:t>
-            </a:r>
-            <a:r>
-              <a:rPr lang="ko-KR" altLang="en-US" sz="1200" dirty="0"/>
-              <a:t>로 설치</a:t>
-            </a:r>
-            <a:r>
-              <a:rPr lang="en-US" altLang="ko-KR" sz="1200" dirty="0"/>
+              <a:rPr lang="ko-KR" altLang="en-US" sz="1600" dirty="0" smtClean="0"/>
+              <a:t>인증서 파일도 같은 곳에 위치시킴</a:t>
+            </a:r>
+            <a:r>
+              <a:rPr lang="en-US" altLang="ko-KR" sz="1600" dirty="0" smtClean="0"/>
               <a:t>.</a:t>
             </a:r>
           </a:p>
           <a:p>
-            <a:r>
-              <a:rPr lang="en-US" altLang="ko-KR" sz="1200" dirty="0"/>
-              <a:t>/</a:t>
-            </a:r>
-            <a:r>
-              <a:rPr lang="en-US" altLang="ko-KR" sz="1200" dirty="0" err="1"/>
-              <a:t>etc</a:t>
-            </a:r>
-            <a:r>
-              <a:rPr lang="en-US" altLang="ko-KR" sz="1200" dirty="0"/>
-              <a:t>/exports </a:t>
-            </a:r>
-            <a:r>
-              <a:rPr lang="ko-KR" altLang="en-US" sz="1200" dirty="0"/>
-              <a:t>를 편집하여 </a:t>
-            </a:r>
-            <a:r>
-              <a:rPr lang="ko-KR" altLang="en-US" sz="1200" dirty="0" err="1"/>
-              <a:t>옵션설정</a:t>
-            </a:r>
-            <a:endParaRPr lang="ko-KR" altLang="en-US" sz="1200" dirty="0"/>
-          </a:p>
-          <a:p>
-            <a:r>
-              <a:rPr lang="en-US" altLang="ko-KR" sz="1200" dirty="0"/>
-              <a:t>ex) /home/</a:t>
-            </a:r>
-            <a:r>
-              <a:rPr lang="en-US" altLang="ko-KR" sz="1200" dirty="0" err="1"/>
-              <a:t>jmocha</a:t>
-            </a:r>
-            <a:r>
-              <a:rPr lang="en-US" altLang="ko-KR" sz="1200" dirty="0"/>
-              <a:t>/relay 10.4.204.*(</a:t>
-            </a:r>
-            <a:r>
-              <a:rPr lang="en-US" altLang="ko-KR" sz="1200" dirty="0" err="1" smtClean="0"/>
-              <a:t>rw,sync,fsid</a:t>
-            </a:r>
-            <a:r>
-              <a:rPr lang="en-US" altLang="ko-KR" sz="1200" dirty="0" smtClean="0"/>
-              <a:t>=0)</a:t>
-            </a:r>
-            <a:endParaRPr lang="en-US" altLang="ko-KR" sz="1200" dirty="0"/>
-          </a:p>
-          <a:p>
-            <a:r>
-              <a:rPr lang="en-US" altLang="ko-KR" sz="1200" dirty="0" err="1"/>
-              <a:t>exportfs</a:t>
-            </a:r>
-            <a:r>
-              <a:rPr lang="en-US" altLang="ko-KR" sz="1200" dirty="0"/>
-              <a:t> -v </a:t>
-            </a:r>
-            <a:r>
-              <a:rPr lang="ko-KR" altLang="en-US" sz="1200" dirty="0"/>
-              <a:t>로 마운트 현황 확인</a:t>
-            </a:r>
-            <a:r>
-              <a:rPr lang="en-US" altLang="ko-KR" sz="1200" dirty="0"/>
-              <a:t>.</a:t>
-            </a:r>
-          </a:p>
-          <a:p>
-            <a:r>
-              <a:rPr lang="en-US" altLang="ko-KR" sz="1200" dirty="0" err="1"/>
-              <a:t>exportfs</a:t>
-            </a:r>
-            <a:r>
-              <a:rPr lang="en-US" altLang="ko-KR" sz="1200" dirty="0"/>
-              <a:t> -r </a:t>
-            </a:r>
-            <a:r>
-              <a:rPr lang="ko-KR" altLang="en-US" sz="1200" dirty="0"/>
-              <a:t>로 </a:t>
-            </a:r>
-            <a:r>
-              <a:rPr lang="ko-KR" altLang="en-US" sz="1200" dirty="0" smtClean="0"/>
-              <a:t>갱신해야 </a:t>
-            </a:r>
-            <a:r>
-              <a:rPr lang="en-US" altLang="ko-KR" sz="1200" dirty="0" smtClean="0"/>
-              <a:t>exports </a:t>
-            </a:r>
-            <a:r>
-              <a:rPr lang="ko-KR" altLang="en-US" sz="1200" dirty="0" smtClean="0"/>
-              <a:t>파일 수정 내용이 반영됨</a:t>
-            </a:r>
-            <a:r>
-              <a:rPr lang="en-US" altLang="ko-KR" sz="1200" dirty="0" smtClean="0"/>
-              <a:t>.</a:t>
-            </a:r>
-            <a:endParaRPr lang="en-US" altLang="ko-KR" sz="1200" dirty="0"/>
-          </a:p>
-          <a:p>
-            <a:endParaRPr lang="en-US" altLang="ko-KR" sz="1200" dirty="0"/>
-          </a:p>
-          <a:p>
-            <a:r>
-              <a:rPr lang="ko-KR" altLang="en-US" sz="1200" dirty="0"/>
-              <a:t>그룹웨어 서버에서</a:t>
-            </a:r>
-          </a:p>
-          <a:p>
-            <a:r>
-              <a:rPr lang="en-US" altLang="ko-KR" sz="1200" dirty="0"/>
-              <a:t>/</a:t>
-            </a:r>
-            <a:r>
-              <a:rPr lang="en-US" altLang="ko-KR" sz="1200" dirty="0" err="1"/>
-              <a:t>etc</a:t>
-            </a:r>
-            <a:r>
-              <a:rPr lang="en-US" altLang="ko-KR" sz="1200" dirty="0"/>
-              <a:t>/</a:t>
-            </a:r>
-            <a:r>
-              <a:rPr lang="en-US" altLang="ko-KR" sz="1200" dirty="0" err="1"/>
-              <a:t>fstab</a:t>
-            </a:r>
-            <a:r>
-              <a:rPr lang="ko-KR" altLang="en-US" sz="1200" dirty="0"/>
-              <a:t>에 마운트 위치 작성</a:t>
-            </a:r>
-          </a:p>
-          <a:p>
-            <a:r>
-              <a:rPr lang="en-US" altLang="ko-KR" sz="1200" dirty="0"/>
-              <a:t>ex) 172.16.1.5:/home/</a:t>
-            </a:r>
-            <a:r>
-              <a:rPr lang="en-US" altLang="ko-KR" sz="1200" dirty="0" err="1"/>
-              <a:t>jmocha</a:t>
-            </a:r>
-            <a:r>
-              <a:rPr lang="en-US" altLang="ko-KR" sz="1200" dirty="0"/>
-              <a:t>/relay	/home/</a:t>
-            </a:r>
-            <a:r>
-              <a:rPr lang="en-US" altLang="ko-KR" sz="1200" dirty="0" err="1"/>
-              <a:t>jmocha</a:t>
-            </a:r>
-            <a:r>
-              <a:rPr lang="en-US" altLang="ko-KR" sz="1200" dirty="0"/>
-              <a:t>/relay	</a:t>
-            </a:r>
-            <a:r>
-              <a:rPr lang="en-US" altLang="ko-KR" sz="1200" dirty="0" err="1"/>
-              <a:t>nfs</a:t>
-            </a:r>
-            <a:r>
-              <a:rPr lang="en-US" altLang="ko-KR" sz="1200" dirty="0"/>
-              <a:t>	defaults	0 0</a:t>
-            </a:r>
-          </a:p>
-          <a:p>
-            <a:r>
-              <a:rPr lang="en-US" altLang="ko-KR" sz="1200" dirty="0" err="1"/>
-              <a:t>fstab</a:t>
-            </a:r>
-            <a:r>
-              <a:rPr lang="en-US" altLang="ko-KR" sz="1200" dirty="0"/>
-              <a:t> </a:t>
-            </a:r>
-            <a:r>
-              <a:rPr lang="ko-KR" altLang="en-US" sz="1200" dirty="0"/>
-              <a:t>작성 후</a:t>
-            </a:r>
-            <a:r>
-              <a:rPr lang="en-US" altLang="ko-KR" sz="1200" dirty="0"/>
-              <a:t>,</a:t>
-            </a:r>
-          </a:p>
-          <a:p>
-            <a:r>
-              <a:rPr lang="en-US" altLang="ko-KR" sz="1200" dirty="0"/>
-              <a:t>mount -t 172.16.1.5:/home/</a:t>
-            </a:r>
-            <a:r>
-              <a:rPr lang="en-US" altLang="ko-KR" sz="1200" dirty="0" err="1"/>
-              <a:t>jmocha</a:t>
-            </a:r>
-            <a:r>
-              <a:rPr lang="en-US" altLang="ko-KR" sz="1200" dirty="0"/>
-              <a:t>/relay </a:t>
-            </a:r>
-            <a:r>
-              <a:rPr lang="ko-KR" altLang="en-US" sz="1200" dirty="0"/>
-              <a:t>를 하면 해당 경로를 찾아서 </a:t>
-            </a:r>
-            <a:r>
-              <a:rPr lang="en-US" altLang="ko-KR" sz="1200" dirty="0"/>
-              <a:t>/home/</a:t>
-            </a:r>
-            <a:r>
-              <a:rPr lang="en-US" altLang="ko-KR" sz="1200" dirty="0" err="1"/>
-              <a:t>jmocha</a:t>
-            </a:r>
-            <a:r>
-              <a:rPr lang="en-US" altLang="ko-KR" sz="1200" dirty="0"/>
-              <a:t>/relay</a:t>
-            </a:r>
-            <a:r>
-              <a:rPr lang="ko-KR" altLang="en-US" sz="1200" dirty="0"/>
-              <a:t>에 마운트 됨</a:t>
-            </a:r>
-            <a:r>
-              <a:rPr lang="en-US" altLang="ko-KR" sz="1200" dirty="0"/>
-              <a:t>.</a:t>
-            </a:r>
-          </a:p>
-          <a:p>
-            <a:r>
-              <a:rPr lang="en-US" altLang="ko-KR" sz="1200" dirty="0" err="1"/>
-              <a:t>showmount</a:t>
-            </a:r>
-            <a:r>
-              <a:rPr lang="en-US" altLang="ko-KR" sz="1200" dirty="0"/>
-              <a:t> -e </a:t>
-            </a:r>
-            <a:r>
-              <a:rPr lang="ko-KR" altLang="en-US" sz="1200" dirty="0"/>
-              <a:t>로 마운트 유무를 확인할 수 있는데 </a:t>
-            </a:r>
-            <a:r>
-              <a:rPr lang="en-US" altLang="ko-KR" sz="1200" dirty="0" err="1"/>
-              <a:t>showmount</a:t>
-            </a:r>
-            <a:r>
-              <a:rPr lang="ko-KR" altLang="en-US" sz="1200" dirty="0"/>
-              <a:t>는 접근이 안돼도 마운트는 되기도 하므로 마운트 시도를 해봄</a:t>
-            </a:r>
-            <a:r>
-              <a:rPr lang="en-US" altLang="ko-KR" sz="1200" dirty="0"/>
-              <a:t>.</a:t>
-            </a:r>
-          </a:p>
-          <a:p>
-            <a:endParaRPr lang="en-US" altLang="ko-KR" sz="1200" dirty="0"/>
-          </a:p>
-          <a:p>
-            <a:r>
-              <a:rPr lang="ko-KR" altLang="en-US" sz="1200" dirty="0"/>
-              <a:t>마운트 후 위에 </a:t>
-            </a:r>
-            <a:r>
-              <a:rPr lang="en-US" altLang="ko-KR" sz="1200" dirty="0" err="1"/>
-              <a:t>no_root_squash</a:t>
-            </a:r>
-            <a:r>
-              <a:rPr lang="en-US" altLang="ko-KR" sz="1200" dirty="0"/>
-              <a:t> </a:t>
-            </a:r>
-            <a:r>
-              <a:rPr lang="ko-KR" altLang="en-US" sz="1200" dirty="0"/>
-              <a:t>옵션이 없다면 접근은 못하는데</a:t>
-            </a:r>
-            <a:r>
-              <a:rPr lang="en-US" altLang="ko-KR" sz="1200" dirty="0"/>
-              <a:t>,</a:t>
-            </a:r>
-          </a:p>
-          <a:p>
-            <a:r>
-              <a:rPr lang="ko-KR" altLang="en-US" sz="1200" dirty="0"/>
-              <a:t>이때</a:t>
-            </a:r>
-            <a:r>
-              <a:rPr lang="en-US" altLang="ko-KR" sz="1200" dirty="0"/>
-              <a:t>, /</a:t>
-            </a:r>
-            <a:r>
-              <a:rPr lang="en-US" altLang="ko-KR" sz="1200" dirty="0" err="1"/>
-              <a:t>etc</a:t>
-            </a:r>
-            <a:r>
-              <a:rPr lang="en-US" altLang="ko-KR" sz="1200" dirty="0"/>
-              <a:t>/</a:t>
-            </a:r>
-            <a:r>
-              <a:rPr lang="en-US" altLang="ko-KR" sz="1200" dirty="0" err="1"/>
-              <a:t>passwd</a:t>
-            </a:r>
-            <a:r>
-              <a:rPr lang="en-US" altLang="ko-KR" sz="1200" dirty="0"/>
-              <a:t> </a:t>
-            </a:r>
-            <a:r>
-              <a:rPr lang="ko-KR" altLang="en-US" sz="1200" dirty="0"/>
-              <a:t>에서 </a:t>
-            </a:r>
-            <a:r>
-              <a:rPr lang="ko-KR" altLang="en-US" sz="1200" dirty="0" err="1" smtClean="0"/>
-              <a:t>유통서버</a:t>
-            </a:r>
-            <a:r>
-              <a:rPr lang="ko-KR" altLang="en-US" sz="1200" dirty="0" smtClean="0"/>
-              <a:t> </a:t>
-            </a:r>
-            <a:r>
-              <a:rPr lang="en-US" altLang="ko-KR" sz="1200" dirty="0" err="1" smtClean="0"/>
-              <a:t>jmocha</a:t>
-            </a:r>
-            <a:r>
-              <a:rPr lang="en-US" altLang="ko-KR" sz="1200" dirty="0" smtClean="0"/>
-              <a:t> </a:t>
-            </a:r>
-            <a:r>
-              <a:rPr lang="ko-KR" altLang="en-US" sz="1200" dirty="0" smtClean="0"/>
-              <a:t>사용자와 </a:t>
-            </a:r>
-            <a:r>
-              <a:rPr lang="ko-KR" altLang="en-US" sz="1200" dirty="0"/>
-              <a:t>그룹웨어 서버의 </a:t>
-            </a:r>
-            <a:r>
-              <a:rPr lang="en-US" altLang="ko-KR" sz="1200" dirty="0" err="1"/>
-              <a:t>jmocha</a:t>
-            </a:r>
-            <a:r>
-              <a:rPr lang="en-US" altLang="ko-KR" sz="1200" dirty="0"/>
-              <a:t> </a:t>
-            </a:r>
-            <a:r>
-              <a:rPr lang="ko-KR" altLang="en-US" sz="1200" dirty="0"/>
-              <a:t>사용자의 </a:t>
-            </a:r>
-            <a:r>
-              <a:rPr lang="en-US" altLang="ko-KR" sz="1200" dirty="0" err="1" smtClean="0"/>
-              <a:t>uid</a:t>
-            </a:r>
-            <a:r>
-              <a:rPr lang="ko-KR" altLang="en-US" sz="1200" dirty="0"/>
-              <a:t>와 </a:t>
-            </a:r>
-            <a:r>
-              <a:rPr lang="en-US" altLang="ko-KR" sz="1200" dirty="0" err="1" smtClean="0"/>
-              <a:t>gid</a:t>
-            </a:r>
-            <a:r>
-              <a:rPr lang="ko-KR" altLang="en-US" sz="1200" dirty="0"/>
-              <a:t>를 일치시켜주고</a:t>
-            </a:r>
-          </a:p>
-          <a:p>
-            <a:r>
-              <a:rPr lang="ko-KR" altLang="en-US" sz="1200" dirty="0"/>
-              <a:t>해당 사용자의 </a:t>
-            </a:r>
-            <a:r>
-              <a:rPr lang="ko-KR" altLang="en-US" sz="1200" dirty="0" smtClean="0"/>
-              <a:t>폴더 소유자를 </a:t>
-            </a:r>
-            <a:r>
-              <a:rPr lang="ko-KR" altLang="en-US" sz="1200" dirty="0"/>
-              <a:t>바꿔주면 접근 할 수 있다</a:t>
-            </a:r>
-            <a:r>
-              <a:rPr lang="en-US" altLang="ko-KR" sz="1200" dirty="0"/>
-              <a:t>.</a:t>
-            </a:r>
-          </a:p>
-          <a:p>
-            <a:endParaRPr lang="en-US" altLang="ko-KR" sz="1200" dirty="0"/>
-          </a:p>
-          <a:p>
-            <a:r>
-              <a:rPr lang="ko-KR" altLang="en-US" sz="1200" dirty="0"/>
-              <a:t>위와 같이 했는데도 안되면</a:t>
-            </a:r>
-            <a:r>
-              <a:rPr lang="en-US" altLang="ko-KR" sz="1200" dirty="0"/>
-              <a:t>, </a:t>
-            </a:r>
-            <a:r>
-              <a:rPr lang="ko-KR" altLang="en-US" sz="1200" dirty="0"/>
-              <a:t>그룹웨어에서 </a:t>
-            </a:r>
-            <a:r>
-              <a:rPr lang="en-US" altLang="ko-KR" sz="1200" dirty="0"/>
-              <a:t>telnet</a:t>
-            </a:r>
-            <a:r>
-              <a:rPr lang="ko-KR" altLang="en-US" sz="1200" dirty="0"/>
-              <a:t>으로 붙고 유통서버에서 </a:t>
-            </a:r>
-            <a:r>
-              <a:rPr lang="en-US" altLang="ko-KR" sz="1200" dirty="0" err="1"/>
-              <a:t>netstat</a:t>
-            </a:r>
-            <a:r>
-              <a:rPr lang="en-US" altLang="ko-KR" sz="1200" dirty="0"/>
-              <a:t> -</a:t>
-            </a:r>
-            <a:r>
-              <a:rPr lang="en-US" altLang="ko-KR" sz="1200" dirty="0" err="1"/>
-              <a:t>antp</a:t>
-            </a:r>
-            <a:r>
-              <a:rPr lang="en-US" altLang="ko-KR" sz="1200" dirty="0"/>
-              <a:t> </a:t>
-            </a:r>
-            <a:r>
-              <a:rPr lang="ko-KR" altLang="en-US" sz="1200" dirty="0"/>
-              <a:t>로 </a:t>
-            </a:r>
-            <a:r>
-              <a:rPr lang="en-US" altLang="ko-KR" sz="1200" dirty="0"/>
-              <a:t>2049, 20048, 111 </a:t>
-            </a:r>
-            <a:r>
-              <a:rPr lang="ko-KR" altLang="en-US" sz="1200" dirty="0"/>
-              <a:t>포트에 붙는</a:t>
-            </a:r>
-          </a:p>
-          <a:p>
-            <a:r>
-              <a:rPr lang="en-US" altLang="ko-KR" sz="1200" dirty="0" err="1"/>
-              <a:t>ip</a:t>
-            </a:r>
-            <a:r>
-              <a:rPr lang="ko-KR" altLang="en-US" sz="1200" dirty="0"/>
-              <a:t>주소가 어떤지 확인한다</a:t>
-            </a:r>
-            <a:r>
-              <a:rPr lang="en-US" altLang="ko-KR" sz="1200" dirty="0"/>
-              <a:t>.</a:t>
-            </a:r>
-          </a:p>
-          <a:p>
-            <a:endParaRPr lang="en-US" altLang="ko-KR" sz="1200" dirty="0"/>
-          </a:p>
-          <a:p>
-            <a:r>
-              <a:rPr lang="ko-KR" altLang="en-US" sz="1200" dirty="0"/>
-              <a:t>이것을 확인해도 안될 경우</a:t>
-            </a:r>
-            <a:r>
-              <a:rPr lang="en-US" altLang="ko-KR" sz="1200" dirty="0"/>
-              <a:t>, /</a:t>
-            </a:r>
-            <a:r>
-              <a:rPr lang="en-US" altLang="ko-KR" sz="1200" dirty="0" err="1"/>
-              <a:t>var</a:t>
-            </a:r>
-            <a:r>
-              <a:rPr lang="en-US" altLang="ko-KR" sz="1200" dirty="0"/>
-              <a:t>/messages</a:t>
-            </a:r>
-            <a:r>
-              <a:rPr lang="ko-KR" altLang="en-US" sz="1200" dirty="0"/>
-              <a:t>의 로그를 확인한다</a:t>
-            </a:r>
-            <a:r>
-              <a:rPr lang="en-US" altLang="ko-KR" sz="1200" dirty="0"/>
-              <a:t>. </a:t>
-            </a:r>
-            <a:r>
-              <a:rPr lang="ko-KR" altLang="en-US" sz="1200" dirty="0"/>
-              <a:t>로그에서 </a:t>
-            </a:r>
-            <a:r>
-              <a:rPr lang="en-US" altLang="ko-KR" sz="1200" dirty="0"/>
-              <a:t>illegal port </a:t>
-            </a:r>
-            <a:r>
-              <a:rPr lang="ko-KR" altLang="en-US" sz="1200" dirty="0"/>
-              <a:t>라고 나올 경우</a:t>
-            </a:r>
-            <a:r>
-              <a:rPr lang="en-US" altLang="ko-KR" sz="1200" dirty="0"/>
-              <a:t>, /</a:t>
-            </a:r>
-            <a:r>
-              <a:rPr lang="en-US" altLang="ko-KR" sz="1200" dirty="0" err="1"/>
-              <a:t>etc</a:t>
-            </a:r>
-            <a:r>
-              <a:rPr lang="en-US" altLang="ko-KR" sz="1200" dirty="0"/>
-              <a:t>/exports</a:t>
-            </a:r>
-            <a:r>
-              <a:rPr lang="ko-KR" altLang="en-US" sz="1200" dirty="0"/>
-              <a:t>의 옵션에</a:t>
-            </a:r>
-          </a:p>
-          <a:p>
-            <a:r>
-              <a:rPr lang="en-US" altLang="ko-KR" sz="1200" dirty="0"/>
-              <a:t>insecure </a:t>
-            </a:r>
-            <a:r>
-              <a:rPr lang="ko-KR" altLang="en-US" sz="1200" dirty="0"/>
-              <a:t>옵션을 추가한다</a:t>
-            </a:r>
-            <a:r>
-              <a:rPr lang="en-US" altLang="ko-KR" sz="1200" dirty="0"/>
-              <a:t>.</a:t>
-            </a:r>
-            <a:endParaRPr lang="en-US" altLang="ko-KR" sz="1200" dirty="0" smtClean="0"/>
+            <a:pPr marL="800100" lvl="1" indent="-342900">
+              <a:buAutoNum type="arabicPeriod"/>
+            </a:pPr>
+            <a:endParaRPr lang="en-US" altLang="ko-KR" sz="1600" dirty="0"/>
+          </a:p>
+          <a:p>
+            <a:pPr marL="800100" lvl="1" indent="-342900">
+              <a:buAutoNum type="arabicPeriod"/>
+            </a:pPr>
+            <a:endParaRPr lang="en-US" altLang="ko-KR" sz="1600" dirty="0" smtClean="0"/>
+          </a:p>
+          <a:p>
+            <a:pPr marL="800100" lvl="1" indent="-342900">
+              <a:buAutoNum type="arabicPeriod"/>
+            </a:pPr>
+            <a:endParaRPr lang="en-US" altLang="ko-KR" sz="1600" dirty="0" smtClean="0"/>
+          </a:p>
+          <a:p>
+            <a:pPr marL="800100" lvl="1" indent="-342900">
+              <a:buAutoNum type="arabicPeriod"/>
+            </a:pPr>
+            <a:endParaRPr lang="en-US" altLang="ko-KR" sz="1600" dirty="0"/>
+          </a:p>
+          <a:p>
+            <a:pPr marL="800100" lvl="1" indent="-342900">
+              <a:buAutoNum type="arabicPeriod"/>
+            </a:pPr>
+            <a:endParaRPr lang="en-US" altLang="ko-KR" sz="1600" dirty="0" smtClean="0"/>
+          </a:p>
+          <a:p>
+            <a:pPr marL="800100" lvl="1" indent="-342900">
+              <a:buAutoNum type="arabicPeriod"/>
+            </a:pPr>
+            <a:endParaRPr lang="en-US" altLang="ko-KR" sz="1600" dirty="0" smtClean="0"/>
+          </a:p>
+          <a:p>
+            <a:pPr marL="800100" lvl="1" indent="-342900">
+              <a:buAutoNum type="arabicPeriod"/>
+            </a:pPr>
+            <a:endParaRPr lang="en-US" altLang="ko-KR" sz="1600" dirty="0" smtClean="0"/>
+          </a:p>
+          <a:p>
+            <a:pPr marL="800100" lvl="1" indent="-342900">
+              <a:buAutoNum type="arabicPeriod"/>
+            </a:pPr>
+            <a:endParaRPr lang="en-US" altLang="ko-KR" sz="1600" dirty="0"/>
           </a:p>
         </p:txBody>
       </p:sp>
+      <p:pic>
+        <p:nvPicPr>
+          <p:cNvPr id="4" name="그림 3"/>
+          <p:cNvPicPr>
+            <a:picLocks noChangeAspect="1"/>
+          </p:cNvPicPr>
+          <p:nvPr/>
+        </p:nvPicPr>
+        <p:blipFill>
+          <a:blip r:embed="rId2"/>
+          <a:stretch>
+            <a:fillRect/>
+          </a:stretch>
+        </p:blipFill>
+        <p:spPr>
+          <a:xfrm>
+            <a:off x="1831445" y="2526241"/>
+            <a:ext cx="5667375" cy="1619250"/>
+          </a:xfrm>
+          <a:prstGeom prst="rect">
+            <a:avLst/>
+          </a:prstGeom>
+        </p:spPr>
+      </p:pic>
     </p:spTree>
     <p:extLst>
       <p:ext uri="{BB962C8B-B14F-4D97-AF65-F5344CB8AC3E}">
-        <p14:creationId xmlns:p14="http://schemas.microsoft.com/office/powerpoint/2010/main" val="113075726"/>
+        <p14:creationId xmlns:p14="http://schemas.microsoft.com/office/powerpoint/2010/main" val="613004799"/>
       </p:ext>
     </p:extLst>
   </p:cSld>

--- a/docs/tech/ezApprovalG/문서유통 설치/문서유통 모듈 설치가이드.pptx
+++ b/docs/tech/ezApprovalG/문서유통 설치/문서유통 모듈 설치가이드.pptx
@@ -258,7 +258,7 @@
           <a:p>
             <a:fld id="{50EEB286-2530-481D-BB2C-E75D99E91DD0}" type="datetimeFigureOut">
               <a:rPr lang="ko-KR" altLang="en-US" smtClean="0"/>
-              <a:t>2019-12-24</a:t>
+              <a:t>2020-01-02</a:t>
             </a:fld>
             <a:endParaRPr lang="ko-KR" altLang="en-US"/>
           </a:p>
@@ -428,7 +428,7 @@
           <a:p>
             <a:fld id="{50EEB286-2530-481D-BB2C-E75D99E91DD0}" type="datetimeFigureOut">
               <a:rPr lang="ko-KR" altLang="en-US" smtClean="0"/>
-              <a:t>2019-12-24</a:t>
+              <a:t>2020-01-02</a:t>
             </a:fld>
             <a:endParaRPr lang="ko-KR" altLang="en-US"/>
           </a:p>
@@ -608,7 +608,7 @@
           <a:p>
             <a:fld id="{50EEB286-2530-481D-BB2C-E75D99E91DD0}" type="datetimeFigureOut">
               <a:rPr lang="ko-KR" altLang="en-US" smtClean="0"/>
-              <a:t>2019-12-24</a:t>
+              <a:t>2020-01-02</a:t>
             </a:fld>
             <a:endParaRPr lang="ko-KR" altLang="en-US"/>
           </a:p>
@@ -778,7 +778,7 @@
           <a:p>
             <a:fld id="{50EEB286-2530-481D-BB2C-E75D99E91DD0}" type="datetimeFigureOut">
               <a:rPr lang="ko-KR" altLang="en-US" smtClean="0"/>
-              <a:t>2019-12-24</a:t>
+              <a:t>2020-01-02</a:t>
             </a:fld>
             <a:endParaRPr lang="ko-KR" altLang="en-US"/>
           </a:p>
@@ -1024,7 +1024,7 @@
           <a:p>
             <a:fld id="{50EEB286-2530-481D-BB2C-E75D99E91DD0}" type="datetimeFigureOut">
               <a:rPr lang="ko-KR" altLang="en-US" smtClean="0"/>
-              <a:t>2019-12-24</a:t>
+              <a:t>2020-01-02</a:t>
             </a:fld>
             <a:endParaRPr lang="ko-KR" altLang="en-US"/>
           </a:p>
@@ -1256,7 +1256,7 @@
           <a:p>
             <a:fld id="{50EEB286-2530-481D-BB2C-E75D99E91DD0}" type="datetimeFigureOut">
               <a:rPr lang="ko-KR" altLang="en-US" smtClean="0"/>
-              <a:t>2019-12-24</a:t>
+              <a:t>2020-01-02</a:t>
             </a:fld>
             <a:endParaRPr lang="ko-KR" altLang="en-US"/>
           </a:p>
@@ -1623,7 +1623,7 @@
           <a:p>
             <a:fld id="{50EEB286-2530-481D-BB2C-E75D99E91DD0}" type="datetimeFigureOut">
               <a:rPr lang="ko-KR" altLang="en-US" smtClean="0"/>
-              <a:t>2019-12-24</a:t>
+              <a:t>2020-01-02</a:t>
             </a:fld>
             <a:endParaRPr lang="ko-KR" altLang="en-US"/>
           </a:p>
@@ -1741,7 +1741,7 @@
           <a:p>
             <a:fld id="{50EEB286-2530-481D-BB2C-E75D99E91DD0}" type="datetimeFigureOut">
               <a:rPr lang="ko-KR" altLang="en-US" smtClean="0"/>
-              <a:t>2019-12-24</a:t>
+              <a:t>2020-01-02</a:t>
             </a:fld>
             <a:endParaRPr lang="ko-KR" altLang="en-US"/>
           </a:p>
@@ -1836,7 +1836,7 @@
           <a:p>
             <a:fld id="{50EEB286-2530-481D-BB2C-E75D99E91DD0}" type="datetimeFigureOut">
               <a:rPr lang="ko-KR" altLang="en-US" smtClean="0"/>
-              <a:t>2019-12-24</a:t>
+              <a:t>2020-01-02</a:t>
             </a:fld>
             <a:endParaRPr lang="ko-KR" altLang="en-US"/>
           </a:p>
@@ -2113,7 +2113,7 @@
           <a:p>
             <a:fld id="{50EEB286-2530-481D-BB2C-E75D99E91DD0}" type="datetimeFigureOut">
               <a:rPr lang="ko-KR" altLang="en-US" smtClean="0"/>
-              <a:t>2019-12-24</a:t>
+              <a:t>2020-01-02</a:t>
             </a:fld>
             <a:endParaRPr lang="ko-KR" altLang="en-US"/>
           </a:p>
@@ -2366,7 +2366,7 @@
           <a:p>
             <a:fld id="{50EEB286-2530-481D-BB2C-E75D99E91DD0}" type="datetimeFigureOut">
               <a:rPr lang="ko-KR" altLang="en-US" smtClean="0"/>
-              <a:t>2019-12-24</a:t>
+              <a:t>2020-01-02</a:t>
             </a:fld>
             <a:endParaRPr lang="ko-KR" altLang="en-US"/>
           </a:p>
@@ -2579,7 +2579,7 @@
           <a:p>
             <a:fld id="{50EEB286-2530-481D-BB2C-E75D99E91DD0}" type="datetimeFigureOut">
               <a:rPr lang="ko-KR" altLang="en-US" smtClean="0"/>
-              <a:t>2019-12-24</a:t>
+              <a:t>2020-01-02</a:t>
             </a:fld>
             <a:endParaRPr lang="ko-KR" altLang="en-US"/>
           </a:p>
@@ -4627,7 +4627,7 @@
         <p:spPr>
           <a:xfrm>
             <a:off x="880110" y="3318510"/>
-            <a:ext cx="10469880" cy="861774"/>
+            <a:ext cx="10469880" cy="1415772"/>
           </a:xfrm>
           <a:prstGeom prst="rect">
             <a:avLst/>
@@ -4692,6 +4692,63 @@
             <a:r>
               <a:rPr lang="ko-KR" altLang="en-US" dirty="0" smtClean="0"/>
               <a:t> 입력</a:t>
+            </a:r>
+            <a:r>
+              <a:rPr lang="en-US" altLang="ko-KR" dirty="0" smtClean="0"/>
+              <a:t>.</a:t>
+            </a:r>
+          </a:p>
+          <a:p>
+            <a:pPr marL="800100" lvl="1" indent="-342900">
+              <a:buAutoNum type="arabicPeriod"/>
+            </a:pPr>
+            <a:r>
+              <a:rPr lang="en-US" altLang="ko-KR" dirty="0" err="1" smtClean="0"/>
+              <a:t>tbl_codelist</a:t>
+            </a:r>
+            <a:r>
+              <a:rPr lang="ko-KR" altLang="en-US" dirty="0" smtClean="0"/>
+              <a:t>에서 설정한 양식 경로에 양식을 </a:t>
+            </a:r>
+            <a:r>
+              <a:rPr lang="ko-KR" altLang="en-US" dirty="0" err="1" smtClean="0"/>
+              <a:t>추가해야하는데</a:t>
+            </a:r>
+            <a:r>
+              <a:rPr lang="en-US" altLang="ko-KR" dirty="0" smtClean="0"/>
+              <a:t>, </a:t>
+            </a:r>
+            <a:r>
+              <a:rPr lang="ko-KR" altLang="en-US" dirty="0" smtClean="0"/>
+              <a:t>각 사이트에서 사용하고 있는 </a:t>
+            </a:r>
+            <a:r>
+              <a:rPr lang="ko-KR" altLang="en-US" dirty="0" err="1" smtClean="0"/>
+              <a:t>대외발송</a:t>
+            </a:r>
+            <a:r>
+              <a:rPr lang="ko-KR" altLang="en-US" dirty="0" smtClean="0"/>
+              <a:t> 양식을 수정해서 대외발송접수 양식</a:t>
+            </a:r>
+            <a:r>
+              <a:rPr lang="en-US" altLang="ko-KR" dirty="0" smtClean="0"/>
+              <a:t>(</a:t>
+            </a:r>
+            <a:r>
+              <a:rPr lang="ko-KR" altLang="en-US" dirty="0" err="1" smtClean="0"/>
+              <a:t>껍데기양식</a:t>
+            </a:r>
+            <a:r>
+              <a:rPr lang="en-US" altLang="ko-KR" dirty="0" smtClean="0"/>
+              <a:t>)</a:t>
+            </a:r>
+            <a:r>
+              <a:rPr lang="ko-KR" altLang="en-US" dirty="0" smtClean="0"/>
+              <a:t>으로 </a:t>
+            </a:r>
+            <a:r>
+              <a:rPr lang="ko-KR" altLang="en-US" dirty="0" smtClean="0"/>
+              <a:t>사용한다</a:t>
             </a:r>
             <a:r>
               <a:rPr lang="en-US" altLang="ko-KR" dirty="0" smtClean="0"/>
@@ -7324,7 +7381,6 @@
               <a:rPr lang="en-US" altLang="ko-KR" sz="1600" dirty="0" smtClean="0"/>
               <a:t>……………………….</a:t>
             </a:r>
-            <a:endParaRPr lang="en-US" altLang="ko-KR" sz="1600" dirty="0" smtClean="0"/>
           </a:p>
           <a:p>
             <a:pPr marL="800100" lvl="1" indent="-342900">

--- a/docs/tech/ezApprovalG/문서유통 설치/문서유통 모듈 설치가이드.pptx
+++ b/docs/tech/ezApprovalG/문서유통 설치/문서유통 모듈 설치가이드.pptx
@@ -258,7 +258,7 @@
           <a:p>
             <a:fld id="{50EEB286-2530-481D-BB2C-E75D99E91DD0}" type="datetimeFigureOut">
               <a:rPr lang="ko-KR" altLang="en-US" smtClean="0"/>
-              <a:t>2020-01-02</a:t>
+              <a:t>2020-02-12</a:t>
             </a:fld>
             <a:endParaRPr lang="ko-KR" altLang="en-US"/>
           </a:p>
@@ -428,7 +428,7 @@
           <a:p>
             <a:fld id="{50EEB286-2530-481D-BB2C-E75D99E91DD0}" type="datetimeFigureOut">
               <a:rPr lang="ko-KR" altLang="en-US" smtClean="0"/>
-              <a:t>2020-01-02</a:t>
+              <a:t>2020-02-12</a:t>
             </a:fld>
             <a:endParaRPr lang="ko-KR" altLang="en-US"/>
           </a:p>
@@ -608,7 +608,7 @@
           <a:p>
             <a:fld id="{50EEB286-2530-481D-BB2C-E75D99E91DD0}" type="datetimeFigureOut">
               <a:rPr lang="ko-KR" altLang="en-US" smtClean="0"/>
-              <a:t>2020-01-02</a:t>
+              <a:t>2020-02-12</a:t>
             </a:fld>
             <a:endParaRPr lang="ko-KR" altLang="en-US"/>
           </a:p>
@@ -778,7 +778,7 @@
           <a:p>
             <a:fld id="{50EEB286-2530-481D-BB2C-E75D99E91DD0}" type="datetimeFigureOut">
               <a:rPr lang="ko-KR" altLang="en-US" smtClean="0"/>
-              <a:t>2020-01-02</a:t>
+              <a:t>2020-02-12</a:t>
             </a:fld>
             <a:endParaRPr lang="ko-KR" altLang="en-US"/>
           </a:p>
@@ -1024,7 +1024,7 @@
           <a:p>
             <a:fld id="{50EEB286-2530-481D-BB2C-E75D99E91DD0}" type="datetimeFigureOut">
               <a:rPr lang="ko-KR" altLang="en-US" smtClean="0"/>
-              <a:t>2020-01-02</a:t>
+              <a:t>2020-02-12</a:t>
             </a:fld>
             <a:endParaRPr lang="ko-KR" altLang="en-US"/>
           </a:p>
@@ -1256,7 +1256,7 @@
           <a:p>
             <a:fld id="{50EEB286-2530-481D-BB2C-E75D99E91DD0}" type="datetimeFigureOut">
               <a:rPr lang="ko-KR" altLang="en-US" smtClean="0"/>
-              <a:t>2020-01-02</a:t>
+              <a:t>2020-02-12</a:t>
             </a:fld>
             <a:endParaRPr lang="ko-KR" altLang="en-US"/>
           </a:p>
@@ -1623,7 +1623,7 @@
           <a:p>
             <a:fld id="{50EEB286-2530-481D-BB2C-E75D99E91DD0}" type="datetimeFigureOut">
               <a:rPr lang="ko-KR" altLang="en-US" smtClean="0"/>
-              <a:t>2020-01-02</a:t>
+              <a:t>2020-02-12</a:t>
             </a:fld>
             <a:endParaRPr lang="ko-KR" altLang="en-US"/>
           </a:p>
@@ -1741,7 +1741,7 @@
           <a:p>
             <a:fld id="{50EEB286-2530-481D-BB2C-E75D99E91DD0}" type="datetimeFigureOut">
               <a:rPr lang="ko-KR" altLang="en-US" smtClean="0"/>
-              <a:t>2020-01-02</a:t>
+              <a:t>2020-02-12</a:t>
             </a:fld>
             <a:endParaRPr lang="ko-KR" altLang="en-US"/>
           </a:p>
@@ -1836,7 +1836,7 @@
           <a:p>
             <a:fld id="{50EEB286-2530-481D-BB2C-E75D99E91DD0}" type="datetimeFigureOut">
               <a:rPr lang="ko-KR" altLang="en-US" smtClean="0"/>
-              <a:t>2020-01-02</a:t>
+              <a:t>2020-02-12</a:t>
             </a:fld>
             <a:endParaRPr lang="ko-KR" altLang="en-US"/>
           </a:p>
@@ -2113,7 +2113,7 @@
           <a:p>
             <a:fld id="{50EEB286-2530-481D-BB2C-E75D99E91DD0}" type="datetimeFigureOut">
               <a:rPr lang="ko-KR" altLang="en-US" smtClean="0"/>
-              <a:t>2020-01-02</a:t>
+              <a:t>2020-02-12</a:t>
             </a:fld>
             <a:endParaRPr lang="ko-KR" altLang="en-US"/>
           </a:p>
@@ -2366,7 +2366,7 @@
           <a:p>
             <a:fld id="{50EEB286-2530-481D-BB2C-E75D99E91DD0}" type="datetimeFigureOut">
               <a:rPr lang="ko-KR" altLang="en-US" smtClean="0"/>
-              <a:t>2020-01-02</a:t>
+              <a:t>2020-02-12</a:t>
             </a:fld>
             <a:endParaRPr lang="ko-KR" altLang="en-US"/>
           </a:p>
@@ -2579,7 +2579,7 @@
           <a:p>
             <a:fld id="{50EEB286-2530-481D-BB2C-E75D99E91DD0}" type="datetimeFigureOut">
               <a:rPr lang="ko-KR" altLang="en-US" smtClean="0"/>
-              <a:t>2020-01-02</a:t>
+              <a:t>2020-02-12</a:t>
             </a:fld>
             <a:endParaRPr lang="ko-KR" altLang="en-US"/>
           </a:p>
@@ -4744,11 +4744,7 @@
             </a:r>
             <a:r>
               <a:rPr lang="ko-KR" altLang="en-US" dirty="0" smtClean="0"/>
-              <a:t>으로 </a:t>
-            </a:r>
-            <a:r>
-              <a:rPr lang="ko-KR" altLang="en-US" dirty="0" smtClean="0"/>
-              <a:t>사용한다</a:t>
+              <a:t>으로 사용한다</a:t>
             </a:r>
             <a:r>
               <a:rPr lang="en-US" altLang="ko-KR" dirty="0" smtClean="0"/>
@@ -5719,7 +5715,7 @@
         <p:spPr>
           <a:xfrm>
             <a:off x="948690" y="651510"/>
-            <a:ext cx="10469880" cy="4555093"/>
+            <a:ext cx="10469880" cy="4801314"/>
           </a:xfrm>
           <a:prstGeom prst="rect">
             <a:avLst/>
@@ -5837,8 +5833,73 @@
             </a:r>
             <a:r>
               <a:rPr lang="en-US" altLang="ko-KR" sz="1600" dirty="0" smtClean="0"/>
+              <a:t>. (</a:t>
+            </a:r>
+            <a:r>
+              <a:rPr lang="ko-KR" altLang="en-US" sz="1600" dirty="0" smtClean="0"/>
+              <a:t>보통은 인터넷망으로 </a:t>
+            </a:r>
+            <a:r>
+              <a:rPr lang="ko-KR" altLang="en-US" sz="1600" dirty="0" err="1" smtClean="0"/>
+              <a:t>들어온걸</a:t>
+            </a:r>
+            <a:r>
+              <a:rPr lang="ko-KR" altLang="en-US" sz="1600" dirty="0" smtClean="0"/>
+              <a:t> </a:t>
+            </a:r>
+            <a:r>
+              <a:rPr lang="en-US" altLang="ko-KR" sz="1600" dirty="0" smtClean="0"/>
+              <a:t>NAT</a:t>
+            </a:r>
+            <a:r>
+              <a:rPr lang="ko-KR" altLang="en-US" sz="1600" dirty="0" smtClean="0"/>
+              <a:t>를 통해 </a:t>
+            </a:r>
+            <a:r>
+              <a:rPr lang="en-US" altLang="ko-KR" sz="1600" dirty="0" err="1" smtClean="0"/>
+              <a:t>ip</a:t>
+            </a:r>
+            <a:r>
+              <a:rPr lang="ko-KR" altLang="en-US" sz="1600" dirty="0" smtClean="0"/>
+              <a:t>를 바꿔주므로 공인</a:t>
+            </a:r>
+            <a:r>
+              <a:rPr lang="en-US" altLang="ko-KR" sz="1600" dirty="0" err="1" smtClean="0"/>
+              <a:t>ip</a:t>
+            </a:r>
+            <a:r>
+              <a:rPr lang="ko-KR" altLang="en-US" sz="1600" dirty="0" smtClean="0"/>
+              <a:t>로 신청할 경우가 많음</a:t>
+            </a:r>
+            <a:r>
+              <a:rPr lang="en-US" altLang="ko-KR" sz="1600" dirty="0" smtClean="0"/>
               <a:t>.</a:t>
             </a:r>
+            <a:r>
+              <a:rPr lang="ko-KR" altLang="en-US" sz="1600" dirty="0" smtClean="0"/>
+              <a:t> 따라서</a:t>
+            </a:r>
+            <a:r>
+              <a:rPr lang="en-US" altLang="ko-KR" sz="1600" dirty="0" smtClean="0"/>
+              <a:t>,</a:t>
+            </a:r>
+            <a:r>
+              <a:rPr lang="ko-KR" altLang="en-US" sz="1600" dirty="0" smtClean="0"/>
+              <a:t> 공인</a:t>
+            </a:r>
+            <a:r>
+              <a:rPr lang="en-US" altLang="ko-KR" sz="1600" dirty="0" err="1" smtClean="0"/>
+              <a:t>ip</a:t>
+            </a:r>
+            <a:r>
+              <a:rPr lang="ko-KR" altLang="en-US" sz="1600" dirty="0" smtClean="0"/>
+              <a:t>를 입력해야 정상동작하는 경우가 많음</a:t>
+            </a:r>
+            <a:r>
+              <a:rPr lang="en-US" altLang="ko-KR" sz="1600" dirty="0" smtClean="0"/>
+              <a:t>.)</a:t>
+            </a:r>
+            <a:endParaRPr lang="en-US" altLang="ko-KR" sz="1600" dirty="0" smtClean="0"/>
           </a:p>
           <a:p>
             <a:pPr marL="800100" lvl="1" indent="-342900">
@@ -5860,7 +5921,11 @@
             </a:pPr>
             <a:r>
               <a:rPr lang="en-US" altLang="ko-KR" sz="1600" dirty="0" smtClean="0"/>
-              <a:t>/home/</a:t>
+              <a:t>/</a:t>
+            </a:r>
+            <a:r>
+              <a:rPr lang="en-US" altLang="ko-KR" sz="1600" dirty="0" smtClean="0"/>
+              <a:t>home/</a:t>
             </a:r>
             <a:r>
               <a:rPr lang="en-US" altLang="ko-KR" sz="1600" dirty="0" err="1" smtClean="0"/>
@@ -6034,7 +6099,7 @@
         </p:blipFill>
         <p:spPr>
           <a:xfrm>
-            <a:off x="1335087" y="2216150"/>
+            <a:off x="1335087" y="2473847"/>
             <a:ext cx="5000625" cy="1866900"/>
           </a:xfrm>
           <a:prstGeom prst="rect">
@@ -6058,7 +6123,7 @@
         </p:blipFill>
         <p:spPr>
           <a:xfrm>
-            <a:off x="1335087" y="4556125"/>
+            <a:off x="1335087" y="4689129"/>
             <a:ext cx="4610100" cy="819150"/>
           </a:xfrm>
           <a:prstGeom prst="rect">
@@ -8037,7 +8102,7 @@
         <p:spPr>
           <a:xfrm>
             <a:off x="948690" y="651510"/>
-            <a:ext cx="10469880" cy="3847207"/>
+            <a:ext cx="10469880" cy="4832092"/>
           </a:xfrm>
           <a:prstGeom prst="rect">
             <a:avLst/>
@@ -8178,6 +8243,71 @@
             <a:r>
               <a:rPr lang="en-US" altLang="ko-KR" sz="1600" dirty="0" smtClean="0"/>
               <a:t>.</a:t>
+            </a:r>
+            <a:br>
+              <a:rPr lang="en-US" altLang="ko-KR" sz="1600" dirty="0" smtClean="0"/>
+            </a:br>
+            <a:r>
+              <a:rPr lang="en-US" altLang="ko-KR" sz="1600" dirty="0" smtClean="0"/>
+              <a:t/>
+            </a:r>
+            <a:br>
+              <a:rPr lang="en-US" altLang="ko-KR" sz="1600" dirty="0" smtClean="0"/>
+            </a:br>
+            <a:r>
+              <a:rPr lang="en-US" altLang="ko-KR" sz="1600" dirty="0" smtClean="0"/>
+              <a:t>* </a:t>
+            </a:r>
+            <a:r>
+              <a:rPr lang="ko-KR" altLang="en-US" sz="1600" dirty="0" smtClean="0"/>
+              <a:t>임시라이센스의 경우</a:t>
+            </a:r>
+            <a:r>
+              <a:rPr lang="en-US" altLang="ko-KR" sz="1600" dirty="0" smtClean="0"/>
+              <a:t>, 3</a:t>
+            </a:r>
+            <a:r>
+              <a:rPr lang="ko-KR" altLang="en-US" sz="1600" dirty="0" smtClean="0"/>
+              <a:t>개월이 되어도 서비스가 </a:t>
+            </a:r>
+            <a:r>
+              <a:rPr lang="ko-KR" altLang="en-US" sz="1600" dirty="0" err="1" smtClean="0"/>
+              <a:t>종료되진</a:t>
+            </a:r>
+            <a:r>
+              <a:rPr lang="ko-KR" altLang="en-US" sz="1600" dirty="0" smtClean="0"/>
+              <a:t> 않지만 </a:t>
+            </a:r>
+            <a:r>
+              <a:rPr lang="ko-KR" altLang="en-US" sz="1600" dirty="0" err="1" smtClean="0"/>
+              <a:t>유통모듈을</a:t>
+            </a:r>
+            <a:r>
+              <a:rPr lang="ko-KR" altLang="en-US" sz="1600" dirty="0" smtClean="0"/>
+              <a:t> </a:t>
+            </a:r>
+            <a:r>
+              <a:rPr lang="ko-KR" altLang="en-US" sz="1600" dirty="0" err="1" smtClean="0"/>
+              <a:t>재시작하면</a:t>
+            </a:r>
+            <a:r>
+              <a:rPr lang="ko-KR" altLang="en-US" sz="1600" dirty="0" smtClean="0"/>
+              <a:t> 시작 시 에러가 발생함</a:t>
+            </a:r>
+            <a:r>
+              <a:rPr lang="en-US" altLang="ko-KR" sz="1600" dirty="0" smtClean="0"/>
+              <a:t>.</a:t>
+            </a:r>
+            <a:r>
+              <a:rPr lang="en-US" altLang="ko-KR" sz="1600" dirty="0" smtClean="0"/>
+              <a:t/>
+            </a:r>
+            <a:br>
+              <a:rPr lang="en-US" altLang="ko-KR" sz="1600" dirty="0" smtClean="0"/>
+            </a:br>
+            <a:r>
+              <a:rPr lang="en-US" altLang="ko-KR" sz="1600" dirty="0" smtClean="0"/>
+              <a:t/>
             </a:r>
             <a:br>
               <a:rPr lang="en-US" altLang="ko-KR" sz="1600" dirty="0" smtClean="0"/>
@@ -8304,7 +8434,7 @@
         </p:blipFill>
         <p:spPr>
           <a:xfrm>
-            <a:off x="1831445" y="2526241"/>
+            <a:off x="1781569" y="3590270"/>
             <a:ext cx="5667375" cy="1619250"/>
           </a:xfrm>
           <a:prstGeom prst="rect">
